--- a/0_Documents/Lumify_Praesentation.pptx
+++ b/0_Documents/Lumify_Praesentation.pptx
@@ -5,7 +5,7 @@
     <p:sldMasterId id="2147483648" r:id="rId1"/>
   </p:sldMasterIdLst>
   <p:notesMasterIdLst>
-    <p:notesMasterId r:id="rId20"/>
+    <p:notesMasterId r:id="rId19"/>
   </p:notesMasterIdLst>
   <p:sldIdLst>
     <p:sldId id="256" r:id="rId2"/>
@@ -21,11 +21,10 @@
     <p:sldId id="266" r:id="rId12"/>
     <p:sldId id="267" r:id="rId13"/>
     <p:sldId id="268" r:id="rId14"/>
-    <p:sldId id="269" r:id="rId15"/>
-    <p:sldId id="270" r:id="rId16"/>
-    <p:sldId id="271" r:id="rId17"/>
-    <p:sldId id="272" r:id="rId18"/>
-    <p:sldId id="273" r:id="rId19"/>
+    <p:sldId id="270" r:id="rId15"/>
+    <p:sldId id="271" r:id="rId16"/>
+    <p:sldId id="272" r:id="rId17"/>
+    <p:sldId id="273" r:id="rId18"/>
   </p:sldIdLst>
   <p:sldSz cx="12192000" cy="6858000"/>
   <p:notesSz cx="6858000" cy="9144000"/>
@@ -453,7 +452,7 @@
           <a:lstStyle/>
           <a:p>
             <a:r>
-              <a:t>Die Architektur ist eine klassische Drei-Schichten-Trennung. Das Frontend im Browser ruft die .NET-API über HTTPS und JSON auf - normale CRUD-Operationen. Die API enthält die Logik, die Services und die Sicherheitsschicht und spricht über Entity Framework mit der relationalen Datenbank. In der DB gibt es nicht nur Tabellen, sondern auch Views und Trigger - zum Beispiel synchronisiert ein Trigger automatisch den Status einer Todo-Liste, wenn man Eintraege abhakt. Und parallel laeuft die Echtzeit-Schiene: der SignalR-Client hält eine Dauerverbindung zu den Hubs, über die Live-Updates zurückkommen.</a:t>
+              <a:t>Qualität und Sicherheit waren von Anfang an Anforderungen, keine Nachgedanken. Authentifizierung inkl. Mehr-Faktor, eine eigene CSRF-Middleware, geschützte Endpunkte mit getrennten DTOs - die Datenbankmodelle gehen also nie direkt nach aussen. Optimistic-UI mit sauberem Rollback bei Fehlern. Beim Code habe ich auf Objektorientierung, Lesbarkeit und einen dokumentierten Komponentenbaum geachtet, und es gibt ein eigenes Testprojekt mit xUnit, das die Logik absichert.</a:t>
             </a:r>
           </a:p>
         </p:txBody>
@@ -523,7 +522,7 @@
           <a:lstStyle/>
           <a:p>
             <a:r>
-              <a:t>Qualität und Sicherheit waren von Anfang an Anforderungen, keine Nachgedanken. Authentifizierung inkl. Mehr-Faktor, eine eigene CSRF-Middleware, geschützte Endpunkte mit getrennten DTOs - die Datenbankmodelle gehen also nie direkt nach aussen. Optimistic-UI mit sauberem Rollback bei Fehlern. Beim Code habe ich auf Objektorientierung, Lesbarkeit und einen dokumentierten Komponentenbaum geachtet, und es gibt ein eigenes Testprojekt mit xUnit, das die Logik absichert.</a:t>
+              <a:t>Das Projekt lief von Anfang Mai bis Anfang Juli 2026 mit wöchentlichen Status-Updates. Es ist vollständig dokumentiert: Projektauftrag, Lasten- und Pflichtenheft, Projekthandbuch, Benutzerhandbuch und mehrere Statusberichte. Heute, am 24. Juni, ist die Kern-App lauffähig - die drei Features, Workspaces, Echtzeit und die Usersysteme stehen. Bis zum Projektende am 1. Juli geht es um Feinschliff und Abschluss der Doku.</a:t>
             </a:r>
           </a:p>
         </p:txBody>
@@ -593,7 +592,7 @@
           <a:lstStyle/>
           <a:p>
             <a:r>
-              <a:t>Das Projekt lief von Anfang Mai bis Anfang Juli 2026 mit wöchentlichen Status-Updates. Es ist vollständig dokumentiert: Projektauftrag, Lasten- und Pflichtenheft, Projekthandbuch, Benutzerhandbuch und mehrere Statusberichte. Heute, am 24. Juni, ist die Kern-App lauffähig - die drei Features, Workspaces, Echtzeit und die Usersysteme stehen. Bis zum Projektende am 1. Juli geht es um Feinschliff und Abschluss der Doku.</a:t>
+              <a:t>Der Ausblick zeigt, warum der erweiterbare Aufbau so wichtig war: kuenftige Features sind schlicht neue Module, die man andockt - ein Whiteboard, Dateiablage oder Tabellen zum Beispiel. Daneben Themen wie bessere Responsiveness, feinere Rollen und Rechte in Workspaces, Benachrichtigungen, skalierbares Cloud-Hosting und weitere Themes. Die Idee war nie eine fertige, geschlossene App, sondern eine Basis, die mitwächst.</a:t>
             </a:r>
           </a:p>
         </p:txBody>
@@ -663,76 +662,6 @@
           <a:lstStyle/>
           <a:p>
             <a:r>
-              <a:t>Der Ausblick zeigt, warum der erweiterbare Aufbau so wichtig war: kuenftige Features sind schlicht neue Module, die man andockt - ein Whiteboard, Dateiablage oder Tabellen zum Beispiel. Daneben Themen wie bessere Responsiveness, feinere Rollen und Rechte in Workspaces, Benachrichtigungen, skalierbares Cloud-Hosting und weitere Themes. Die Idee war nie eine fertige, geschlossene App, sondern eine Basis, die mitwächst.</a:t>
-            </a:r>
-          </a:p>
-        </p:txBody>
-      </p:sp>
-      <p:sp>
-        <p:nvSpPr>
-          <p:cNvPr id="4" name="Slide Number Placeholder 3"/>
-          <p:cNvSpPr>
-            <a:spLocks noGrp="1"/>
-          </p:cNvSpPr>
-          <p:nvPr>
-            <p:ph type="sldNum" sz="quarter" idx="5"/>
-          </p:nvPr>
-        </p:nvSpPr>
-        <p:spPr/>
-      </p:sp>
-    </p:spTree>
-  </p:cSld>
-  <p:clrMapOvr>
-    <a:masterClrMapping/>
-  </p:clrMapOvr>
-</p:notes>
-</file>
-
-<file path=ppt/notesSlides/notesSlide15.xml><?xml version="1.0" encoding="utf-8"?>
-<p:notes xmlns:a="http://schemas.openxmlformats.org/drawingml/2006/main" xmlns:r="http://schemas.openxmlformats.org/officeDocument/2006/relationships" xmlns:p="http://schemas.openxmlformats.org/presentationml/2006/main">
-  <p:cSld>
-    <p:spTree>
-      <p:nvGrpSpPr>
-        <p:cNvPr id="1" name=""/>
-        <p:cNvGrpSpPr/>
-        <p:nvPr/>
-      </p:nvGrpSpPr>
-      <p:grpSpPr>
-        <a:xfrm>
-          <a:off x="0" y="0"/>
-          <a:ext cx="0" cy="0"/>
-          <a:chOff x="0" y="0"/>
-          <a:chExt cx="0" cy="0"/>
-        </a:xfrm>
-      </p:grpSpPr>
-      <p:sp>
-        <p:nvSpPr>
-          <p:cNvPr id="2" name="Slide Image Placeholder 1"/>
-          <p:cNvSpPr>
-            <a:spLocks noGrp="1" noRot="1" noChangeAspect="1"/>
-          </p:cNvSpPr>
-          <p:nvPr>
-            <p:ph type="sldImg" idx="2"/>
-          </p:nvPr>
-        </p:nvSpPr>
-        <p:spPr/>
-      </p:sp>
-      <p:sp>
-        <p:nvSpPr>
-          <p:cNvPr id="3" name="Notes Placeholder 2"/>
-          <p:cNvSpPr>
-            <a:spLocks noGrp="1"/>
-          </p:cNvSpPr>
-          <p:nvPr>
-            <p:ph type="body" sz="quarter" idx="3"/>
-          </p:nvPr>
-        </p:nvSpPr>
-        <p:spPr/>
-        <p:txBody>
-          <a:bodyPr/>
-          <a:lstStyle/>
-          <a:p>
-            <a:r>
               <a:t>Damit bin ich am Ende. Zusammengefasst: Lumify bündelt Notizen, Todos und Events in gekapselten, erweiterbaren Spaces, mit echter Echtzeit-Zusammenarbeit auf einem modernen Next.js-/.NET-Stack. Vielen Dank fürs Zuhören - ich beantworte gerne Fragen oder zeige die App kurz live.</a:t>
             </a:r>
           </a:p>
@@ -1497,7 +1426,7 @@
           <a:p>
             <a:fld id="{5BCAD085-E8A6-8845-BD4E-CB4CCA059FC4}" type="datetimeFigureOut">
               <a:rPr lang="en-US" smtClean="0"/>
-              <a:t>6/24/2026</a:t>
+              <a:t>6/25/2026</a:t>
             </a:fld>
             <a:endParaRPr lang="en-US"/>
           </a:p>
@@ -1665,7 +1594,7 @@
           <a:p>
             <a:fld id="{5BCAD085-E8A6-8845-BD4E-CB4CCA059FC4}" type="datetimeFigureOut">
               <a:rPr lang="en-US" smtClean="0"/>
-              <a:t>6/24/2026</a:t>
+              <a:t>6/25/2026</a:t>
             </a:fld>
             <a:endParaRPr lang="en-US"/>
           </a:p>
@@ -1843,7 +1772,7 @@
           <a:p>
             <a:fld id="{5BCAD085-E8A6-8845-BD4E-CB4CCA059FC4}" type="datetimeFigureOut">
               <a:rPr lang="en-US" smtClean="0"/>
-              <a:t>6/24/2026</a:t>
+              <a:t>6/25/2026</a:t>
             </a:fld>
             <a:endParaRPr lang="en-US"/>
           </a:p>
@@ -2011,7 +1940,7 @@
           <a:p>
             <a:fld id="{5BCAD085-E8A6-8845-BD4E-CB4CCA059FC4}" type="datetimeFigureOut">
               <a:rPr lang="en-US" smtClean="0"/>
-              <a:t>6/24/2026</a:t>
+              <a:t>6/25/2026</a:t>
             </a:fld>
             <a:endParaRPr lang="en-US"/>
           </a:p>
@@ -2256,7 +2185,7 @@
           <a:p>
             <a:fld id="{5BCAD085-E8A6-8845-BD4E-CB4CCA059FC4}" type="datetimeFigureOut">
               <a:rPr lang="en-US" smtClean="0"/>
-              <a:t>6/24/2026</a:t>
+              <a:t>6/25/2026</a:t>
             </a:fld>
             <a:endParaRPr lang="en-US"/>
           </a:p>
@@ -2541,7 +2470,7 @@
           <a:p>
             <a:fld id="{5BCAD085-E8A6-8845-BD4E-CB4CCA059FC4}" type="datetimeFigureOut">
               <a:rPr lang="en-US" smtClean="0"/>
-              <a:t>6/24/2026</a:t>
+              <a:t>6/25/2026</a:t>
             </a:fld>
             <a:endParaRPr lang="en-US"/>
           </a:p>
@@ -2960,7 +2889,7 @@
           <a:p>
             <a:fld id="{5BCAD085-E8A6-8845-BD4E-CB4CCA059FC4}" type="datetimeFigureOut">
               <a:rPr lang="en-US" smtClean="0"/>
-              <a:t>6/24/2026</a:t>
+              <a:t>6/25/2026</a:t>
             </a:fld>
             <a:endParaRPr lang="en-US"/>
           </a:p>
@@ -3077,7 +3006,7 @@
           <a:p>
             <a:fld id="{5BCAD085-E8A6-8845-BD4E-CB4CCA059FC4}" type="datetimeFigureOut">
               <a:rPr lang="en-US" smtClean="0"/>
-              <a:t>6/24/2026</a:t>
+              <a:t>6/25/2026</a:t>
             </a:fld>
             <a:endParaRPr lang="en-US"/>
           </a:p>
@@ -3172,7 +3101,7 @@
           <a:p>
             <a:fld id="{5BCAD085-E8A6-8845-BD4E-CB4CCA059FC4}" type="datetimeFigureOut">
               <a:rPr lang="en-US" smtClean="0"/>
-              <a:t>6/24/2026</a:t>
+              <a:t>6/25/2026</a:t>
             </a:fld>
             <a:endParaRPr lang="en-US"/>
           </a:p>
@@ -3447,7 +3376,7 @@
           <a:p>
             <a:fld id="{5BCAD085-E8A6-8845-BD4E-CB4CCA059FC4}" type="datetimeFigureOut">
               <a:rPr lang="en-US" smtClean="0"/>
-              <a:t>6/24/2026</a:t>
+              <a:t>6/25/2026</a:t>
             </a:fld>
             <a:endParaRPr lang="en-US"/>
           </a:p>
@@ -3699,7 +3628,7 @@
           <a:p>
             <a:fld id="{5BCAD085-E8A6-8845-BD4E-CB4CCA059FC4}" type="datetimeFigureOut">
               <a:rPr lang="en-US" smtClean="0"/>
-              <a:t>6/24/2026</a:t>
+              <a:t>6/25/2026</a:t>
             </a:fld>
             <a:endParaRPr lang="en-US"/>
           </a:p>
@@ -3910,7 +3839,7 @@
           <a:p>
             <a:fld id="{5BCAD085-E8A6-8845-BD4E-CB4CCA059FC4}" type="datetimeFigureOut">
               <a:rPr lang="en-US" smtClean="0"/>
-              <a:t>6/24/2026</a:t>
+              <a:t>6/25/2026</a:t>
             </a:fld>
             <a:endParaRPr lang="en-US"/>
           </a:p>
@@ -9771,7 +9700,7 @@
                 </a:solidFill>
                 <a:latin typeface="Trebuchet MS"/>
               </a:rPr>
-              <a:t>WIE ALLES ZUSAMMENSPIELT</a:t>
+              <a:t>SOLIDE GEBAUT</a:t>
             </a:r>
           </a:p>
           <a:p>
@@ -9790,7 +9719,7 @@
                 </a:solidFill>
                 <a:latin typeface="Trebuchet MS"/>
               </a:rPr>
-              <a:t>Architektur</a:t>
+              <a:t>Sicherheit &amp; Qualität</a:t>
             </a:r>
           </a:p>
         </p:txBody>
@@ -9874,21 +9803,115 @@
                 </a:solidFill>
                 <a:latin typeface="Trebuchet MS"/>
               </a:rPr>
-              <a:t>14</a:t>
-            </a:r>
-          </a:p>
-        </p:txBody>
-      </p:sp>
-      <p:sp>
-        <p:nvSpPr>
-          <p:cNvPr id="25" name="TextBox 24"/>
+              <a:t>15</a:t>
+            </a:r>
+          </a:p>
+        </p:txBody>
+      </p:sp>
+      <p:sp>
+        <p:nvSpPr>
+          <p:cNvPr id="9" name="Rounded Rectangle 8"/>
+          <p:cNvSpPr/>
+          <p:nvPr/>
+        </p:nvSpPr>
+        <p:spPr>
+          <a:xfrm>
+            <a:off x="868680" y="1691640"/>
+            <a:ext cx="5074920" cy="1234440"/>
+          </a:xfrm>
+          <a:prstGeom prst="roundRect">
+            <a:avLst>
+              <a:gd name="adj" fmla="val 8000"/>
+            </a:avLst>
+          </a:prstGeom>
+          <a:solidFill>
+            <a:srgbClr val="3A2F66"/>
+          </a:solidFill>
+          <a:ln>
+            <a:noFill/>
+          </a:ln>
+          <a:effectLst/>
+        </p:spPr>
+        <p:style>
+          <a:lnRef idx="1">
+            <a:schemeClr val="accent1"/>
+          </a:lnRef>
+          <a:fillRef idx="3">
+            <a:schemeClr val="accent1"/>
+          </a:fillRef>
+          <a:effectRef idx="2">
+            <a:schemeClr val="accent1"/>
+          </a:effectRef>
+          <a:fontRef idx="minor">
+            <a:schemeClr val="lt1"/>
+          </a:fontRef>
+        </p:style>
+        <p:txBody>
+          <a:bodyPr rtlCol="0" anchor="ctr"/>
+          <a:lstStyle/>
+          <a:p>
+            <a:pPr algn="ctr"/>
+            <a:endParaRPr/>
+          </a:p>
+        </p:txBody>
+      </p:sp>
+      <p:sp>
+        <p:nvSpPr>
+          <p:cNvPr id="10" name="Rounded Rectangle 9"/>
+          <p:cNvSpPr/>
+          <p:nvPr/>
+        </p:nvSpPr>
+        <p:spPr>
+          <a:xfrm>
+            <a:off x="1124712" y="1947672"/>
+            <a:ext cx="82296" cy="713232"/>
+          </a:xfrm>
+          <a:prstGeom prst="roundRect">
+            <a:avLst>
+              <a:gd name="adj" fmla="val 50000"/>
+            </a:avLst>
+          </a:prstGeom>
+          <a:solidFill>
+            <a:srgbClr val="44B9C9"/>
+          </a:solidFill>
+          <a:ln>
+            <a:noFill/>
+          </a:ln>
+          <a:effectLst/>
+        </p:spPr>
+        <p:style>
+          <a:lnRef idx="1">
+            <a:schemeClr val="accent1"/>
+          </a:lnRef>
+          <a:fillRef idx="3">
+            <a:schemeClr val="accent1"/>
+          </a:fillRef>
+          <a:effectRef idx="2">
+            <a:schemeClr val="accent1"/>
+          </a:effectRef>
+          <a:fontRef idx="minor">
+            <a:schemeClr val="lt1"/>
+          </a:fontRef>
+        </p:style>
+        <p:txBody>
+          <a:bodyPr rtlCol="0" anchor="ctr"/>
+          <a:lstStyle/>
+          <a:p>
+            <a:pPr algn="ctr"/>
+            <a:endParaRPr/>
+          </a:p>
+        </p:txBody>
+      </p:sp>
+      <p:sp>
+        <p:nvSpPr>
+          <p:cNvPr id="11" name="TextBox 10"/>
           <p:cNvSpPr txBox="1"/>
           <p:nvPr/>
         </p:nvSpPr>
         <p:spPr>
           <a:xfrm>
-            <a:off x="868680" y="5440680"/>
-            <a:ext cx="10424160" cy="731520"/>
+            <a:off x="1417320" y="1874520"/>
+            <a:ext cx="4343400" cy="914400"/>
           </a:xfrm>
           <a:prstGeom prst="rect">
             <a:avLst/>
@@ -9906,26 +9929,1096 @@
                 <a:spcPts val="0"/>
               </a:spcBef>
               <a:spcAft>
-                <a:spcPts val="0"/>
-              </a:spcAft>
-            </a:pPr>
-            <a:r>
-              <a:rPr sz="1350" b="1" i="0">
-                <a:solidFill>
-                  <a:srgbClr val="FFA228"/>
-                </a:solidFill>
-                <a:latin typeface="Trebuchet MS"/>
-              </a:rPr>
-              <a:t>Echtzeit:  </a:t>
-            </a:r>
-            <a:r>
-              <a:rPr sz="1350" b="0" i="0">
+                <a:spcPts val="300"/>
+              </a:spcAft>
+            </a:pPr>
+            <a:r>
+              <a:rPr sz="1550" b="1" i="0" dirty="0" err="1">
                 <a:solidFill>
                   <a:srgbClr val="F1EDE6"/>
                 </a:solidFill>
                 <a:latin typeface="Trebuchet MS"/>
               </a:rPr>
-              <a:t>Parallel zu den REST-Aufrufen hält der SignalR-Client eine Dauerverbindung zu den Hubs - darüber kommen Live-Updates zurück ins Frontend.</a:t>
+              <a:t>Authentifizierung</a:t>
+            </a:r>
+            <a:endParaRPr sz="1550" b="1" i="0" dirty="0">
+              <a:solidFill>
+                <a:srgbClr val="F1EDE6"/>
+              </a:solidFill>
+              <a:latin typeface="Trebuchet MS"/>
+            </a:endParaRPr>
+          </a:p>
+          <a:p>
+            <a:pPr algn="l">
+              <a:spcBef>
+                <a:spcPts val="0"/>
+              </a:spcBef>
+              <a:spcAft>
+                <a:spcPts val="0"/>
+              </a:spcAft>
+            </a:pPr>
+            <a:r>
+              <a:rPr sz="1200" b="0" i="0" dirty="0">
+                <a:solidFill>
+                  <a:srgbClr val="B9AFD6"/>
+                </a:solidFill>
+                <a:latin typeface="Trebuchet MS"/>
+              </a:rPr>
+              <a:t>Login/</a:t>
+            </a:r>
+            <a:r>
+              <a:rPr sz="1200" b="0" i="0" dirty="0" err="1">
+                <a:solidFill>
+                  <a:srgbClr val="B9AFD6"/>
+                </a:solidFill>
+                <a:latin typeface="Trebuchet MS"/>
+              </a:rPr>
+              <a:t>Registrierung</a:t>
+            </a:r>
+            <a:r>
+              <a:rPr sz="1200" b="0" i="0" dirty="0">
+                <a:solidFill>
+                  <a:srgbClr val="B9AFD6"/>
+                </a:solidFill>
+                <a:latin typeface="Trebuchet MS"/>
+              </a:rPr>
+              <a:t> </a:t>
+            </a:r>
+            <a:r>
+              <a:rPr sz="1200" b="0" i="0" dirty="0" err="1">
+                <a:solidFill>
+                  <a:srgbClr val="B9AFD6"/>
+                </a:solidFill>
+                <a:latin typeface="Trebuchet MS"/>
+              </a:rPr>
+              <a:t>mit</a:t>
+            </a:r>
+            <a:r>
+              <a:rPr sz="1200" b="0" i="0" dirty="0">
+                <a:solidFill>
+                  <a:srgbClr val="B9AFD6"/>
+                </a:solidFill>
+                <a:latin typeface="Trebuchet MS"/>
+              </a:rPr>
+              <a:t> Mehr-Faktor-</a:t>
+            </a:r>
+            <a:r>
+              <a:rPr sz="1200" b="0" i="0" dirty="0" err="1">
+                <a:solidFill>
+                  <a:srgbClr val="B9AFD6"/>
+                </a:solidFill>
+                <a:latin typeface="Trebuchet MS"/>
+              </a:rPr>
+              <a:t>Authentifizierung</a:t>
+            </a:r>
+            <a:r>
+              <a:rPr sz="1200" b="0" i="0" dirty="0">
+                <a:solidFill>
+                  <a:srgbClr val="B9AFD6"/>
+                </a:solidFill>
+                <a:latin typeface="Trebuchet MS"/>
+              </a:rPr>
+              <a:t> (MFA).</a:t>
+            </a:r>
+          </a:p>
+        </p:txBody>
+      </p:sp>
+      <p:sp>
+        <p:nvSpPr>
+          <p:cNvPr id="12" name="Rounded Rectangle 11"/>
+          <p:cNvSpPr/>
+          <p:nvPr/>
+        </p:nvSpPr>
+        <p:spPr>
+          <a:xfrm>
+            <a:off x="6217920" y="1691640"/>
+            <a:ext cx="5074920" cy="1234440"/>
+          </a:xfrm>
+          <a:prstGeom prst="roundRect">
+            <a:avLst>
+              <a:gd name="adj" fmla="val 8000"/>
+            </a:avLst>
+          </a:prstGeom>
+          <a:solidFill>
+            <a:srgbClr val="3A2F66"/>
+          </a:solidFill>
+          <a:ln>
+            <a:noFill/>
+          </a:ln>
+          <a:effectLst/>
+        </p:spPr>
+        <p:style>
+          <a:lnRef idx="1">
+            <a:schemeClr val="accent1"/>
+          </a:lnRef>
+          <a:fillRef idx="3">
+            <a:schemeClr val="accent1"/>
+          </a:fillRef>
+          <a:effectRef idx="2">
+            <a:schemeClr val="accent1"/>
+          </a:effectRef>
+          <a:fontRef idx="minor">
+            <a:schemeClr val="lt1"/>
+          </a:fontRef>
+        </p:style>
+        <p:txBody>
+          <a:bodyPr rtlCol="0" anchor="ctr"/>
+          <a:lstStyle/>
+          <a:p>
+            <a:pPr algn="ctr"/>
+            <a:endParaRPr/>
+          </a:p>
+        </p:txBody>
+      </p:sp>
+      <p:sp>
+        <p:nvSpPr>
+          <p:cNvPr id="13" name="Rounded Rectangle 12"/>
+          <p:cNvSpPr/>
+          <p:nvPr/>
+        </p:nvSpPr>
+        <p:spPr>
+          <a:xfrm>
+            <a:off x="6473952" y="1947672"/>
+            <a:ext cx="82296" cy="713232"/>
+          </a:xfrm>
+          <a:prstGeom prst="roundRect">
+            <a:avLst>
+              <a:gd name="adj" fmla="val 50000"/>
+            </a:avLst>
+          </a:prstGeom>
+          <a:solidFill>
+            <a:srgbClr val="FFA228"/>
+          </a:solidFill>
+          <a:ln>
+            <a:noFill/>
+          </a:ln>
+          <a:effectLst/>
+        </p:spPr>
+        <p:style>
+          <a:lnRef idx="1">
+            <a:schemeClr val="accent1"/>
+          </a:lnRef>
+          <a:fillRef idx="3">
+            <a:schemeClr val="accent1"/>
+          </a:fillRef>
+          <a:effectRef idx="2">
+            <a:schemeClr val="accent1"/>
+          </a:effectRef>
+          <a:fontRef idx="minor">
+            <a:schemeClr val="lt1"/>
+          </a:fontRef>
+        </p:style>
+        <p:txBody>
+          <a:bodyPr rtlCol="0" anchor="ctr"/>
+          <a:lstStyle/>
+          <a:p>
+            <a:pPr algn="ctr"/>
+            <a:endParaRPr/>
+          </a:p>
+        </p:txBody>
+      </p:sp>
+      <p:sp>
+        <p:nvSpPr>
+          <p:cNvPr id="14" name="TextBox 13"/>
+          <p:cNvSpPr txBox="1"/>
+          <p:nvPr/>
+        </p:nvSpPr>
+        <p:spPr>
+          <a:xfrm>
+            <a:off x="6766560" y="1874520"/>
+            <a:ext cx="4343400" cy="914400"/>
+          </a:xfrm>
+          <a:prstGeom prst="rect">
+            <a:avLst/>
+          </a:prstGeom>
+          <a:noFill/>
+        </p:spPr>
+        <p:txBody>
+          <a:bodyPr wrap="square" lIns="45720" tIns="18288" rIns="45720" bIns="18288" anchor="t">
+            <a:spAutoFit/>
+          </a:bodyPr>
+          <a:lstStyle/>
+          <a:p>
+            <a:pPr algn="l">
+              <a:spcBef>
+                <a:spcPts val="0"/>
+              </a:spcBef>
+              <a:spcAft>
+                <a:spcPts val="300"/>
+              </a:spcAft>
+            </a:pPr>
+            <a:r>
+              <a:rPr sz="1550" b="1" i="0">
+                <a:solidFill>
+                  <a:srgbClr val="F1EDE6"/>
+                </a:solidFill>
+                <a:latin typeface="Trebuchet MS"/>
+              </a:rPr>
+              <a:t>CSRF-Schutz</a:t>
+            </a:r>
+          </a:p>
+          <a:p>
+            <a:pPr algn="l">
+              <a:spcBef>
+                <a:spcPts val="0"/>
+              </a:spcBef>
+              <a:spcAft>
+                <a:spcPts val="0"/>
+              </a:spcAft>
+            </a:pPr>
+            <a:r>
+              <a:rPr sz="1200" b="0" i="0">
+                <a:solidFill>
+                  <a:srgbClr val="B9AFD6"/>
+                </a:solidFill>
+                <a:latin typeface="Trebuchet MS"/>
+              </a:rPr>
+              <a:t>Eigene Middleware sichert die API gegen Cross-Site-Request-Forgery.</a:t>
+            </a:r>
+          </a:p>
+        </p:txBody>
+      </p:sp>
+      <p:sp>
+        <p:nvSpPr>
+          <p:cNvPr id="15" name="Rounded Rectangle 14"/>
+          <p:cNvSpPr/>
+          <p:nvPr/>
+        </p:nvSpPr>
+        <p:spPr>
+          <a:xfrm>
+            <a:off x="868680" y="3154680"/>
+            <a:ext cx="5074920" cy="1234440"/>
+          </a:xfrm>
+          <a:prstGeom prst="roundRect">
+            <a:avLst>
+              <a:gd name="adj" fmla="val 8000"/>
+            </a:avLst>
+          </a:prstGeom>
+          <a:solidFill>
+            <a:srgbClr val="3A2F66"/>
+          </a:solidFill>
+          <a:ln>
+            <a:noFill/>
+          </a:ln>
+          <a:effectLst/>
+        </p:spPr>
+        <p:style>
+          <a:lnRef idx="1">
+            <a:schemeClr val="accent1"/>
+          </a:lnRef>
+          <a:fillRef idx="3">
+            <a:schemeClr val="accent1"/>
+          </a:fillRef>
+          <a:effectRef idx="2">
+            <a:schemeClr val="accent1"/>
+          </a:effectRef>
+          <a:fontRef idx="minor">
+            <a:schemeClr val="lt1"/>
+          </a:fontRef>
+        </p:style>
+        <p:txBody>
+          <a:bodyPr rtlCol="0" anchor="ctr"/>
+          <a:lstStyle/>
+          <a:p>
+            <a:pPr algn="ctr"/>
+            <a:endParaRPr/>
+          </a:p>
+        </p:txBody>
+      </p:sp>
+      <p:sp>
+        <p:nvSpPr>
+          <p:cNvPr id="16" name="Rounded Rectangle 15"/>
+          <p:cNvSpPr/>
+          <p:nvPr/>
+        </p:nvSpPr>
+        <p:spPr>
+          <a:xfrm>
+            <a:off x="1124712" y="3410712"/>
+            <a:ext cx="82296" cy="713232"/>
+          </a:xfrm>
+          <a:prstGeom prst="roundRect">
+            <a:avLst>
+              <a:gd name="adj" fmla="val 50000"/>
+            </a:avLst>
+          </a:prstGeom>
+          <a:solidFill>
+            <a:srgbClr val="8560DD"/>
+          </a:solidFill>
+          <a:ln>
+            <a:noFill/>
+          </a:ln>
+          <a:effectLst/>
+        </p:spPr>
+        <p:style>
+          <a:lnRef idx="1">
+            <a:schemeClr val="accent1"/>
+          </a:lnRef>
+          <a:fillRef idx="3">
+            <a:schemeClr val="accent1"/>
+          </a:fillRef>
+          <a:effectRef idx="2">
+            <a:schemeClr val="accent1"/>
+          </a:effectRef>
+          <a:fontRef idx="minor">
+            <a:schemeClr val="lt1"/>
+          </a:fontRef>
+        </p:style>
+        <p:txBody>
+          <a:bodyPr rtlCol="0" anchor="ctr"/>
+          <a:lstStyle/>
+          <a:p>
+            <a:pPr algn="ctr"/>
+            <a:endParaRPr/>
+          </a:p>
+        </p:txBody>
+      </p:sp>
+      <p:sp>
+        <p:nvSpPr>
+          <p:cNvPr id="17" name="TextBox 16"/>
+          <p:cNvSpPr txBox="1"/>
+          <p:nvPr/>
+        </p:nvSpPr>
+        <p:spPr>
+          <a:xfrm>
+            <a:off x="1417320" y="3337560"/>
+            <a:ext cx="4343400" cy="683264"/>
+          </a:xfrm>
+          <a:prstGeom prst="rect">
+            <a:avLst/>
+          </a:prstGeom>
+          <a:noFill/>
+        </p:spPr>
+        <p:txBody>
+          <a:bodyPr wrap="square" lIns="45720" tIns="18288" rIns="45720" bIns="18288" anchor="t">
+            <a:spAutoFit/>
+          </a:bodyPr>
+          <a:lstStyle/>
+          <a:p>
+            <a:pPr algn="l">
+              <a:spcBef>
+                <a:spcPts val="0"/>
+              </a:spcBef>
+              <a:spcAft>
+                <a:spcPts val="300"/>
+              </a:spcAft>
+            </a:pPr>
+            <a:r>
+              <a:rPr sz="1550" b="1" i="0" dirty="0" err="1">
+                <a:solidFill>
+                  <a:srgbClr val="F1EDE6"/>
+                </a:solidFill>
+                <a:latin typeface="Trebuchet MS"/>
+              </a:rPr>
+              <a:t>Sichere</a:t>
+            </a:r>
+            <a:r>
+              <a:rPr sz="1550" b="1" i="0" dirty="0">
+                <a:solidFill>
+                  <a:srgbClr val="F1EDE6"/>
+                </a:solidFill>
+                <a:latin typeface="Trebuchet MS"/>
+              </a:rPr>
+              <a:t> API</a:t>
+            </a:r>
+          </a:p>
+          <a:p>
+            <a:pPr algn="l">
+              <a:spcBef>
+                <a:spcPts val="0"/>
+              </a:spcBef>
+              <a:spcAft>
+                <a:spcPts val="0"/>
+              </a:spcAft>
+            </a:pPr>
+            <a:r>
+              <a:rPr sz="1200" b="0" i="0" dirty="0">
+                <a:solidFill>
+                  <a:srgbClr val="B9AFD6"/>
+                </a:solidFill>
+                <a:latin typeface="Trebuchet MS"/>
+              </a:rPr>
+              <a:t>Gesch</a:t>
+            </a:r>
+            <a:r>
+              <a:rPr lang="de-AT" sz="1200" b="0" i="0" dirty="0">
+                <a:solidFill>
+                  <a:srgbClr val="B9AFD6"/>
+                </a:solidFill>
+                <a:latin typeface="Trebuchet MS"/>
+              </a:rPr>
+              <a:t>ü</a:t>
+            </a:r>
+            <a:r>
+              <a:rPr sz="1200" b="0" i="0" dirty="0" err="1">
+                <a:solidFill>
+                  <a:srgbClr val="B9AFD6"/>
+                </a:solidFill>
+                <a:latin typeface="Trebuchet MS"/>
+              </a:rPr>
+              <a:t>tzte</a:t>
+            </a:r>
+            <a:r>
+              <a:rPr sz="1200" b="0" i="0" dirty="0">
+                <a:solidFill>
+                  <a:srgbClr val="B9AFD6"/>
+                </a:solidFill>
+                <a:latin typeface="Trebuchet MS"/>
+              </a:rPr>
+              <a:t> </a:t>
+            </a:r>
+            <a:r>
+              <a:rPr sz="1200" b="0" i="0" dirty="0" err="1">
+                <a:solidFill>
+                  <a:srgbClr val="B9AFD6"/>
+                </a:solidFill>
+                <a:latin typeface="Trebuchet MS"/>
+              </a:rPr>
+              <a:t>Endpunkte</a:t>
+            </a:r>
+            <a:r>
+              <a:rPr sz="1200" b="0" i="0" dirty="0">
+                <a:solidFill>
+                  <a:srgbClr val="B9AFD6"/>
+                </a:solidFill>
+                <a:latin typeface="Trebuchet MS"/>
+              </a:rPr>
+              <a:t>, </a:t>
+            </a:r>
+            <a:r>
+              <a:rPr sz="1200" b="0" i="0" dirty="0" err="1">
+                <a:solidFill>
+                  <a:srgbClr val="B9AFD6"/>
+                </a:solidFill>
+                <a:latin typeface="Trebuchet MS"/>
+              </a:rPr>
+              <a:t>getrennte</a:t>
+            </a:r>
+            <a:r>
+              <a:rPr sz="1200" b="0" i="0" dirty="0">
+                <a:solidFill>
+                  <a:srgbClr val="B9AFD6"/>
+                </a:solidFill>
+                <a:latin typeface="Trebuchet MS"/>
+              </a:rPr>
+              <a:t> DTOs </a:t>
+            </a:r>
+            <a:r>
+              <a:rPr sz="1200" b="0" i="0" dirty="0" err="1">
+                <a:solidFill>
+                  <a:srgbClr val="B9AFD6"/>
+                </a:solidFill>
+                <a:latin typeface="Trebuchet MS"/>
+              </a:rPr>
+              <a:t>statt</a:t>
+            </a:r>
+            <a:r>
+              <a:rPr sz="1200" b="0" i="0" dirty="0">
+                <a:solidFill>
+                  <a:srgbClr val="B9AFD6"/>
+                </a:solidFill>
+                <a:latin typeface="Trebuchet MS"/>
+              </a:rPr>
+              <a:t> </a:t>
+            </a:r>
+            <a:r>
+              <a:rPr sz="1200" b="0" i="0" dirty="0" err="1">
+                <a:solidFill>
+                  <a:srgbClr val="B9AFD6"/>
+                </a:solidFill>
+                <a:latin typeface="Trebuchet MS"/>
+              </a:rPr>
+              <a:t>direkter</a:t>
+            </a:r>
+            <a:r>
+              <a:rPr sz="1200" b="0" i="0" dirty="0">
+                <a:solidFill>
+                  <a:srgbClr val="B9AFD6"/>
+                </a:solidFill>
+                <a:latin typeface="Trebuchet MS"/>
+              </a:rPr>
+              <a:t> DB-Modelle.</a:t>
+            </a:r>
+          </a:p>
+        </p:txBody>
+      </p:sp>
+      <p:sp>
+        <p:nvSpPr>
+          <p:cNvPr id="18" name="Rounded Rectangle 17"/>
+          <p:cNvSpPr/>
+          <p:nvPr/>
+        </p:nvSpPr>
+        <p:spPr>
+          <a:xfrm>
+            <a:off x="6217920" y="3154680"/>
+            <a:ext cx="5074920" cy="1234440"/>
+          </a:xfrm>
+          <a:prstGeom prst="roundRect">
+            <a:avLst>
+              <a:gd name="adj" fmla="val 8000"/>
+            </a:avLst>
+          </a:prstGeom>
+          <a:solidFill>
+            <a:srgbClr val="3A2F66"/>
+          </a:solidFill>
+          <a:ln>
+            <a:noFill/>
+          </a:ln>
+          <a:effectLst/>
+        </p:spPr>
+        <p:style>
+          <a:lnRef idx="1">
+            <a:schemeClr val="accent1"/>
+          </a:lnRef>
+          <a:fillRef idx="3">
+            <a:schemeClr val="accent1"/>
+          </a:fillRef>
+          <a:effectRef idx="2">
+            <a:schemeClr val="accent1"/>
+          </a:effectRef>
+          <a:fontRef idx="minor">
+            <a:schemeClr val="lt1"/>
+          </a:fontRef>
+        </p:style>
+        <p:txBody>
+          <a:bodyPr rtlCol="0" anchor="ctr"/>
+          <a:lstStyle/>
+          <a:p>
+            <a:pPr algn="ctr"/>
+            <a:endParaRPr/>
+          </a:p>
+        </p:txBody>
+      </p:sp>
+      <p:sp>
+        <p:nvSpPr>
+          <p:cNvPr id="19" name="Rounded Rectangle 18"/>
+          <p:cNvSpPr/>
+          <p:nvPr/>
+        </p:nvSpPr>
+        <p:spPr>
+          <a:xfrm>
+            <a:off x="6473952" y="3410712"/>
+            <a:ext cx="82296" cy="713232"/>
+          </a:xfrm>
+          <a:prstGeom prst="roundRect">
+            <a:avLst>
+              <a:gd name="adj" fmla="val 50000"/>
+            </a:avLst>
+          </a:prstGeom>
+          <a:solidFill>
+            <a:srgbClr val="76E3F1"/>
+          </a:solidFill>
+          <a:ln>
+            <a:noFill/>
+          </a:ln>
+          <a:effectLst/>
+        </p:spPr>
+        <p:style>
+          <a:lnRef idx="1">
+            <a:schemeClr val="accent1"/>
+          </a:lnRef>
+          <a:fillRef idx="3">
+            <a:schemeClr val="accent1"/>
+          </a:fillRef>
+          <a:effectRef idx="2">
+            <a:schemeClr val="accent1"/>
+          </a:effectRef>
+          <a:fontRef idx="minor">
+            <a:schemeClr val="lt1"/>
+          </a:fontRef>
+        </p:style>
+        <p:txBody>
+          <a:bodyPr rtlCol="0" anchor="ctr"/>
+          <a:lstStyle/>
+          <a:p>
+            <a:pPr algn="ctr"/>
+            <a:endParaRPr/>
+          </a:p>
+        </p:txBody>
+      </p:sp>
+      <p:sp>
+        <p:nvSpPr>
+          <p:cNvPr id="20" name="TextBox 19"/>
+          <p:cNvSpPr txBox="1"/>
+          <p:nvPr/>
+        </p:nvSpPr>
+        <p:spPr>
+          <a:xfrm>
+            <a:off x="6766560" y="3337560"/>
+            <a:ext cx="4343400" cy="914400"/>
+          </a:xfrm>
+          <a:prstGeom prst="rect">
+            <a:avLst/>
+          </a:prstGeom>
+          <a:noFill/>
+        </p:spPr>
+        <p:txBody>
+          <a:bodyPr wrap="square" lIns="45720" tIns="18288" rIns="45720" bIns="18288" anchor="t">
+            <a:spAutoFit/>
+          </a:bodyPr>
+          <a:lstStyle/>
+          <a:p>
+            <a:pPr algn="l">
+              <a:spcBef>
+                <a:spcPts val="0"/>
+              </a:spcBef>
+              <a:spcAft>
+                <a:spcPts val="300"/>
+              </a:spcAft>
+            </a:pPr>
+            <a:r>
+              <a:rPr sz="1550" b="1" i="0" dirty="0">
+                <a:solidFill>
+                  <a:srgbClr val="F1EDE6"/>
+                </a:solidFill>
+                <a:latin typeface="Trebuchet MS"/>
+              </a:rPr>
+              <a:t>Optimistic UI</a:t>
+            </a:r>
+          </a:p>
+          <a:p>
+            <a:pPr algn="l">
+              <a:spcBef>
+                <a:spcPts val="0"/>
+              </a:spcBef>
+              <a:spcAft>
+                <a:spcPts val="0"/>
+              </a:spcAft>
+            </a:pPr>
+            <a:r>
+              <a:rPr sz="1200" b="0" i="0" dirty="0" err="1">
+                <a:solidFill>
+                  <a:srgbClr val="B9AFD6"/>
+                </a:solidFill>
+                <a:latin typeface="Trebuchet MS"/>
+              </a:rPr>
+              <a:t>Schnelles</a:t>
+            </a:r>
+            <a:r>
+              <a:rPr sz="1200" b="0" i="0" dirty="0">
+                <a:solidFill>
+                  <a:srgbClr val="B9AFD6"/>
+                </a:solidFill>
+                <a:latin typeface="Trebuchet MS"/>
+              </a:rPr>
+              <a:t> </a:t>
+            </a:r>
+            <a:r>
+              <a:rPr sz="1200" b="0" i="0" dirty="0" err="1">
+                <a:solidFill>
+                  <a:srgbClr val="B9AFD6"/>
+                </a:solidFill>
+                <a:latin typeface="Trebuchet MS"/>
+              </a:rPr>
+              <a:t>Gefühl</a:t>
+            </a:r>
+            <a:r>
+              <a:rPr sz="1200" b="0" i="0" dirty="0">
+                <a:solidFill>
+                  <a:srgbClr val="B9AFD6"/>
+                </a:solidFill>
+                <a:latin typeface="Trebuchet MS"/>
+              </a:rPr>
+              <a:t> - </a:t>
+            </a:r>
+            <a:r>
+              <a:rPr sz="1200" b="0" i="0" dirty="0" err="1">
+                <a:solidFill>
+                  <a:srgbClr val="B9AFD6"/>
+                </a:solidFill>
+                <a:latin typeface="Trebuchet MS"/>
+              </a:rPr>
+              <a:t>bei</a:t>
+            </a:r>
+            <a:r>
+              <a:rPr sz="1200" b="0" i="0" dirty="0">
+                <a:solidFill>
+                  <a:srgbClr val="B9AFD6"/>
+                </a:solidFill>
+                <a:latin typeface="Trebuchet MS"/>
+              </a:rPr>
+              <a:t> </a:t>
+            </a:r>
+            <a:r>
+              <a:rPr sz="1200" b="0" i="0" dirty="0" err="1">
+                <a:solidFill>
+                  <a:srgbClr val="B9AFD6"/>
+                </a:solidFill>
+                <a:latin typeface="Trebuchet MS"/>
+              </a:rPr>
+              <a:t>Fehlern</a:t>
+            </a:r>
+            <a:r>
+              <a:rPr sz="1200" b="0" i="0" dirty="0">
+                <a:solidFill>
+                  <a:srgbClr val="B9AFD6"/>
+                </a:solidFill>
+                <a:latin typeface="Trebuchet MS"/>
+              </a:rPr>
+              <a:t> </a:t>
+            </a:r>
+            <a:r>
+              <a:rPr sz="1200" b="0" i="0" dirty="0" err="1">
+                <a:solidFill>
+                  <a:srgbClr val="B9AFD6"/>
+                </a:solidFill>
+                <a:latin typeface="Trebuchet MS"/>
+              </a:rPr>
+              <a:t>wird</a:t>
+            </a:r>
+            <a:r>
+              <a:rPr sz="1200" b="0" i="0" dirty="0">
+                <a:solidFill>
+                  <a:srgbClr val="B9AFD6"/>
+                </a:solidFill>
+                <a:latin typeface="Trebuchet MS"/>
+              </a:rPr>
+              <a:t> </a:t>
+            </a:r>
+            <a:r>
+              <a:rPr sz="1200" b="0" i="0" dirty="0" err="1">
+                <a:solidFill>
+                  <a:srgbClr val="B9AFD6"/>
+                </a:solidFill>
+                <a:latin typeface="Trebuchet MS"/>
+              </a:rPr>
+              <a:t>sauber</a:t>
+            </a:r>
+            <a:r>
+              <a:rPr sz="1200" b="0" i="0" dirty="0">
+                <a:solidFill>
+                  <a:srgbClr val="B9AFD6"/>
+                </a:solidFill>
+                <a:latin typeface="Trebuchet MS"/>
+              </a:rPr>
+              <a:t> </a:t>
+            </a:r>
+            <a:r>
+              <a:rPr sz="1200" b="0" i="0" dirty="0" err="1">
+                <a:solidFill>
+                  <a:srgbClr val="B9AFD6"/>
+                </a:solidFill>
+                <a:latin typeface="Trebuchet MS"/>
+              </a:rPr>
+              <a:t>zurückgerollt</a:t>
+            </a:r>
+            <a:r>
+              <a:rPr sz="1200" b="0" i="0" dirty="0">
+                <a:solidFill>
+                  <a:srgbClr val="B9AFD6"/>
+                </a:solidFill>
+                <a:latin typeface="Trebuchet MS"/>
+              </a:rPr>
+              <a:t>.</a:t>
+            </a:r>
+          </a:p>
+        </p:txBody>
+      </p:sp>
+      <p:sp>
+        <p:nvSpPr>
+          <p:cNvPr id="21" name="Rounded Rectangle 20"/>
+          <p:cNvSpPr/>
+          <p:nvPr/>
+        </p:nvSpPr>
+        <p:spPr>
+          <a:xfrm>
+            <a:off x="868680" y="4617720"/>
+            <a:ext cx="5074920" cy="1234440"/>
+          </a:xfrm>
+          <a:prstGeom prst="roundRect">
+            <a:avLst>
+              <a:gd name="adj" fmla="val 8000"/>
+            </a:avLst>
+          </a:prstGeom>
+          <a:solidFill>
+            <a:srgbClr val="3A2F66"/>
+          </a:solidFill>
+          <a:ln>
+            <a:noFill/>
+          </a:ln>
+          <a:effectLst/>
+        </p:spPr>
+        <p:style>
+          <a:lnRef idx="1">
+            <a:schemeClr val="accent1"/>
+          </a:lnRef>
+          <a:fillRef idx="3">
+            <a:schemeClr val="accent1"/>
+          </a:fillRef>
+          <a:effectRef idx="2">
+            <a:schemeClr val="accent1"/>
+          </a:effectRef>
+          <a:fontRef idx="minor">
+            <a:schemeClr val="lt1"/>
+          </a:fontRef>
+        </p:style>
+        <p:txBody>
+          <a:bodyPr rtlCol="0" anchor="ctr"/>
+          <a:lstStyle/>
+          <a:p>
+            <a:pPr algn="ctr"/>
+            <a:endParaRPr/>
+          </a:p>
+        </p:txBody>
+      </p:sp>
+      <p:sp>
+        <p:nvSpPr>
+          <p:cNvPr id="22" name="Rounded Rectangle 21"/>
+          <p:cNvSpPr/>
+          <p:nvPr/>
+        </p:nvSpPr>
+        <p:spPr>
+          <a:xfrm>
+            <a:off x="1124712" y="4873752"/>
+            <a:ext cx="82296" cy="713232"/>
+          </a:xfrm>
+          <a:prstGeom prst="roundRect">
+            <a:avLst>
+              <a:gd name="adj" fmla="val 50000"/>
+            </a:avLst>
+          </a:prstGeom>
+          <a:solidFill>
+            <a:srgbClr val="FBBF24"/>
+          </a:solidFill>
+          <a:ln>
+            <a:noFill/>
+          </a:ln>
+          <a:effectLst/>
+        </p:spPr>
+        <p:style>
+          <a:lnRef idx="1">
+            <a:schemeClr val="accent1"/>
+          </a:lnRef>
+          <a:fillRef idx="3">
+            <a:schemeClr val="accent1"/>
+          </a:fillRef>
+          <a:effectRef idx="2">
+            <a:schemeClr val="accent1"/>
+          </a:effectRef>
+          <a:fontRef idx="minor">
+            <a:schemeClr val="lt1"/>
+          </a:fontRef>
+        </p:style>
+        <p:txBody>
+          <a:bodyPr rtlCol="0" anchor="ctr"/>
+          <a:lstStyle/>
+          <a:p>
+            <a:pPr algn="ctr"/>
+            <a:endParaRPr/>
+          </a:p>
+        </p:txBody>
+      </p:sp>
+      <p:sp>
+        <p:nvSpPr>
+          <p:cNvPr id="23" name="TextBox 22"/>
+          <p:cNvSpPr txBox="1"/>
+          <p:nvPr/>
+        </p:nvSpPr>
+        <p:spPr>
+          <a:xfrm>
+            <a:off x="1417320" y="4800600"/>
+            <a:ext cx="4343400" cy="914400"/>
+          </a:xfrm>
+          <a:prstGeom prst="rect">
+            <a:avLst/>
+          </a:prstGeom>
+          <a:noFill/>
+        </p:spPr>
+        <p:txBody>
+          <a:bodyPr wrap="square" lIns="45720" tIns="18288" rIns="45720" bIns="18288" anchor="t">
+            <a:spAutoFit/>
+          </a:bodyPr>
+          <a:lstStyle/>
+          <a:p>
+            <a:pPr algn="l">
+              <a:spcBef>
+                <a:spcPts val="0"/>
+              </a:spcBef>
+              <a:spcAft>
+                <a:spcPts val="300"/>
+              </a:spcAft>
+            </a:pPr>
+            <a:r>
+              <a:rPr sz="1550" b="1" i="0">
+                <a:solidFill>
+                  <a:srgbClr val="F1EDE6"/>
+                </a:solidFill>
+                <a:latin typeface="Trebuchet MS"/>
+              </a:rPr>
+              <a:t>Code-Qualität</a:t>
+            </a:r>
+          </a:p>
+          <a:p>
+            <a:pPr algn="l">
+              <a:spcBef>
+                <a:spcPts val="0"/>
+              </a:spcBef>
+              <a:spcAft>
+                <a:spcPts val="0"/>
+              </a:spcAft>
+            </a:pPr>
+            <a:r>
+              <a:rPr sz="1200" b="0" i="0">
+                <a:solidFill>
+                  <a:srgbClr val="B9AFD6"/>
+                </a:solidFill>
+                <a:latin typeface="Trebuchet MS"/>
+              </a:rPr>
+              <a:t>Objektorientiert, lesbar, dokumentierter Komponentenbaum.</a:t>
+            </a:r>
+          </a:p>
+        </p:txBody>
+      </p:sp>
+      <p:sp>
+        <p:nvSpPr>
+          <p:cNvPr id="24" name="Rounded Rectangle 23"/>
+          <p:cNvSpPr/>
+          <p:nvPr/>
+        </p:nvSpPr>
+        <p:spPr>
+          <a:xfrm>
+            <a:off x="6217920" y="4617720"/>
+            <a:ext cx="5074920" cy="1234440"/>
+          </a:xfrm>
+          <a:prstGeom prst="roundRect">
+            <a:avLst>
+              <a:gd name="adj" fmla="val 8000"/>
+            </a:avLst>
+          </a:prstGeom>
+          <a:solidFill>
+            <a:srgbClr val="3A2F66"/>
+          </a:solidFill>
+          <a:ln>
+            <a:noFill/>
+          </a:ln>
+          <a:effectLst/>
+        </p:spPr>
+        <p:style>
+          <a:lnRef idx="1">
+            <a:schemeClr val="accent1"/>
+          </a:lnRef>
+          <a:fillRef idx="3">
+            <a:schemeClr val="accent1"/>
+          </a:fillRef>
+          <a:effectRef idx="2">
+            <a:schemeClr val="accent1"/>
+          </a:effectRef>
+          <a:fontRef idx="minor">
+            <a:schemeClr val="lt1"/>
+          </a:fontRef>
+        </p:style>
+        <p:txBody>
+          <a:bodyPr rtlCol="0" anchor="ctr"/>
+          <a:lstStyle/>
+          <a:p>
+            <a:pPr algn="ctr"/>
+            <a:endParaRPr/>
+          </a:p>
+        </p:txBody>
+      </p:sp>
+      <p:sp>
+        <p:nvSpPr>
+          <p:cNvPr id="25" name="Rounded Rectangle 24"/>
+          <p:cNvSpPr/>
+          <p:nvPr/>
+        </p:nvSpPr>
+        <p:spPr>
+          <a:xfrm>
+            <a:off x="6473952" y="4873752"/>
+            <a:ext cx="82296" cy="713232"/>
+          </a:xfrm>
+          <a:prstGeom prst="roundRect">
+            <a:avLst>
+              <a:gd name="adj" fmla="val 50000"/>
+            </a:avLst>
+          </a:prstGeom>
+          <a:solidFill>
+            <a:srgbClr val="008040"/>
+          </a:solidFill>
+          <a:ln>
+            <a:noFill/>
+          </a:ln>
+          <a:effectLst/>
+        </p:spPr>
+        <p:style>
+          <a:lnRef idx="1">
+            <a:schemeClr val="accent1"/>
+          </a:lnRef>
+          <a:fillRef idx="3">
+            <a:schemeClr val="accent1"/>
+          </a:fillRef>
+          <a:effectRef idx="2">
+            <a:schemeClr val="accent1"/>
+          </a:effectRef>
+          <a:fontRef idx="minor">
+            <a:schemeClr val="lt1"/>
+          </a:fontRef>
+        </p:style>
+        <p:txBody>
+          <a:bodyPr rtlCol="0" anchor="ctr"/>
+          <a:lstStyle/>
+          <a:p>
+            <a:pPr algn="ctr"/>
+            <a:endParaRPr/>
+          </a:p>
+        </p:txBody>
+      </p:sp>
+      <p:sp>
+        <p:nvSpPr>
+          <p:cNvPr id="26" name="TextBox 25"/>
+          <p:cNvSpPr txBox="1"/>
+          <p:nvPr/>
+        </p:nvSpPr>
+        <p:spPr>
+          <a:xfrm>
+            <a:off x="6766560" y="4800600"/>
+            <a:ext cx="4343400" cy="914400"/>
+          </a:xfrm>
+          <a:prstGeom prst="rect">
+            <a:avLst/>
+          </a:prstGeom>
+          <a:noFill/>
+        </p:spPr>
+        <p:txBody>
+          <a:bodyPr wrap="square" lIns="45720" tIns="18288" rIns="45720" bIns="18288" anchor="t">
+            <a:spAutoFit/>
+          </a:bodyPr>
+          <a:lstStyle/>
+          <a:p>
+            <a:pPr algn="l">
+              <a:spcBef>
+                <a:spcPts val="0"/>
+              </a:spcBef>
+              <a:spcAft>
+                <a:spcPts val="300"/>
+              </a:spcAft>
+            </a:pPr>
+            <a:r>
+              <a:rPr sz="1550" b="1" i="0">
+                <a:solidFill>
+                  <a:srgbClr val="F1EDE6"/>
+                </a:solidFill>
+                <a:latin typeface="Trebuchet MS"/>
+              </a:rPr>
+              <a:t>Tests</a:t>
+            </a:r>
+          </a:p>
+          <a:p>
+            <a:pPr algn="l">
+              <a:spcBef>
+                <a:spcPts val="0"/>
+              </a:spcBef>
+              <a:spcAft>
+                <a:spcPts val="0"/>
+              </a:spcAft>
+            </a:pPr>
+            <a:r>
+              <a:rPr sz="1200" b="0" i="0">
+                <a:solidFill>
+                  <a:srgbClr val="B9AFD6"/>
+                </a:solidFill>
+                <a:latin typeface="Trebuchet MS"/>
+              </a:rPr>
+              <a:t>Eigenes Testprojekt (xUnit) zur Absicherung der Logik.</a:t>
             </a:r>
           </a:p>
         </p:txBody>
@@ -10186,7 +11279,7 @@
                 </a:solidFill>
                 <a:latin typeface="Trebuchet MS"/>
               </a:rPr>
-              <a:t>SOLIDE GEBAUT</a:t>
+              <a:t>PLANUNG &amp; DOKUMENTATION</a:t>
             </a:r>
           </a:p>
           <a:p>
@@ -10205,7 +11298,7 @@
                 </a:solidFill>
                 <a:latin typeface="Trebuchet MS"/>
               </a:rPr>
-              <a:t>Sicherheit &amp; Qualität</a:t>
+              <a:t>Projektablauf</a:t>
             </a:r>
           </a:p>
         </p:txBody>
@@ -10289,25 +11382,67 @@
                 </a:solidFill>
                 <a:latin typeface="Trebuchet MS"/>
               </a:rPr>
-              <a:t>15</a:t>
-            </a:r>
-          </a:p>
-        </p:txBody>
-      </p:sp>
-      <p:sp>
-        <p:nvSpPr>
-          <p:cNvPr id="9" name="Rounded Rectangle 8"/>
+              <a:t>16</a:t>
+            </a:r>
+          </a:p>
+        </p:txBody>
+      </p:sp>
+      <p:sp>
+        <p:nvSpPr>
+          <p:cNvPr id="9" name="TextBox 8"/>
+          <p:cNvSpPr txBox="1"/>
+          <p:nvPr/>
+        </p:nvSpPr>
+        <p:spPr>
+          <a:xfrm>
+            <a:off x="868680" y="1417320"/>
+            <a:ext cx="10424160" cy="640080"/>
+          </a:xfrm>
+          <a:prstGeom prst="rect">
+            <a:avLst/>
+          </a:prstGeom>
+          <a:noFill/>
+        </p:spPr>
+        <p:txBody>
+          <a:bodyPr wrap="square" lIns="45720" tIns="18288" rIns="45720" bIns="18288" anchor="t">
+            <a:spAutoFit/>
+          </a:bodyPr>
+          <a:lstStyle/>
+          <a:p>
+            <a:pPr algn="l">
+              <a:spcBef>
+                <a:spcPts val="0"/>
+              </a:spcBef>
+              <a:spcAft>
+                <a:spcPts val="0"/>
+              </a:spcAft>
+            </a:pPr>
+            <a:r>
+              <a:rPr sz="1550" b="0" i="0">
+                <a:solidFill>
+                  <a:srgbClr val="F1EDE6"/>
+                </a:solidFill>
+                <a:latin typeface="Trebuchet MS"/>
+              </a:rPr>
+              <a:t>Lumify wurde nach klassischem Projektmanagement durchgeführt - mit vollständiger Dokumentation:</a:t>
+            </a:r>
+          </a:p>
+        </p:txBody>
+      </p:sp>
+      <p:sp>
+        <p:nvSpPr>
+          <p:cNvPr id="10" name="Rounded Rectangle 9"/>
           <p:cNvSpPr/>
           <p:nvPr/>
         </p:nvSpPr>
         <p:spPr>
           <a:xfrm>
-            <a:off x="868680" y="1691640"/>
-            <a:ext cx="5074920" cy="1234440"/>
+            <a:off x="868680" y="2194560"/>
+            <a:ext cx="3291840" cy="640080"/>
           </a:xfrm>
           <a:prstGeom prst="roundRect">
             <a:avLst>
-              <a:gd name="adj" fmla="val 8000"/>
+              <a:gd name="adj" fmla="val 50000"/>
             </a:avLst>
           </a:prstGeom>
           <a:solidFill>
@@ -10333,29 +11468,397 @@
           </a:fontRef>
         </p:style>
         <p:txBody>
-          <a:bodyPr rtlCol="0" anchor="ctr"/>
+          <a:bodyPr wrap="none" tIns="18288" bIns="18288" rtlCol="0" anchor="ctr"/>
           <a:lstStyle/>
           <a:p>
             <a:pPr algn="ctr"/>
-            <a:endParaRPr/>
-          </a:p>
-        </p:txBody>
-      </p:sp>
-      <p:sp>
-        <p:nvSpPr>
-          <p:cNvPr id="10" name="Rounded Rectangle 9"/>
+            <a:r>
+              <a:rPr sz="1400" b="1">
+                <a:solidFill>
+                  <a:srgbClr val="F1EDE6"/>
+                </a:solidFill>
+                <a:latin typeface="Trebuchet MS"/>
+              </a:rPr>
+              <a:t>Projektauftrag</a:t>
+            </a:r>
+          </a:p>
+        </p:txBody>
+      </p:sp>
+      <p:sp>
+        <p:nvSpPr>
+          <p:cNvPr id="11" name="Rounded Rectangle 10"/>
           <p:cNvSpPr/>
           <p:nvPr/>
         </p:nvSpPr>
         <p:spPr>
           <a:xfrm>
-            <a:off x="1124712" y="1947672"/>
-            <a:ext cx="82296" cy="713232"/>
+            <a:off x="4462272" y="2194560"/>
+            <a:ext cx="3291840" cy="640080"/>
           </a:xfrm>
           <a:prstGeom prst="roundRect">
             <a:avLst>
               <a:gd name="adj" fmla="val 50000"/>
             </a:avLst>
+          </a:prstGeom>
+          <a:solidFill>
+            <a:srgbClr val="3A2F66"/>
+          </a:solidFill>
+          <a:ln>
+            <a:noFill/>
+          </a:ln>
+          <a:effectLst/>
+        </p:spPr>
+        <p:style>
+          <a:lnRef idx="1">
+            <a:schemeClr val="accent1"/>
+          </a:lnRef>
+          <a:fillRef idx="3">
+            <a:schemeClr val="accent1"/>
+          </a:fillRef>
+          <a:effectRef idx="2">
+            <a:schemeClr val="accent1"/>
+          </a:effectRef>
+          <a:fontRef idx="minor">
+            <a:schemeClr val="lt1"/>
+          </a:fontRef>
+        </p:style>
+        <p:txBody>
+          <a:bodyPr wrap="none" tIns="18288" bIns="18288" rtlCol="0" anchor="ctr"/>
+          <a:lstStyle/>
+          <a:p>
+            <a:pPr algn="ctr"/>
+            <a:r>
+              <a:rPr sz="1400" b="1">
+                <a:solidFill>
+                  <a:srgbClr val="F1EDE6"/>
+                </a:solidFill>
+                <a:latin typeface="Trebuchet MS"/>
+              </a:rPr>
+              <a:t>Lastenheft</a:t>
+            </a:r>
+          </a:p>
+        </p:txBody>
+      </p:sp>
+      <p:sp>
+        <p:nvSpPr>
+          <p:cNvPr id="12" name="Rounded Rectangle 11"/>
+          <p:cNvSpPr/>
+          <p:nvPr/>
+        </p:nvSpPr>
+        <p:spPr>
+          <a:xfrm>
+            <a:off x="8055864" y="2194560"/>
+            <a:ext cx="3291840" cy="640080"/>
+          </a:xfrm>
+          <a:prstGeom prst="roundRect">
+            <a:avLst>
+              <a:gd name="adj" fmla="val 50000"/>
+            </a:avLst>
+          </a:prstGeom>
+          <a:solidFill>
+            <a:srgbClr val="3A2F66"/>
+          </a:solidFill>
+          <a:ln>
+            <a:noFill/>
+          </a:ln>
+          <a:effectLst/>
+        </p:spPr>
+        <p:style>
+          <a:lnRef idx="1">
+            <a:schemeClr val="accent1"/>
+          </a:lnRef>
+          <a:fillRef idx="3">
+            <a:schemeClr val="accent1"/>
+          </a:fillRef>
+          <a:effectRef idx="2">
+            <a:schemeClr val="accent1"/>
+          </a:effectRef>
+          <a:fontRef idx="minor">
+            <a:schemeClr val="lt1"/>
+          </a:fontRef>
+        </p:style>
+        <p:txBody>
+          <a:bodyPr wrap="none" tIns="18288" bIns="18288" rtlCol="0" anchor="ctr"/>
+          <a:lstStyle/>
+          <a:p>
+            <a:pPr algn="ctr"/>
+            <a:r>
+              <a:rPr sz="1400" b="1">
+                <a:solidFill>
+                  <a:srgbClr val="F1EDE6"/>
+                </a:solidFill>
+                <a:latin typeface="Trebuchet MS"/>
+              </a:rPr>
+              <a:t>Pflichtenheft</a:t>
+            </a:r>
+          </a:p>
+        </p:txBody>
+      </p:sp>
+      <p:sp>
+        <p:nvSpPr>
+          <p:cNvPr id="13" name="Rounded Rectangle 12"/>
+          <p:cNvSpPr/>
+          <p:nvPr/>
+        </p:nvSpPr>
+        <p:spPr>
+          <a:xfrm>
+            <a:off x="868680" y="3063240"/>
+            <a:ext cx="3291840" cy="640080"/>
+          </a:xfrm>
+          <a:prstGeom prst="roundRect">
+            <a:avLst>
+              <a:gd name="adj" fmla="val 50000"/>
+            </a:avLst>
+          </a:prstGeom>
+          <a:solidFill>
+            <a:srgbClr val="3A2F66"/>
+          </a:solidFill>
+          <a:ln>
+            <a:noFill/>
+          </a:ln>
+          <a:effectLst/>
+        </p:spPr>
+        <p:style>
+          <a:lnRef idx="1">
+            <a:schemeClr val="accent1"/>
+          </a:lnRef>
+          <a:fillRef idx="3">
+            <a:schemeClr val="accent1"/>
+          </a:fillRef>
+          <a:effectRef idx="2">
+            <a:schemeClr val="accent1"/>
+          </a:effectRef>
+          <a:fontRef idx="minor">
+            <a:schemeClr val="lt1"/>
+          </a:fontRef>
+        </p:style>
+        <p:txBody>
+          <a:bodyPr wrap="none" tIns="18288" bIns="18288" rtlCol="0" anchor="ctr"/>
+          <a:lstStyle/>
+          <a:p>
+            <a:pPr algn="ctr"/>
+            <a:r>
+              <a:rPr sz="1400" b="1">
+                <a:solidFill>
+                  <a:srgbClr val="F1EDE6"/>
+                </a:solidFill>
+                <a:latin typeface="Trebuchet MS"/>
+              </a:rPr>
+              <a:t>Projekthandbuch</a:t>
+            </a:r>
+          </a:p>
+        </p:txBody>
+      </p:sp>
+      <p:sp>
+        <p:nvSpPr>
+          <p:cNvPr id="14" name="Rounded Rectangle 13"/>
+          <p:cNvSpPr/>
+          <p:nvPr/>
+        </p:nvSpPr>
+        <p:spPr>
+          <a:xfrm>
+            <a:off x="4462272" y="3063240"/>
+            <a:ext cx="3291840" cy="640080"/>
+          </a:xfrm>
+          <a:prstGeom prst="roundRect">
+            <a:avLst>
+              <a:gd name="adj" fmla="val 50000"/>
+            </a:avLst>
+          </a:prstGeom>
+          <a:solidFill>
+            <a:srgbClr val="3A2F66"/>
+          </a:solidFill>
+          <a:ln>
+            <a:noFill/>
+          </a:ln>
+          <a:effectLst/>
+        </p:spPr>
+        <p:style>
+          <a:lnRef idx="1">
+            <a:schemeClr val="accent1"/>
+          </a:lnRef>
+          <a:fillRef idx="3">
+            <a:schemeClr val="accent1"/>
+          </a:fillRef>
+          <a:effectRef idx="2">
+            <a:schemeClr val="accent1"/>
+          </a:effectRef>
+          <a:fontRef idx="minor">
+            <a:schemeClr val="lt1"/>
+          </a:fontRef>
+        </p:style>
+        <p:txBody>
+          <a:bodyPr wrap="none" tIns="18288" bIns="18288" rtlCol="0" anchor="ctr"/>
+          <a:lstStyle/>
+          <a:p>
+            <a:pPr algn="ctr"/>
+            <a:r>
+              <a:rPr sz="1400" b="1">
+                <a:solidFill>
+                  <a:srgbClr val="F1EDE6"/>
+                </a:solidFill>
+                <a:latin typeface="Trebuchet MS"/>
+              </a:rPr>
+              <a:t>Benutzerhandbuch</a:t>
+            </a:r>
+          </a:p>
+        </p:txBody>
+      </p:sp>
+      <p:sp>
+        <p:nvSpPr>
+          <p:cNvPr id="15" name="Rounded Rectangle 14"/>
+          <p:cNvSpPr/>
+          <p:nvPr/>
+        </p:nvSpPr>
+        <p:spPr>
+          <a:xfrm>
+            <a:off x="8055864" y="3063240"/>
+            <a:ext cx="3291840" cy="640080"/>
+          </a:xfrm>
+          <a:prstGeom prst="roundRect">
+            <a:avLst>
+              <a:gd name="adj" fmla="val 50000"/>
+            </a:avLst>
+          </a:prstGeom>
+          <a:solidFill>
+            <a:srgbClr val="3A2F66"/>
+          </a:solidFill>
+          <a:ln>
+            <a:noFill/>
+          </a:ln>
+          <a:effectLst/>
+        </p:spPr>
+        <p:style>
+          <a:lnRef idx="1">
+            <a:schemeClr val="accent1"/>
+          </a:lnRef>
+          <a:fillRef idx="3">
+            <a:schemeClr val="accent1"/>
+          </a:fillRef>
+          <a:effectRef idx="2">
+            <a:schemeClr val="accent1"/>
+          </a:effectRef>
+          <a:fontRef idx="minor">
+            <a:schemeClr val="lt1"/>
+          </a:fontRef>
+        </p:style>
+        <p:txBody>
+          <a:bodyPr wrap="none" tIns="18288" bIns="18288" rtlCol="0" anchor="ctr"/>
+          <a:lstStyle/>
+          <a:p>
+            <a:pPr algn="ctr"/>
+            <a:r>
+              <a:rPr sz="1400" b="1">
+                <a:solidFill>
+                  <a:srgbClr val="F1EDE6"/>
+                </a:solidFill>
+                <a:latin typeface="Trebuchet MS"/>
+              </a:rPr>
+              <a:t>Statusberichte</a:t>
+            </a:r>
+          </a:p>
+        </p:txBody>
+      </p:sp>
+      <p:sp>
+        <p:nvSpPr>
+          <p:cNvPr id="16" name="TextBox 15"/>
+          <p:cNvSpPr txBox="1"/>
+          <p:nvPr/>
+        </p:nvSpPr>
+        <p:spPr>
+          <a:xfrm>
+            <a:off x="868680" y="4114800"/>
+            <a:ext cx="10424160" cy="457200"/>
+          </a:xfrm>
+          <a:prstGeom prst="rect">
+            <a:avLst/>
+          </a:prstGeom>
+          <a:noFill/>
+        </p:spPr>
+        <p:txBody>
+          <a:bodyPr wrap="square" lIns="45720" tIns="18288" rIns="45720" bIns="18288" anchor="t">
+            <a:spAutoFit/>
+          </a:bodyPr>
+          <a:lstStyle/>
+          <a:p>
+            <a:pPr algn="l">
+              <a:spcBef>
+                <a:spcPts val="0"/>
+              </a:spcBef>
+              <a:spcAft>
+                <a:spcPts val="0"/>
+              </a:spcAft>
+            </a:pPr>
+            <a:r>
+              <a:rPr sz="1600" b="1" i="0">
+                <a:solidFill>
+                  <a:srgbClr val="76E3F1"/>
+                </a:solidFill>
+                <a:latin typeface="Trebuchet MS"/>
+              </a:rPr>
+              <a:t>Zeitlicher Rahmen</a:t>
+            </a:r>
+          </a:p>
+        </p:txBody>
+      </p:sp>
+      <p:sp>
+        <p:nvSpPr>
+          <p:cNvPr id="17" name="Rectangle 16"/>
+          <p:cNvSpPr/>
+          <p:nvPr/>
+        </p:nvSpPr>
+        <p:spPr>
+          <a:xfrm>
+            <a:off x="1097280" y="5074920"/>
+            <a:ext cx="9966960" cy="38100"/>
+          </a:xfrm>
+          <a:prstGeom prst="rect">
+            <a:avLst/>
+          </a:prstGeom>
+          <a:solidFill>
+            <a:srgbClr val="7157AF"/>
+          </a:solidFill>
+          <a:ln>
+            <a:noFill/>
+          </a:ln>
+          <a:effectLst/>
+        </p:spPr>
+        <p:style>
+          <a:lnRef idx="1">
+            <a:schemeClr val="accent1"/>
+          </a:lnRef>
+          <a:fillRef idx="3">
+            <a:schemeClr val="accent1"/>
+          </a:fillRef>
+          <a:effectRef idx="2">
+            <a:schemeClr val="accent1"/>
+          </a:effectRef>
+          <a:fontRef idx="minor">
+            <a:schemeClr val="lt1"/>
+          </a:fontRef>
+        </p:style>
+        <p:txBody>
+          <a:bodyPr rtlCol="0" anchor="ctr"/>
+          <a:lstStyle/>
+          <a:p>
+            <a:pPr algn="ctr"/>
+            <a:endParaRPr/>
+          </a:p>
+        </p:txBody>
+      </p:sp>
+      <p:sp>
+        <p:nvSpPr>
+          <p:cNvPr id="18" name="Oval 17"/>
+          <p:cNvSpPr/>
+          <p:nvPr/>
+        </p:nvSpPr>
+        <p:spPr>
+          <a:xfrm>
+            <a:off x="978408" y="4937760"/>
+            <a:ext cx="292608" cy="292608"/>
+          </a:xfrm>
+          <a:prstGeom prst="ellipse">
+            <a:avLst/>
           </a:prstGeom>
           <a:solidFill>
             <a:srgbClr val="44B9C9"/>
@@ -10390,14 +11893,14 @@
       </p:sp>
       <p:sp>
         <p:nvSpPr>
-          <p:cNvPr id="11" name="TextBox 10"/>
+          <p:cNvPr id="19" name="TextBox 18"/>
           <p:cNvSpPr txBox="1"/>
           <p:nvPr/>
         </p:nvSpPr>
         <p:spPr>
           <a:xfrm>
-            <a:off x="1417320" y="1874520"/>
-            <a:ext cx="4343400" cy="914400"/>
+            <a:off x="457200" y="5349240"/>
+            <a:ext cx="1737360" cy="565283"/>
           </a:xfrm>
           <a:prstGeom prst="rect">
             <a:avLst/>
@@ -10410,167 +11913,73 @@
           </a:bodyPr>
           <a:lstStyle/>
           <a:p>
-            <a:pPr algn="l">
-              <a:spcBef>
-                <a:spcPts val="0"/>
-              </a:spcBef>
-              <a:spcAft>
-                <a:spcPts val="300"/>
-              </a:spcAft>
-            </a:pPr>
-            <a:r>
-              <a:rPr sz="1550" b="1" i="0" dirty="0" err="1">
+            <a:pPr algn="ctr">
+              <a:spcBef>
+                <a:spcPts val="0"/>
+              </a:spcBef>
+              <a:spcAft>
+                <a:spcPts val="100"/>
+              </a:spcAft>
+            </a:pPr>
+            <a:r>
+              <a:rPr sz="1250" b="1" i="0" dirty="0">
                 <a:solidFill>
                   <a:srgbClr val="F1EDE6"/>
                 </a:solidFill>
                 <a:latin typeface="Trebuchet MS"/>
               </a:rPr>
-              <a:t>Authentifizierung</a:t>
-            </a:r>
-            <a:endParaRPr sz="1550" b="1" i="0" dirty="0">
+              <a:t>06.05.26</a:t>
+            </a:r>
+          </a:p>
+          <a:p>
+            <a:pPr algn="ctr">
+              <a:spcBef>
+                <a:spcPts val="0"/>
+              </a:spcBef>
+              <a:spcAft>
+                <a:spcPts val="0"/>
+              </a:spcAft>
+            </a:pPr>
+            <a:r>
+              <a:rPr sz="1050" b="0" i="0" dirty="0" err="1">
+                <a:solidFill>
+                  <a:srgbClr val="B9AFD6"/>
+                </a:solidFill>
+                <a:latin typeface="Trebuchet MS"/>
+              </a:rPr>
+              <a:t>Projektstart</a:t>
+            </a:r>
+            <a:r>
+              <a:rPr lang="de-AT" sz="1050" b="0" i="0" dirty="0">
+                <a:solidFill>
+                  <a:srgbClr val="B9AFD6"/>
+                </a:solidFill>
+                <a:latin typeface="Trebuchet MS"/>
+              </a:rPr>
+              <a:t> &amp; Initiale Dokumentation</a:t>
+            </a:r>
+            <a:endParaRPr sz="1050" b="0" i="0" dirty="0">
               <a:solidFill>
-                <a:srgbClr val="F1EDE6"/>
+                <a:srgbClr val="B9AFD6"/>
               </a:solidFill>
               <a:latin typeface="Trebuchet MS"/>
             </a:endParaRPr>
           </a:p>
-          <a:p>
-            <a:pPr algn="l">
-              <a:spcBef>
-                <a:spcPts val="0"/>
-              </a:spcBef>
-              <a:spcAft>
-                <a:spcPts val="0"/>
-              </a:spcAft>
-            </a:pPr>
-            <a:r>
-              <a:rPr sz="1200" b="0" i="0" dirty="0">
-                <a:solidFill>
-                  <a:srgbClr val="B9AFD6"/>
-                </a:solidFill>
-                <a:latin typeface="Trebuchet MS"/>
-              </a:rPr>
-              <a:t>Login/</a:t>
-            </a:r>
-            <a:r>
-              <a:rPr sz="1200" b="0" i="0" dirty="0" err="1">
-                <a:solidFill>
-                  <a:srgbClr val="B9AFD6"/>
-                </a:solidFill>
-                <a:latin typeface="Trebuchet MS"/>
-              </a:rPr>
-              <a:t>Registrierung</a:t>
-            </a:r>
-            <a:r>
-              <a:rPr sz="1200" b="0" i="0" dirty="0">
-                <a:solidFill>
-                  <a:srgbClr val="B9AFD6"/>
-                </a:solidFill>
-                <a:latin typeface="Trebuchet MS"/>
-              </a:rPr>
-              <a:t> </a:t>
-            </a:r>
-            <a:r>
-              <a:rPr sz="1200" b="0" i="0" dirty="0" err="1">
-                <a:solidFill>
-                  <a:srgbClr val="B9AFD6"/>
-                </a:solidFill>
-                <a:latin typeface="Trebuchet MS"/>
-              </a:rPr>
-              <a:t>mit</a:t>
-            </a:r>
-            <a:r>
-              <a:rPr sz="1200" b="0" i="0" dirty="0">
-                <a:solidFill>
-                  <a:srgbClr val="B9AFD6"/>
-                </a:solidFill>
-                <a:latin typeface="Trebuchet MS"/>
-              </a:rPr>
-              <a:t> Mehr-Faktor-</a:t>
-            </a:r>
-            <a:r>
-              <a:rPr sz="1200" b="0" i="0" dirty="0" err="1">
-                <a:solidFill>
-                  <a:srgbClr val="B9AFD6"/>
-                </a:solidFill>
-                <a:latin typeface="Trebuchet MS"/>
-              </a:rPr>
-              <a:t>Authentifizierung</a:t>
-            </a:r>
-            <a:r>
-              <a:rPr sz="1200" b="0" i="0" dirty="0">
-                <a:solidFill>
-                  <a:srgbClr val="B9AFD6"/>
-                </a:solidFill>
-                <a:latin typeface="Trebuchet MS"/>
-              </a:rPr>
-              <a:t> (MFA).</a:t>
-            </a:r>
-          </a:p>
-        </p:txBody>
-      </p:sp>
-      <p:sp>
-        <p:nvSpPr>
-          <p:cNvPr id="12" name="Rounded Rectangle 11"/>
+        </p:txBody>
+      </p:sp>
+      <p:sp>
+        <p:nvSpPr>
+          <p:cNvPr id="20" name="Oval 19"/>
           <p:cNvSpPr/>
           <p:nvPr/>
         </p:nvSpPr>
         <p:spPr>
           <a:xfrm>
-            <a:off x="6217920" y="1691640"/>
-            <a:ext cx="5074920" cy="1234440"/>
-          </a:xfrm>
-          <a:prstGeom prst="roundRect">
-            <a:avLst>
-              <a:gd name="adj" fmla="val 8000"/>
-            </a:avLst>
-          </a:prstGeom>
-          <a:solidFill>
-            <a:srgbClr val="3A2F66"/>
-          </a:solidFill>
-          <a:ln>
-            <a:noFill/>
-          </a:ln>
-          <a:effectLst/>
-        </p:spPr>
-        <p:style>
-          <a:lnRef idx="1">
-            <a:schemeClr val="accent1"/>
-          </a:lnRef>
-          <a:fillRef idx="3">
-            <a:schemeClr val="accent1"/>
-          </a:fillRef>
-          <a:effectRef idx="2">
-            <a:schemeClr val="accent1"/>
-          </a:effectRef>
-          <a:fontRef idx="minor">
-            <a:schemeClr val="lt1"/>
-          </a:fontRef>
-        </p:style>
-        <p:txBody>
-          <a:bodyPr rtlCol="0" anchor="ctr"/>
-          <a:lstStyle/>
-          <a:p>
-            <a:pPr algn="ctr"/>
-            <a:endParaRPr/>
-          </a:p>
-        </p:txBody>
-      </p:sp>
-      <p:sp>
-        <p:nvSpPr>
-          <p:cNvPr id="13" name="Rounded Rectangle 12"/>
-          <p:cNvSpPr/>
-          <p:nvPr/>
-        </p:nvSpPr>
-        <p:spPr>
-          <a:xfrm>
-            <a:off x="6473952" y="1947672"/>
-            <a:ext cx="82296" cy="713232"/>
-          </a:xfrm>
-          <a:prstGeom prst="roundRect">
-            <a:avLst>
-              <a:gd name="adj" fmla="val 50000"/>
-            </a:avLst>
+            <a:off x="4224528" y="4937760"/>
+            <a:ext cx="292608" cy="292608"/>
+          </a:xfrm>
+          <a:prstGeom prst="ellipse">
+            <a:avLst/>
           </a:prstGeom>
           <a:solidFill>
             <a:srgbClr val="FFA228"/>
@@ -10605,14 +12014,14 @@
       </p:sp>
       <p:sp>
         <p:nvSpPr>
-          <p:cNvPr id="14" name="TextBox 13"/>
+          <p:cNvPr id="21" name="TextBox 20"/>
           <p:cNvSpPr txBox="1"/>
           <p:nvPr/>
         </p:nvSpPr>
         <p:spPr>
           <a:xfrm>
-            <a:off x="6766560" y="1874520"/>
-            <a:ext cx="4343400" cy="914400"/>
+            <a:off x="3703320" y="5349240"/>
+            <a:ext cx="1737360" cy="565283"/>
           </a:xfrm>
           <a:prstGeom prst="rect">
             <a:avLst/>
@@ -10625,370 +12034,122 @@
           </a:bodyPr>
           <a:lstStyle/>
           <a:p>
-            <a:pPr algn="l">
-              <a:spcBef>
-                <a:spcPts val="0"/>
-              </a:spcBef>
-              <a:spcAft>
-                <a:spcPts val="300"/>
-              </a:spcAft>
-            </a:pPr>
-            <a:r>
-              <a:rPr sz="1550" b="1" i="0">
+            <a:pPr algn="ctr">
+              <a:spcBef>
+                <a:spcPts val="0"/>
+              </a:spcBef>
+              <a:spcAft>
+                <a:spcPts val="100"/>
+              </a:spcAft>
+            </a:pPr>
+            <a:r>
+              <a:rPr sz="1250" b="1" i="0" dirty="0">
                 <a:solidFill>
                   <a:srgbClr val="F1EDE6"/>
                 </a:solidFill>
                 <a:latin typeface="Trebuchet MS"/>
               </a:rPr>
-              <a:t>CSRF-Schutz</a:t>
-            </a:r>
-          </a:p>
-          <a:p>
-            <a:pPr algn="l">
-              <a:spcBef>
-                <a:spcPts val="0"/>
-              </a:spcBef>
-              <a:spcAft>
-                <a:spcPts val="0"/>
-              </a:spcAft>
-            </a:pPr>
-            <a:r>
-              <a:rPr sz="1200" b="0" i="0">
+              <a:t>Mai–Jun</a:t>
+            </a:r>
+            <a:r>
+              <a:rPr lang="de-AT" sz="1250" b="1" i="0" dirty="0">
+                <a:solidFill>
+                  <a:srgbClr val="F1EDE6"/>
+                </a:solidFill>
+                <a:latin typeface="Trebuchet MS"/>
+              </a:rPr>
+              <a:t>i</a:t>
+            </a:r>
+            <a:endParaRPr sz="1250" b="1" i="0" dirty="0">
+              <a:solidFill>
+                <a:srgbClr val="F1EDE6"/>
+              </a:solidFill>
+              <a:latin typeface="Trebuchet MS"/>
+            </a:endParaRPr>
+          </a:p>
+          <a:p>
+            <a:pPr algn="ctr">
+              <a:spcBef>
+                <a:spcPts val="0"/>
+              </a:spcBef>
+              <a:spcAft>
+                <a:spcPts val="0"/>
+              </a:spcAft>
+            </a:pPr>
+            <a:r>
+              <a:rPr sz="1050" b="0" i="0" dirty="0" err="1">
                 <a:solidFill>
                   <a:srgbClr val="B9AFD6"/>
                 </a:solidFill>
                 <a:latin typeface="Trebuchet MS"/>
               </a:rPr>
-              <a:t>Eigene Middleware sichert die API gegen Cross-Site-Request-Forgery.</a:t>
-            </a:r>
-          </a:p>
-        </p:txBody>
-      </p:sp>
-      <p:sp>
-        <p:nvSpPr>
-          <p:cNvPr id="15" name="Rounded Rectangle 14"/>
+              <a:t>Umsetzung</a:t>
+            </a:r>
+            <a:r>
+              <a:rPr lang="de-AT" sz="1050" b="0" i="0" dirty="0">
+                <a:solidFill>
+                  <a:srgbClr val="B9AFD6"/>
+                </a:solidFill>
+                <a:latin typeface="Trebuchet MS"/>
+              </a:rPr>
+              <a:t> (Code)</a:t>
+            </a:r>
+            <a:endParaRPr sz="1050" b="0" i="0" dirty="0">
+              <a:solidFill>
+                <a:srgbClr val="B9AFD6"/>
+              </a:solidFill>
+              <a:latin typeface="Trebuchet MS"/>
+            </a:endParaRPr>
+          </a:p>
+          <a:p>
+            <a:pPr algn="ctr">
+              <a:spcBef>
+                <a:spcPts val="0"/>
+              </a:spcBef>
+              <a:spcAft>
+                <a:spcPts val="0"/>
+              </a:spcAft>
+            </a:pPr>
+            <a:r>
+              <a:rPr sz="1050" b="0" i="0" dirty="0">
+                <a:solidFill>
+                  <a:srgbClr val="B9AFD6"/>
+                </a:solidFill>
+                <a:latin typeface="Trebuchet MS"/>
+              </a:rPr>
+              <a:t>&amp; </a:t>
+            </a:r>
+            <a:r>
+              <a:rPr sz="1050" b="0" i="0" dirty="0" err="1">
+                <a:solidFill>
+                  <a:srgbClr val="B9AFD6"/>
+                </a:solidFill>
+                <a:latin typeface="Trebuchet MS"/>
+              </a:rPr>
+              <a:t>Wochenstatus</a:t>
+            </a:r>
+            <a:endParaRPr sz="1050" b="0" i="0" dirty="0">
+              <a:solidFill>
+                <a:srgbClr val="B9AFD6"/>
+              </a:solidFill>
+              <a:latin typeface="Trebuchet MS"/>
+            </a:endParaRPr>
+          </a:p>
+        </p:txBody>
+      </p:sp>
+      <p:sp>
+        <p:nvSpPr>
+          <p:cNvPr id="22" name="Oval 21"/>
           <p:cNvSpPr/>
           <p:nvPr/>
         </p:nvSpPr>
         <p:spPr>
           <a:xfrm>
-            <a:off x="868680" y="3154680"/>
-            <a:ext cx="5074920" cy="1234440"/>
-          </a:xfrm>
-          <a:prstGeom prst="roundRect">
-            <a:avLst>
-              <a:gd name="adj" fmla="val 8000"/>
-            </a:avLst>
-          </a:prstGeom>
-          <a:solidFill>
-            <a:srgbClr val="3A2F66"/>
-          </a:solidFill>
-          <a:ln>
-            <a:noFill/>
-          </a:ln>
-          <a:effectLst/>
-        </p:spPr>
-        <p:style>
-          <a:lnRef idx="1">
-            <a:schemeClr val="accent1"/>
-          </a:lnRef>
-          <a:fillRef idx="3">
-            <a:schemeClr val="accent1"/>
-          </a:fillRef>
-          <a:effectRef idx="2">
-            <a:schemeClr val="accent1"/>
-          </a:effectRef>
-          <a:fontRef idx="minor">
-            <a:schemeClr val="lt1"/>
-          </a:fontRef>
-        </p:style>
-        <p:txBody>
-          <a:bodyPr rtlCol="0" anchor="ctr"/>
-          <a:lstStyle/>
-          <a:p>
-            <a:pPr algn="ctr"/>
-            <a:endParaRPr/>
-          </a:p>
-        </p:txBody>
-      </p:sp>
-      <p:sp>
-        <p:nvSpPr>
-          <p:cNvPr id="16" name="Rounded Rectangle 15"/>
-          <p:cNvSpPr/>
-          <p:nvPr/>
-        </p:nvSpPr>
-        <p:spPr>
-          <a:xfrm>
-            <a:off x="1124712" y="3410712"/>
-            <a:ext cx="82296" cy="713232"/>
-          </a:xfrm>
-          <a:prstGeom prst="roundRect">
-            <a:avLst>
-              <a:gd name="adj" fmla="val 50000"/>
-            </a:avLst>
-          </a:prstGeom>
-          <a:solidFill>
-            <a:srgbClr val="8560DD"/>
-          </a:solidFill>
-          <a:ln>
-            <a:noFill/>
-          </a:ln>
-          <a:effectLst/>
-        </p:spPr>
-        <p:style>
-          <a:lnRef idx="1">
-            <a:schemeClr val="accent1"/>
-          </a:lnRef>
-          <a:fillRef idx="3">
-            <a:schemeClr val="accent1"/>
-          </a:fillRef>
-          <a:effectRef idx="2">
-            <a:schemeClr val="accent1"/>
-          </a:effectRef>
-          <a:fontRef idx="minor">
-            <a:schemeClr val="lt1"/>
-          </a:fontRef>
-        </p:style>
-        <p:txBody>
-          <a:bodyPr rtlCol="0" anchor="ctr"/>
-          <a:lstStyle/>
-          <a:p>
-            <a:pPr algn="ctr"/>
-            <a:endParaRPr/>
-          </a:p>
-        </p:txBody>
-      </p:sp>
-      <p:sp>
-        <p:nvSpPr>
-          <p:cNvPr id="17" name="TextBox 16"/>
-          <p:cNvSpPr txBox="1"/>
-          <p:nvPr/>
-        </p:nvSpPr>
-        <p:spPr>
-          <a:xfrm>
-            <a:off x="1417320" y="3337560"/>
-            <a:ext cx="4343400" cy="683264"/>
-          </a:xfrm>
-          <a:prstGeom prst="rect">
+            <a:off x="7470648" y="4937760"/>
+            <a:ext cx="292608" cy="292608"/>
+          </a:xfrm>
+          <a:prstGeom prst="ellipse">
             <a:avLst/>
-          </a:prstGeom>
-          <a:noFill/>
-        </p:spPr>
-        <p:txBody>
-          <a:bodyPr wrap="square" lIns="45720" tIns="18288" rIns="45720" bIns="18288" anchor="t">
-            <a:spAutoFit/>
-          </a:bodyPr>
-          <a:lstStyle/>
-          <a:p>
-            <a:pPr algn="l">
-              <a:spcBef>
-                <a:spcPts val="0"/>
-              </a:spcBef>
-              <a:spcAft>
-                <a:spcPts val="300"/>
-              </a:spcAft>
-            </a:pPr>
-            <a:r>
-              <a:rPr sz="1550" b="1" i="0" dirty="0" err="1">
-                <a:solidFill>
-                  <a:srgbClr val="F1EDE6"/>
-                </a:solidFill>
-                <a:latin typeface="Trebuchet MS"/>
-              </a:rPr>
-              <a:t>Sichere</a:t>
-            </a:r>
-            <a:r>
-              <a:rPr sz="1550" b="1" i="0" dirty="0">
-                <a:solidFill>
-                  <a:srgbClr val="F1EDE6"/>
-                </a:solidFill>
-                <a:latin typeface="Trebuchet MS"/>
-              </a:rPr>
-              <a:t> API</a:t>
-            </a:r>
-          </a:p>
-          <a:p>
-            <a:pPr algn="l">
-              <a:spcBef>
-                <a:spcPts val="0"/>
-              </a:spcBef>
-              <a:spcAft>
-                <a:spcPts val="0"/>
-              </a:spcAft>
-            </a:pPr>
-            <a:r>
-              <a:rPr sz="1200" b="0" i="0" dirty="0">
-                <a:solidFill>
-                  <a:srgbClr val="B9AFD6"/>
-                </a:solidFill>
-                <a:latin typeface="Trebuchet MS"/>
-              </a:rPr>
-              <a:t>Gesch</a:t>
-            </a:r>
-            <a:r>
-              <a:rPr lang="de-AT" sz="1200" b="0" i="0" dirty="0">
-                <a:solidFill>
-                  <a:srgbClr val="B9AFD6"/>
-                </a:solidFill>
-                <a:latin typeface="Trebuchet MS"/>
-              </a:rPr>
-              <a:t>ü</a:t>
-            </a:r>
-            <a:r>
-              <a:rPr sz="1200" b="0" i="0" dirty="0" err="1">
-                <a:solidFill>
-                  <a:srgbClr val="B9AFD6"/>
-                </a:solidFill>
-                <a:latin typeface="Trebuchet MS"/>
-              </a:rPr>
-              <a:t>tzte</a:t>
-            </a:r>
-            <a:r>
-              <a:rPr sz="1200" b="0" i="0" dirty="0">
-                <a:solidFill>
-                  <a:srgbClr val="B9AFD6"/>
-                </a:solidFill>
-                <a:latin typeface="Trebuchet MS"/>
-              </a:rPr>
-              <a:t> </a:t>
-            </a:r>
-            <a:r>
-              <a:rPr sz="1200" b="0" i="0" dirty="0" err="1">
-                <a:solidFill>
-                  <a:srgbClr val="B9AFD6"/>
-                </a:solidFill>
-                <a:latin typeface="Trebuchet MS"/>
-              </a:rPr>
-              <a:t>Endpunkte</a:t>
-            </a:r>
-            <a:r>
-              <a:rPr sz="1200" b="0" i="0" dirty="0">
-                <a:solidFill>
-                  <a:srgbClr val="B9AFD6"/>
-                </a:solidFill>
-                <a:latin typeface="Trebuchet MS"/>
-              </a:rPr>
-              <a:t>, </a:t>
-            </a:r>
-            <a:r>
-              <a:rPr sz="1200" b="0" i="0" dirty="0" err="1">
-                <a:solidFill>
-                  <a:srgbClr val="B9AFD6"/>
-                </a:solidFill>
-                <a:latin typeface="Trebuchet MS"/>
-              </a:rPr>
-              <a:t>getrennte</a:t>
-            </a:r>
-            <a:r>
-              <a:rPr sz="1200" b="0" i="0" dirty="0">
-                <a:solidFill>
-                  <a:srgbClr val="B9AFD6"/>
-                </a:solidFill>
-                <a:latin typeface="Trebuchet MS"/>
-              </a:rPr>
-              <a:t> DTOs </a:t>
-            </a:r>
-            <a:r>
-              <a:rPr sz="1200" b="0" i="0" dirty="0" err="1">
-                <a:solidFill>
-                  <a:srgbClr val="B9AFD6"/>
-                </a:solidFill>
-                <a:latin typeface="Trebuchet MS"/>
-              </a:rPr>
-              <a:t>statt</a:t>
-            </a:r>
-            <a:r>
-              <a:rPr sz="1200" b="0" i="0" dirty="0">
-                <a:solidFill>
-                  <a:srgbClr val="B9AFD6"/>
-                </a:solidFill>
-                <a:latin typeface="Trebuchet MS"/>
-              </a:rPr>
-              <a:t> </a:t>
-            </a:r>
-            <a:r>
-              <a:rPr sz="1200" b="0" i="0" dirty="0" err="1">
-                <a:solidFill>
-                  <a:srgbClr val="B9AFD6"/>
-                </a:solidFill>
-                <a:latin typeface="Trebuchet MS"/>
-              </a:rPr>
-              <a:t>direkter</a:t>
-            </a:r>
-            <a:r>
-              <a:rPr sz="1200" b="0" i="0" dirty="0">
-                <a:solidFill>
-                  <a:srgbClr val="B9AFD6"/>
-                </a:solidFill>
-                <a:latin typeface="Trebuchet MS"/>
-              </a:rPr>
-              <a:t> DB-Modelle.</a:t>
-            </a:r>
-          </a:p>
-        </p:txBody>
-      </p:sp>
-      <p:sp>
-        <p:nvSpPr>
-          <p:cNvPr id="18" name="Rounded Rectangle 17"/>
-          <p:cNvSpPr/>
-          <p:nvPr/>
-        </p:nvSpPr>
-        <p:spPr>
-          <a:xfrm>
-            <a:off x="6217920" y="3154680"/>
-            <a:ext cx="5074920" cy="1234440"/>
-          </a:xfrm>
-          <a:prstGeom prst="roundRect">
-            <a:avLst>
-              <a:gd name="adj" fmla="val 8000"/>
-            </a:avLst>
-          </a:prstGeom>
-          <a:solidFill>
-            <a:srgbClr val="3A2F66"/>
-          </a:solidFill>
-          <a:ln>
-            <a:noFill/>
-          </a:ln>
-          <a:effectLst/>
-        </p:spPr>
-        <p:style>
-          <a:lnRef idx="1">
-            <a:schemeClr val="accent1"/>
-          </a:lnRef>
-          <a:fillRef idx="3">
-            <a:schemeClr val="accent1"/>
-          </a:fillRef>
-          <a:effectRef idx="2">
-            <a:schemeClr val="accent1"/>
-          </a:effectRef>
-          <a:fontRef idx="minor">
-            <a:schemeClr val="lt1"/>
-          </a:fontRef>
-        </p:style>
-        <p:txBody>
-          <a:bodyPr rtlCol="0" anchor="ctr"/>
-          <a:lstStyle/>
-          <a:p>
-            <a:pPr algn="ctr"/>
-            <a:endParaRPr/>
-          </a:p>
-        </p:txBody>
-      </p:sp>
-      <p:sp>
-        <p:nvSpPr>
-          <p:cNvPr id="19" name="Rounded Rectangle 18"/>
-          <p:cNvSpPr/>
-          <p:nvPr/>
-        </p:nvSpPr>
-        <p:spPr>
-          <a:xfrm>
-            <a:off x="6473952" y="3410712"/>
-            <a:ext cx="82296" cy="713232"/>
-          </a:xfrm>
-          <a:prstGeom prst="roundRect">
-            <a:avLst>
-              <a:gd name="adj" fmla="val 50000"/>
-            </a:avLst>
           </a:prstGeom>
           <a:solidFill>
             <a:srgbClr val="76E3F1"/>
@@ -11023,14 +12184,14 @@
       </p:sp>
       <p:sp>
         <p:nvSpPr>
-          <p:cNvPr id="20" name="TextBox 19"/>
+          <p:cNvPr id="23" name="TextBox 22"/>
           <p:cNvSpPr txBox="1"/>
           <p:nvPr/>
         </p:nvSpPr>
         <p:spPr>
           <a:xfrm>
-            <a:off x="6766560" y="3337560"/>
-            <a:ext cx="4343400" cy="914400"/>
+            <a:off x="6949440" y="5349240"/>
+            <a:ext cx="1737360" cy="565283"/>
           </a:xfrm>
           <a:prstGeom prst="rect">
             <a:avLst/>
@@ -11043,379 +12204,70 @@
           </a:bodyPr>
           <a:lstStyle/>
           <a:p>
-            <a:pPr algn="l">
-              <a:spcBef>
-                <a:spcPts val="0"/>
-              </a:spcBef>
-              <a:spcAft>
-                <a:spcPts val="300"/>
-              </a:spcAft>
-            </a:pPr>
-            <a:r>
-              <a:rPr sz="1550" b="1" i="0" dirty="0">
+            <a:pPr algn="ctr">
+              <a:spcBef>
+                <a:spcPts val="0"/>
+              </a:spcBef>
+              <a:spcAft>
+                <a:spcPts val="100"/>
+              </a:spcAft>
+            </a:pPr>
+            <a:r>
+              <a:rPr lang="de-AT" sz="1250" b="1" i="0" dirty="0">
                 <a:solidFill>
                   <a:srgbClr val="F1EDE6"/>
                 </a:solidFill>
                 <a:latin typeface="Trebuchet MS"/>
               </a:rPr>
-              <a:t>Optimistic UI</a:t>
-            </a:r>
-          </a:p>
-          <a:p>
-            <a:pPr algn="l">
-              <a:spcBef>
-                <a:spcPts val="0"/>
-              </a:spcBef>
-              <a:spcAft>
-                <a:spcPts val="0"/>
-              </a:spcAft>
-            </a:pPr>
-            <a:r>
-              <a:rPr sz="1200" b="0" i="0" dirty="0" err="1">
+              <a:t>Juni-Juli</a:t>
+            </a:r>
+            <a:endParaRPr sz="1250" b="1" i="0" dirty="0">
+              <a:solidFill>
+                <a:srgbClr val="F1EDE6"/>
+              </a:solidFill>
+              <a:latin typeface="Trebuchet MS"/>
+            </a:endParaRPr>
+          </a:p>
+          <a:p>
+            <a:pPr algn="ctr">
+              <a:spcBef>
+                <a:spcPts val="0"/>
+              </a:spcBef>
+              <a:spcAft>
+                <a:spcPts val="0"/>
+              </a:spcAft>
+            </a:pPr>
+            <a:r>
+              <a:rPr lang="de-AT" sz="1050" b="0" i="0" dirty="0">
                 <a:solidFill>
                   <a:srgbClr val="B9AFD6"/>
                 </a:solidFill>
                 <a:latin typeface="Trebuchet MS"/>
               </a:rPr>
-              <a:t>Schnelles</a:t>
-            </a:r>
-            <a:r>
-              <a:rPr sz="1200" b="0" i="0" dirty="0">
-                <a:solidFill>
-                  <a:srgbClr val="B9AFD6"/>
-                </a:solidFill>
-                <a:latin typeface="Trebuchet MS"/>
-              </a:rPr>
-              <a:t> </a:t>
-            </a:r>
-            <a:r>
-              <a:rPr sz="1200" b="0" i="0" dirty="0" err="1">
-                <a:solidFill>
-                  <a:srgbClr val="B9AFD6"/>
-                </a:solidFill>
-                <a:latin typeface="Trebuchet MS"/>
-              </a:rPr>
-              <a:t>Gefühl</a:t>
-            </a:r>
-            <a:r>
-              <a:rPr sz="1200" b="0" i="0" dirty="0">
-                <a:solidFill>
-                  <a:srgbClr val="B9AFD6"/>
-                </a:solidFill>
-                <a:latin typeface="Trebuchet MS"/>
-              </a:rPr>
-              <a:t> - </a:t>
-            </a:r>
-            <a:r>
-              <a:rPr sz="1200" b="0" i="0" dirty="0" err="1">
-                <a:solidFill>
-                  <a:srgbClr val="B9AFD6"/>
-                </a:solidFill>
-                <a:latin typeface="Trebuchet MS"/>
-              </a:rPr>
-              <a:t>bei</a:t>
-            </a:r>
-            <a:r>
-              <a:rPr sz="1200" b="0" i="0" dirty="0">
-                <a:solidFill>
-                  <a:srgbClr val="B9AFD6"/>
-                </a:solidFill>
-                <a:latin typeface="Trebuchet MS"/>
-              </a:rPr>
-              <a:t> </a:t>
-            </a:r>
-            <a:r>
-              <a:rPr sz="1200" b="0" i="0" dirty="0" err="1">
-                <a:solidFill>
-                  <a:srgbClr val="B9AFD6"/>
-                </a:solidFill>
-                <a:latin typeface="Trebuchet MS"/>
-              </a:rPr>
-              <a:t>Fehlern</a:t>
-            </a:r>
-            <a:r>
-              <a:rPr sz="1200" b="0" i="0" dirty="0">
-                <a:solidFill>
-                  <a:srgbClr val="B9AFD6"/>
-                </a:solidFill>
-                <a:latin typeface="Trebuchet MS"/>
-              </a:rPr>
-              <a:t> </a:t>
-            </a:r>
-            <a:r>
-              <a:rPr sz="1200" b="0" i="0" dirty="0" err="1">
-                <a:solidFill>
-                  <a:srgbClr val="B9AFD6"/>
-                </a:solidFill>
-                <a:latin typeface="Trebuchet MS"/>
-              </a:rPr>
-              <a:t>wird</a:t>
-            </a:r>
-            <a:r>
-              <a:rPr sz="1200" b="0" i="0" dirty="0">
-                <a:solidFill>
-                  <a:srgbClr val="B9AFD6"/>
-                </a:solidFill>
-                <a:latin typeface="Trebuchet MS"/>
-              </a:rPr>
-              <a:t> </a:t>
-            </a:r>
-            <a:r>
-              <a:rPr sz="1200" b="0" i="0" dirty="0" err="1">
-                <a:solidFill>
-                  <a:srgbClr val="B9AFD6"/>
-                </a:solidFill>
-                <a:latin typeface="Trebuchet MS"/>
-              </a:rPr>
-              <a:t>sauber</a:t>
-            </a:r>
-            <a:r>
-              <a:rPr sz="1200" b="0" i="0" dirty="0">
-                <a:solidFill>
-                  <a:srgbClr val="B9AFD6"/>
-                </a:solidFill>
-                <a:latin typeface="Trebuchet MS"/>
-              </a:rPr>
-              <a:t> </a:t>
-            </a:r>
-            <a:r>
-              <a:rPr sz="1200" b="0" i="0" dirty="0" err="1">
-                <a:solidFill>
-                  <a:srgbClr val="B9AFD6"/>
-                </a:solidFill>
-                <a:latin typeface="Trebuchet MS"/>
-              </a:rPr>
-              <a:t>zurückgerollt</a:t>
-            </a:r>
-            <a:r>
-              <a:rPr sz="1200" b="0" i="0" dirty="0">
-                <a:solidFill>
-                  <a:srgbClr val="B9AFD6"/>
-                </a:solidFill>
-                <a:latin typeface="Trebuchet MS"/>
-              </a:rPr>
-              <a:t>.</a:t>
-            </a:r>
-          </a:p>
-        </p:txBody>
-      </p:sp>
-      <p:sp>
-        <p:nvSpPr>
-          <p:cNvPr id="21" name="Rounded Rectangle 20"/>
+              <a:t>Tests &amp; Restliche Dokumentation</a:t>
+            </a:r>
+            <a:endParaRPr sz="1050" b="0" i="0" dirty="0">
+              <a:solidFill>
+                <a:srgbClr val="B9AFD6"/>
+              </a:solidFill>
+              <a:latin typeface="Trebuchet MS"/>
+            </a:endParaRPr>
+          </a:p>
+        </p:txBody>
+      </p:sp>
+      <p:sp>
+        <p:nvSpPr>
+          <p:cNvPr id="24" name="Oval 23"/>
           <p:cNvSpPr/>
           <p:nvPr/>
         </p:nvSpPr>
         <p:spPr>
           <a:xfrm>
-            <a:off x="868680" y="4617720"/>
-            <a:ext cx="5074920" cy="1234440"/>
-          </a:xfrm>
-          <a:prstGeom prst="roundRect">
-            <a:avLst>
-              <a:gd name="adj" fmla="val 8000"/>
-            </a:avLst>
-          </a:prstGeom>
-          <a:solidFill>
-            <a:srgbClr val="3A2F66"/>
-          </a:solidFill>
-          <a:ln>
-            <a:noFill/>
-          </a:ln>
-          <a:effectLst/>
-        </p:spPr>
-        <p:style>
-          <a:lnRef idx="1">
-            <a:schemeClr val="accent1"/>
-          </a:lnRef>
-          <a:fillRef idx="3">
-            <a:schemeClr val="accent1"/>
-          </a:fillRef>
-          <a:effectRef idx="2">
-            <a:schemeClr val="accent1"/>
-          </a:effectRef>
-          <a:fontRef idx="minor">
-            <a:schemeClr val="lt1"/>
-          </a:fontRef>
-        </p:style>
-        <p:txBody>
-          <a:bodyPr rtlCol="0" anchor="ctr"/>
-          <a:lstStyle/>
-          <a:p>
-            <a:pPr algn="ctr"/>
-            <a:endParaRPr/>
-          </a:p>
-        </p:txBody>
-      </p:sp>
-      <p:sp>
-        <p:nvSpPr>
-          <p:cNvPr id="22" name="Rounded Rectangle 21"/>
-          <p:cNvSpPr/>
-          <p:nvPr/>
-        </p:nvSpPr>
-        <p:spPr>
-          <a:xfrm>
-            <a:off x="1124712" y="4873752"/>
-            <a:ext cx="82296" cy="713232"/>
-          </a:xfrm>
-          <a:prstGeom prst="roundRect">
-            <a:avLst>
-              <a:gd name="adj" fmla="val 50000"/>
-            </a:avLst>
-          </a:prstGeom>
-          <a:solidFill>
-            <a:srgbClr val="FBBF24"/>
-          </a:solidFill>
-          <a:ln>
-            <a:noFill/>
-          </a:ln>
-          <a:effectLst/>
-        </p:spPr>
-        <p:style>
-          <a:lnRef idx="1">
-            <a:schemeClr val="accent1"/>
-          </a:lnRef>
-          <a:fillRef idx="3">
-            <a:schemeClr val="accent1"/>
-          </a:fillRef>
-          <a:effectRef idx="2">
-            <a:schemeClr val="accent1"/>
-          </a:effectRef>
-          <a:fontRef idx="minor">
-            <a:schemeClr val="lt1"/>
-          </a:fontRef>
-        </p:style>
-        <p:txBody>
-          <a:bodyPr rtlCol="0" anchor="ctr"/>
-          <a:lstStyle/>
-          <a:p>
-            <a:pPr algn="ctr"/>
-            <a:endParaRPr/>
-          </a:p>
-        </p:txBody>
-      </p:sp>
-      <p:sp>
-        <p:nvSpPr>
-          <p:cNvPr id="23" name="TextBox 22"/>
-          <p:cNvSpPr txBox="1"/>
-          <p:nvPr/>
-        </p:nvSpPr>
-        <p:spPr>
-          <a:xfrm>
-            <a:off x="1417320" y="4800600"/>
-            <a:ext cx="4343400" cy="914400"/>
-          </a:xfrm>
-          <a:prstGeom prst="rect">
+            <a:off x="10716768" y="4937760"/>
+            <a:ext cx="292608" cy="292608"/>
+          </a:xfrm>
+          <a:prstGeom prst="ellipse">
             <a:avLst/>
-          </a:prstGeom>
-          <a:noFill/>
-        </p:spPr>
-        <p:txBody>
-          <a:bodyPr wrap="square" lIns="45720" tIns="18288" rIns="45720" bIns="18288" anchor="t">
-            <a:spAutoFit/>
-          </a:bodyPr>
-          <a:lstStyle/>
-          <a:p>
-            <a:pPr algn="l">
-              <a:spcBef>
-                <a:spcPts val="0"/>
-              </a:spcBef>
-              <a:spcAft>
-                <a:spcPts val="300"/>
-              </a:spcAft>
-            </a:pPr>
-            <a:r>
-              <a:rPr sz="1550" b="1" i="0">
-                <a:solidFill>
-                  <a:srgbClr val="F1EDE6"/>
-                </a:solidFill>
-                <a:latin typeface="Trebuchet MS"/>
-              </a:rPr>
-              <a:t>Code-Qualität</a:t>
-            </a:r>
-          </a:p>
-          <a:p>
-            <a:pPr algn="l">
-              <a:spcBef>
-                <a:spcPts val="0"/>
-              </a:spcBef>
-              <a:spcAft>
-                <a:spcPts val="0"/>
-              </a:spcAft>
-            </a:pPr>
-            <a:r>
-              <a:rPr sz="1200" b="0" i="0">
-                <a:solidFill>
-                  <a:srgbClr val="B9AFD6"/>
-                </a:solidFill>
-                <a:latin typeface="Trebuchet MS"/>
-              </a:rPr>
-              <a:t>Objektorientiert, lesbar, dokumentierter Komponentenbaum.</a:t>
-            </a:r>
-          </a:p>
-        </p:txBody>
-      </p:sp>
-      <p:sp>
-        <p:nvSpPr>
-          <p:cNvPr id="24" name="Rounded Rectangle 23"/>
-          <p:cNvSpPr/>
-          <p:nvPr/>
-        </p:nvSpPr>
-        <p:spPr>
-          <a:xfrm>
-            <a:off x="6217920" y="4617720"/>
-            <a:ext cx="5074920" cy="1234440"/>
-          </a:xfrm>
-          <a:prstGeom prst="roundRect">
-            <a:avLst>
-              <a:gd name="adj" fmla="val 8000"/>
-            </a:avLst>
-          </a:prstGeom>
-          <a:solidFill>
-            <a:srgbClr val="3A2F66"/>
-          </a:solidFill>
-          <a:ln>
-            <a:noFill/>
-          </a:ln>
-          <a:effectLst/>
-        </p:spPr>
-        <p:style>
-          <a:lnRef idx="1">
-            <a:schemeClr val="accent1"/>
-          </a:lnRef>
-          <a:fillRef idx="3">
-            <a:schemeClr val="accent1"/>
-          </a:fillRef>
-          <a:effectRef idx="2">
-            <a:schemeClr val="accent1"/>
-          </a:effectRef>
-          <a:fontRef idx="minor">
-            <a:schemeClr val="lt1"/>
-          </a:fontRef>
-        </p:style>
-        <p:txBody>
-          <a:bodyPr rtlCol="0" anchor="ctr"/>
-          <a:lstStyle/>
-          <a:p>
-            <a:pPr algn="ctr"/>
-            <a:endParaRPr/>
-          </a:p>
-        </p:txBody>
-      </p:sp>
-      <p:sp>
-        <p:nvSpPr>
-          <p:cNvPr id="25" name="Rounded Rectangle 24"/>
-          <p:cNvSpPr/>
-          <p:nvPr/>
-        </p:nvSpPr>
-        <p:spPr>
-          <a:xfrm>
-            <a:off x="6473952" y="4873752"/>
-            <a:ext cx="82296" cy="713232"/>
-          </a:xfrm>
-          <a:prstGeom prst="roundRect">
-            <a:avLst>
-              <a:gd name="adj" fmla="val 50000"/>
-            </a:avLst>
           </a:prstGeom>
           <a:solidFill>
             <a:srgbClr val="008040"/>
@@ -11450,14 +12302,14 @@
       </p:sp>
       <p:sp>
         <p:nvSpPr>
-          <p:cNvPr id="26" name="TextBox 25"/>
+          <p:cNvPr id="25" name="TextBox 24"/>
           <p:cNvSpPr txBox="1"/>
           <p:nvPr/>
         </p:nvSpPr>
         <p:spPr>
           <a:xfrm>
-            <a:off x="6766560" y="4800600"/>
-            <a:ext cx="4343400" cy="914400"/>
+            <a:off x="10195560" y="5349240"/>
+            <a:ext cx="1737360" cy="403700"/>
           </a:xfrm>
           <a:prstGeom prst="rect">
             <a:avLst/>
@@ -11470,42 +12322,66 @@
           </a:bodyPr>
           <a:lstStyle/>
           <a:p>
-            <a:pPr algn="l">
-              <a:spcBef>
-                <a:spcPts val="0"/>
-              </a:spcBef>
-              <a:spcAft>
-                <a:spcPts val="300"/>
-              </a:spcAft>
-            </a:pPr>
-            <a:r>
-              <a:rPr sz="1550" b="1" i="0">
+            <a:pPr algn="ctr">
+              <a:spcBef>
+                <a:spcPts val="0"/>
+              </a:spcBef>
+              <a:spcAft>
+                <a:spcPts val="100"/>
+              </a:spcAft>
+            </a:pPr>
+            <a:r>
+              <a:rPr sz="1250" b="1" i="0" dirty="0">
                 <a:solidFill>
                   <a:srgbClr val="F1EDE6"/>
                 </a:solidFill>
                 <a:latin typeface="Trebuchet MS"/>
               </a:rPr>
-              <a:t>Tests</a:t>
-            </a:r>
-          </a:p>
-          <a:p>
-            <a:pPr algn="l">
-              <a:spcBef>
-                <a:spcPts val="0"/>
-              </a:spcBef>
-              <a:spcAft>
-                <a:spcPts val="0"/>
-              </a:spcAft>
-            </a:pPr>
-            <a:r>
-              <a:rPr sz="1200" b="0" i="0">
+              <a:t>0</a:t>
+            </a:r>
+            <a:r>
+              <a:rPr lang="de-AT" sz="1250" b="1" i="0" dirty="0">
+                <a:solidFill>
+                  <a:srgbClr val="F1EDE6"/>
+                </a:solidFill>
+                <a:latin typeface="Trebuchet MS"/>
+              </a:rPr>
+              <a:t>2</a:t>
+            </a:r>
+            <a:r>
+              <a:rPr sz="1250" b="1" i="0" dirty="0">
+                <a:solidFill>
+                  <a:srgbClr val="F1EDE6"/>
+                </a:solidFill>
+                <a:latin typeface="Trebuchet MS"/>
+              </a:rPr>
+              <a:t>.07.26</a:t>
+            </a:r>
+          </a:p>
+          <a:p>
+            <a:pPr algn="ctr">
+              <a:spcBef>
+                <a:spcPts val="0"/>
+              </a:spcBef>
+              <a:spcAft>
+                <a:spcPts val="0"/>
+              </a:spcAft>
+            </a:pPr>
+            <a:r>
+              <a:rPr sz="1050" b="0" i="0" dirty="0" err="1">
                 <a:solidFill>
                   <a:srgbClr val="B9AFD6"/>
                 </a:solidFill>
                 <a:latin typeface="Trebuchet MS"/>
               </a:rPr>
-              <a:t>Eigenes Testprojekt (xUnit) zur Absicherung der Logik.</a:t>
-            </a:r>
+              <a:t>Projektende</a:t>
+            </a:r>
+            <a:endParaRPr sz="1050" b="0" i="0" dirty="0">
+              <a:solidFill>
+                <a:srgbClr val="B9AFD6"/>
+              </a:solidFill>
+              <a:latin typeface="Trebuchet MS"/>
+            </a:endParaRPr>
           </a:p>
         </p:txBody>
       </p:sp>
@@ -11765,7 +12641,7 @@
                 </a:solidFill>
                 <a:latin typeface="Trebuchet MS"/>
               </a:rPr>
-              <a:t>PLANUNG &amp; DOKUMENTATION</a:t>
+              <a:t>WOHIN LUMIFY WACHSEN KANN</a:t>
             </a:r>
           </a:p>
           <a:p>
@@ -11784,7 +12660,7 @@
                 </a:solidFill>
                 <a:latin typeface="Trebuchet MS"/>
               </a:rPr>
-              <a:t>Projektablauf</a:t>
+              <a:t>Ausblick</a:t>
             </a:r>
           </a:p>
         </p:txBody>
@@ -11868,21 +12744,68 @@
                 </a:solidFill>
                 <a:latin typeface="Trebuchet MS"/>
               </a:rPr>
-              <a:t>16</a:t>
-            </a:r>
-          </a:p>
-        </p:txBody>
-      </p:sp>
-      <p:sp>
-        <p:nvSpPr>
-          <p:cNvPr id="9" name="TextBox 8"/>
+              <a:t>17</a:t>
+            </a:r>
+          </a:p>
+        </p:txBody>
+      </p:sp>
+      <p:sp>
+        <p:nvSpPr>
+          <p:cNvPr id="9" name="Rounded Rectangle 8"/>
+          <p:cNvSpPr/>
+          <p:nvPr/>
+        </p:nvSpPr>
+        <p:spPr>
+          <a:xfrm>
+            <a:off x="640080" y="566928"/>
+            <a:ext cx="82296" cy="566928"/>
+          </a:xfrm>
+          <a:prstGeom prst="roundRect">
+            <a:avLst>
+              <a:gd name="adj" fmla="val 50000"/>
+            </a:avLst>
+          </a:prstGeom>
+          <a:solidFill>
+            <a:srgbClr val="FFA228"/>
+          </a:solidFill>
+          <a:ln>
+            <a:noFill/>
+          </a:ln>
+          <a:effectLst/>
+        </p:spPr>
+        <p:style>
+          <a:lnRef idx="1">
+            <a:schemeClr val="accent1"/>
+          </a:lnRef>
+          <a:fillRef idx="3">
+            <a:schemeClr val="accent1"/>
+          </a:fillRef>
+          <a:effectRef idx="2">
+            <a:schemeClr val="accent1"/>
+          </a:effectRef>
+          <a:fontRef idx="minor">
+            <a:schemeClr val="lt1"/>
+          </a:fontRef>
+        </p:style>
+        <p:txBody>
+          <a:bodyPr rtlCol="0" anchor="ctr"/>
+          <a:lstStyle/>
+          <a:p>
+            <a:pPr algn="ctr"/>
+            <a:endParaRPr/>
+          </a:p>
+        </p:txBody>
+      </p:sp>
+      <p:sp>
+        <p:nvSpPr>
+          <p:cNvPr id="10" name="TextBox 9"/>
           <p:cNvSpPr txBox="1"/>
           <p:nvPr/>
         </p:nvSpPr>
         <p:spPr>
           <a:xfrm>
-            <a:off x="868680" y="1417320"/>
-            <a:ext cx="10424160" cy="640080"/>
+            <a:off x="868680" y="411480"/>
+            <a:ext cx="10607040" cy="914400"/>
           </a:xfrm>
           <a:prstGeom prst="rect">
             <a:avLst/>
@@ -11900,35 +12823,114 @@
                 <a:spcPts val="0"/>
               </a:spcBef>
               <a:spcAft>
-                <a:spcPts val="0"/>
-              </a:spcAft>
-            </a:pPr>
-            <a:r>
-              <a:rPr sz="1550" b="0" i="0">
+                <a:spcPts val="200"/>
+              </a:spcAft>
+            </a:pPr>
+            <a:r>
+              <a:rPr sz="1300" b="1" i="0">
+                <a:solidFill>
+                  <a:srgbClr val="76E3F1"/>
+                </a:solidFill>
+                <a:latin typeface="Trebuchet MS"/>
+              </a:rPr>
+              <a:t>WOHIN LUMIFY WACHSEN KANN</a:t>
+            </a:r>
+          </a:p>
+          <a:p>
+            <a:pPr algn="l">
+              <a:spcBef>
+                <a:spcPts val="0"/>
+              </a:spcBef>
+              <a:spcAft>
+                <a:spcPts val="0"/>
+              </a:spcAft>
+            </a:pPr>
+            <a:r>
+              <a:rPr sz="3200" b="1" i="0">
                 <a:solidFill>
                   <a:srgbClr val="F1EDE6"/>
                 </a:solidFill>
                 <a:latin typeface="Trebuchet MS"/>
               </a:rPr>
-              <a:t>Lumify wurde nach klassischem Projektmanagement durchgeführt - mit vollständiger Dokumentation:</a:t>
-            </a:r>
-          </a:p>
-        </p:txBody>
-      </p:sp>
-      <p:sp>
-        <p:nvSpPr>
-          <p:cNvPr id="10" name="Rounded Rectangle 9"/>
+              <a:t>Ausblick</a:t>
+            </a:r>
+          </a:p>
+        </p:txBody>
+      </p:sp>
+      <p:sp>
+        <p:nvSpPr>
+          <p:cNvPr id="11" name="TextBox 10"/>
+          <p:cNvSpPr txBox="1"/>
+          <p:nvPr/>
+        </p:nvSpPr>
+        <p:spPr>
+          <a:xfrm>
+            <a:off x="868680" y="1463040"/>
+            <a:ext cx="10424160" cy="822960"/>
+          </a:xfrm>
+          <a:prstGeom prst="rect">
+            <a:avLst/>
+          </a:prstGeom>
+          <a:noFill/>
+        </p:spPr>
+        <p:txBody>
+          <a:bodyPr wrap="square" lIns="45720" tIns="18288" rIns="45720" bIns="18288" anchor="t">
+            <a:spAutoFit/>
+          </a:bodyPr>
+          <a:lstStyle/>
+          <a:p>
+            <a:pPr algn="l">
+              <a:spcBef>
+                <a:spcPts val="0"/>
+              </a:spcBef>
+              <a:spcAft>
+                <a:spcPts val="0"/>
+              </a:spcAft>
+            </a:pPr>
+            <a:r>
+              <a:rPr sz="1600" b="0" i="0">
+                <a:solidFill>
+                  <a:srgbClr val="F1EDE6"/>
+                </a:solidFill>
+                <a:latin typeface="Trebuchet MS"/>
+              </a:rPr>
+              <a:t>Der erweiterbare Aufbau zahlt sich aus: </a:t>
+            </a:r>
+            <a:r>
+              <a:rPr sz="1600" b="1" i="0">
+                <a:solidFill>
+                  <a:srgbClr val="76E3F1"/>
+                </a:solidFill>
+                <a:latin typeface="Trebuchet MS"/>
+              </a:rPr>
+              <a:t>neue Features sind neue Module</a:t>
+            </a:r>
+            <a:r>
+              <a:rPr sz="1600" b="0" i="0">
+                <a:solidFill>
+                  <a:srgbClr val="F1EDE6"/>
+                </a:solidFill>
+                <a:latin typeface="Trebuchet MS"/>
+              </a:rPr>
+              <a:t> - das Fundament bleibt unverändert.</a:t>
+            </a:r>
+          </a:p>
+        </p:txBody>
+      </p:sp>
+      <p:sp>
+        <p:nvSpPr>
+          <p:cNvPr id="12" name="Rounded Rectangle 11"/>
           <p:cNvSpPr/>
           <p:nvPr/>
         </p:nvSpPr>
         <p:spPr>
           <a:xfrm>
-            <a:off x="868680" y="2194560"/>
-            <a:ext cx="3291840" cy="640080"/>
+            <a:off x="868680" y="2423160"/>
+            <a:ext cx="3383280" cy="1645920"/>
           </a:xfrm>
           <a:prstGeom prst="roundRect">
             <a:avLst>
-              <a:gd name="adj" fmla="val 50000"/>
+              <a:gd name="adj" fmla="val 8000"/>
             </a:avLst>
           </a:prstGeom>
           <a:solidFill>
@@ -11954,36 +12956,158 @@
           </a:fontRef>
         </p:style>
         <p:txBody>
-          <a:bodyPr wrap="none" tIns="18288" bIns="18288" rtlCol="0" anchor="ctr"/>
+          <a:bodyPr rtlCol="0" anchor="ctr"/>
           <a:lstStyle/>
           <a:p>
             <a:pPr algn="ctr"/>
-            <a:r>
-              <a:rPr sz="1400" b="1">
+            <a:endParaRPr/>
+          </a:p>
+        </p:txBody>
+      </p:sp>
+      <p:sp>
+        <p:nvSpPr>
+          <p:cNvPr id="13" name="Oval 12"/>
+          <p:cNvSpPr/>
+          <p:nvPr/>
+        </p:nvSpPr>
+        <p:spPr>
+          <a:xfrm>
+            <a:off x="1143000" y="2697480"/>
+            <a:ext cx="411480" cy="411480"/>
+          </a:xfrm>
+          <a:prstGeom prst="ellipse">
+            <a:avLst/>
+          </a:prstGeom>
+          <a:solidFill>
+            <a:srgbClr val="FFA228"/>
+          </a:solidFill>
+          <a:ln>
+            <a:noFill/>
+          </a:ln>
+          <a:effectLst/>
+        </p:spPr>
+        <p:style>
+          <a:lnRef idx="1">
+            <a:schemeClr val="accent1"/>
+          </a:lnRef>
+          <a:fillRef idx="3">
+            <a:schemeClr val="accent1"/>
+          </a:fillRef>
+          <a:effectRef idx="2">
+            <a:schemeClr val="accent1"/>
+          </a:effectRef>
+          <a:fontRef idx="minor">
+            <a:schemeClr val="lt1"/>
+          </a:fontRef>
+        </p:style>
+        <p:txBody>
+          <a:bodyPr rtlCol="0" anchor="ctr"/>
+          <a:lstStyle/>
+          <a:p>
+            <a:pPr algn="ctr"/>
+            <a:endParaRPr/>
+          </a:p>
+        </p:txBody>
+      </p:sp>
+      <p:sp>
+        <p:nvSpPr>
+          <p:cNvPr id="14" name="TextBox 13"/>
+          <p:cNvSpPr txBox="1"/>
+          <p:nvPr/>
+        </p:nvSpPr>
+        <p:spPr>
+          <a:xfrm>
+            <a:off x="1143000" y="3246120"/>
+            <a:ext cx="2834640" cy="652486"/>
+          </a:xfrm>
+          <a:prstGeom prst="rect">
+            <a:avLst/>
+          </a:prstGeom>
+          <a:noFill/>
+        </p:spPr>
+        <p:txBody>
+          <a:bodyPr wrap="square" lIns="45720" tIns="18288" rIns="45720" bIns="18288" anchor="t">
+            <a:spAutoFit/>
+          </a:bodyPr>
+          <a:lstStyle/>
+          <a:p>
+            <a:pPr algn="l">
+              <a:spcBef>
+                <a:spcPts val="0"/>
+              </a:spcBef>
+              <a:spcAft>
+                <a:spcPts val="300"/>
+              </a:spcAft>
+            </a:pPr>
+            <a:r>
+              <a:rPr sz="1450" b="1" i="0" dirty="0">
                 <a:solidFill>
                   <a:srgbClr val="F1EDE6"/>
                 </a:solidFill>
                 <a:latin typeface="Trebuchet MS"/>
               </a:rPr>
-              <a:t>Projektauftrag</a:t>
-            </a:r>
-          </a:p>
-        </p:txBody>
-      </p:sp>
-      <p:sp>
-        <p:nvSpPr>
-          <p:cNvPr id="11" name="Rounded Rectangle 10"/>
+              <a:t>Neue Feature-Module</a:t>
+            </a:r>
+          </a:p>
+          <a:p>
+            <a:pPr algn="l">
+              <a:spcBef>
+                <a:spcPts val="0"/>
+              </a:spcBef>
+              <a:spcAft>
+                <a:spcPts val="0"/>
+              </a:spcAft>
+            </a:pPr>
+            <a:r>
+              <a:rPr sz="1150" b="0" i="0" dirty="0">
+                <a:solidFill>
+                  <a:srgbClr val="B9AFD6"/>
+                </a:solidFill>
+                <a:latin typeface="Trebuchet MS"/>
+              </a:rPr>
+              <a:t>z. B. Whiteboard, </a:t>
+            </a:r>
+            <a:r>
+              <a:rPr lang="de-AT" sz="1150" b="0" i="0" dirty="0" err="1">
+                <a:solidFill>
+                  <a:srgbClr val="B9AFD6"/>
+                </a:solidFill>
+                <a:latin typeface="Trebuchet MS"/>
+              </a:rPr>
+              <a:t>Canban</a:t>
+            </a:r>
+            <a:r>
+              <a:rPr lang="de-AT" sz="1150" b="0" i="0" dirty="0">
+                <a:solidFill>
+                  <a:srgbClr val="B9AFD6"/>
+                </a:solidFill>
+                <a:latin typeface="Trebuchet MS"/>
+              </a:rPr>
+              <a:t>, Dateieinbindung bei Notes </a:t>
+            </a:r>
+            <a:endParaRPr sz="1150" b="0" i="0" dirty="0">
+              <a:solidFill>
+                <a:srgbClr val="B9AFD6"/>
+              </a:solidFill>
+              <a:latin typeface="Trebuchet MS"/>
+            </a:endParaRPr>
+          </a:p>
+        </p:txBody>
+      </p:sp>
+      <p:sp>
+        <p:nvSpPr>
+          <p:cNvPr id="15" name="Rounded Rectangle 14"/>
           <p:cNvSpPr/>
           <p:nvPr/>
         </p:nvSpPr>
         <p:spPr>
           <a:xfrm>
-            <a:off x="4462272" y="2194560"/>
-            <a:ext cx="3291840" cy="640080"/>
+            <a:off x="4462272" y="2423160"/>
+            <a:ext cx="3383280" cy="1645920"/>
           </a:xfrm>
           <a:prstGeom prst="roundRect">
             <a:avLst>
-              <a:gd name="adj" fmla="val 50000"/>
+              <a:gd name="adj" fmla="val 8000"/>
             </a:avLst>
           </a:prstGeom>
           <a:solidFill>
@@ -12009,36 +13133,134 @@
           </a:fontRef>
         </p:style>
         <p:txBody>
-          <a:bodyPr wrap="none" tIns="18288" bIns="18288" rtlCol="0" anchor="ctr"/>
+          <a:bodyPr rtlCol="0" anchor="ctr"/>
           <a:lstStyle/>
           <a:p>
             <a:pPr algn="ctr"/>
-            <a:r>
-              <a:rPr sz="1400" b="1">
+            <a:endParaRPr/>
+          </a:p>
+        </p:txBody>
+      </p:sp>
+      <p:sp>
+        <p:nvSpPr>
+          <p:cNvPr id="16" name="Oval 15"/>
+          <p:cNvSpPr/>
+          <p:nvPr/>
+        </p:nvSpPr>
+        <p:spPr>
+          <a:xfrm>
+            <a:off x="4736592" y="2697480"/>
+            <a:ext cx="411480" cy="411480"/>
+          </a:xfrm>
+          <a:prstGeom prst="ellipse">
+            <a:avLst/>
+          </a:prstGeom>
+          <a:solidFill>
+            <a:srgbClr val="44B9C9"/>
+          </a:solidFill>
+          <a:ln>
+            <a:noFill/>
+          </a:ln>
+          <a:effectLst/>
+        </p:spPr>
+        <p:style>
+          <a:lnRef idx="1">
+            <a:schemeClr val="accent1"/>
+          </a:lnRef>
+          <a:fillRef idx="3">
+            <a:schemeClr val="accent1"/>
+          </a:fillRef>
+          <a:effectRef idx="2">
+            <a:schemeClr val="accent1"/>
+          </a:effectRef>
+          <a:fontRef idx="minor">
+            <a:schemeClr val="lt1"/>
+          </a:fontRef>
+        </p:style>
+        <p:txBody>
+          <a:bodyPr rtlCol="0" anchor="ctr"/>
+          <a:lstStyle/>
+          <a:p>
+            <a:pPr algn="ctr"/>
+            <a:endParaRPr/>
+          </a:p>
+        </p:txBody>
+      </p:sp>
+      <p:sp>
+        <p:nvSpPr>
+          <p:cNvPr id="17" name="TextBox 16"/>
+          <p:cNvSpPr txBox="1"/>
+          <p:nvPr/>
+        </p:nvSpPr>
+        <p:spPr>
+          <a:xfrm>
+            <a:off x="4736592" y="3246120"/>
+            <a:ext cx="2834640" cy="777240"/>
+          </a:xfrm>
+          <a:prstGeom prst="rect">
+            <a:avLst/>
+          </a:prstGeom>
+          <a:noFill/>
+        </p:spPr>
+        <p:txBody>
+          <a:bodyPr wrap="square" lIns="45720" tIns="18288" rIns="45720" bIns="18288" anchor="t">
+            <a:spAutoFit/>
+          </a:bodyPr>
+          <a:lstStyle/>
+          <a:p>
+            <a:pPr algn="l">
+              <a:spcBef>
+                <a:spcPts val="0"/>
+              </a:spcBef>
+              <a:spcAft>
+                <a:spcPts val="300"/>
+              </a:spcAft>
+            </a:pPr>
+            <a:r>
+              <a:rPr sz="1450" b="1" i="0">
                 <a:solidFill>
                   <a:srgbClr val="F1EDE6"/>
                 </a:solidFill>
                 <a:latin typeface="Trebuchet MS"/>
               </a:rPr>
-              <a:t>Lastenheft</a:t>
-            </a:r>
-          </a:p>
-        </p:txBody>
-      </p:sp>
-      <p:sp>
-        <p:nvSpPr>
-          <p:cNvPr id="12" name="Rounded Rectangle 11"/>
+              <a:t>Mobile / Responsive</a:t>
+            </a:r>
+          </a:p>
+          <a:p>
+            <a:pPr algn="l">
+              <a:spcBef>
+                <a:spcPts val="0"/>
+              </a:spcBef>
+              <a:spcAft>
+                <a:spcPts val="0"/>
+              </a:spcAft>
+            </a:pPr>
+            <a:r>
+              <a:rPr sz="1150" b="0" i="0">
+                <a:solidFill>
+                  <a:srgbClr val="B9AFD6"/>
+                </a:solidFill>
+                <a:latin typeface="Trebuchet MS"/>
+              </a:rPr>
+              <a:t>Nutzung auf weiteren Bildschirmgrößen ausbauen.</a:t>
+            </a:r>
+          </a:p>
+        </p:txBody>
+      </p:sp>
+      <p:sp>
+        <p:nvSpPr>
+          <p:cNvPr id="18" name="Rounded Rectangle 17"/>
           <p:cNvSpPr/>
           <p:nvPr/>
         </p:nvSpPr>
         <p:spPr>
           <a:xfrm>
-            <a:off x="8055864" y="2194560"/>
-            <a:ext cx="3291840" cy="640080"/>
+            <a:off x="8055864" y="2423160"/>
+            <a:ext cx="3383280" cy="1645920"/>
           </a:xfrm>
           <a:prstGeom prst="roundRect">
             <a:avLst>
-              <a:gd name="adj" fmla="val 50000"/>
+              <a:gd name="adj" fmla="val 8000"/>
             </a:avLst>
           </a:prstGeom>
           <a:solidFill>
@@ -12064,36 +13286,194 @@
           </a:fontRef>
         </p:style>
         <p:txBody>
-          <a:bodyPr wrap="none" tIns="18288" bIns="18288" rtlCol="0" anchor="ctr"/>
+          <a:bodyPr rtlCol="0" anchor="ctr"/>
           <a:lstStyle/>
           <a:p>
             <a:pPr algn="ctr"/>
-            <a:r>
-              <a:rPr sz="1400" b="1">
+            <a:endParaRPr/>
+          </a:p>
+        </p:txBody>
+      </p:sp>
+      <p:sp>
+        <p:nvSpPr>
+          <p:cNvPr id="19" name="Oval 18"/>
+          <p:cNvSpPr/>
+          <p:nvPr/>
+        </p:nvSpPr>
+        <p:spPr>
+          <a:xfrm>
+            <a:off x="8330184" y="2697480"/>
+            <a:ext cx="411480" cy="411480"/>
+          </a:xfrm>
+          <a:prstGeom prst="ellipse">
+            <a:avLst/>
+          </a:prstGeom>
+          <a:solidFill>
+            <a:srgbClr val="8560DD"/>
+          </a:solidFill>
+          <a:ln>
+            <a:noFill/>
+          </a:ln>
+          <a:effectLst/>
+        </p:spPr>
+        <p:style>
+          <a:lnRef idx="1">
+            <a:schemeClr val="accent1"/>
+          </a:lnRef>
+          <a:fillRef idx="3">
+            <a:schemeClr val="accent1"/>
+          </a:fillRef>
+          <a:effectRef idx="2">
+            <a:schemeClr val="accent1"/>
+          </a:effectRef>
+          <a:fontRef idx="minor">
+            <a:schemeClr val="lt1"/>
+          </a:fontRef>
+        </p:style>
+        <p:txBody>
+          <a:bodyPr rtlCol="0" anchor="ctr"/>
+          <a:lstStyle/>
+          <a:p>
+            <a:pPr algn="ctr"/>
+            <a:endParaRPr/>
+          </a:p>
+        </p:txBody>
+      </p:sp>
+      <p:sp>
+        <p:nvSpPr>
+          <p:cNvPr id="20" name="TextBox 19"/>
+          <p:cNvSpPr txBox="1"/>
+          <p:nvPr/>
+        </p:nvSpPr>
+        <p:spPr>
+          <a:xfrm>
+            <a:off x="8330184" y="3246120"/>
+            <a:ext cx="2834640" cy="652486"/>
+          </a:xfrm>
+          <a:prstGeom prst="rect">
+            <a:avLst/>
+          </a:prstGeom>
+          <a:noFill/>
+        </p:spPr>
+        <p:txBody>
+          <a:bodyPr wrap="square" lIns="45720" tIns="18288" rIns="45720" bIns="18288" anchor="t">
+            <a:spAutoFit/>
+          </a:bodyPr>
+          <a:lstStyle/>
+          <a:p>
+            <a:pPr algn="l">
+              <a:spcBef>
+                <a:spcPts val="0"/>
+              </a:spcBef>
+              <a:spcAft>
+                <a:spcPts val="300"/>
+              </a:spcAft>
+            </a:pPr>
+            <a:r>
+              <a:rPr sz="1450" b="1" i="0" dirty="0">
                 <a:solidFill>
                   <a:srgbClr val="F1EDE6"/>
                 </a:solidFill>
                 <a:latin typeface="Trebuchet MS"/>
               </a:rPr>
-              <a:t>Pflichtenheft</a:t>
-            </a:r>
-          </a:p>
-        </p:txBody>
-      </p:sp>
-      <p:sp>
-        <p:nvSpPr>
-          <p:cNvPr id="13" name="Rounded Rectangle 12"/>
+              <a:t>Rollen &amp; Rechte</a:t>
+            </a:r>
+          </a:p>
+          <a:p>
+            <a:pPr algn="l">
+              <a:spcBef>
+                <a:spcPts val="0"/>
+              </a:spcBef>
+              <a:spcAft>
+                <a:spcPts val="0"/>
+              </a:spcAft>
+            </a:pPr>
+            <a:r>
+              <a:rPr sz="1150" b="0" i="0" dirty="0" err="1">
+                <a:solidFill>
+                  <a:srgbClr val="B9AFD6"/>
+                </a:solidFill>
+                <a:latin typeface="Trebuchet MS"/>
+              </a:rPr>
+              <a:t>Feinere</a:t>
+            </a:r>
+            <a:r>
+              <a:rPr sz="1150" b="0" i="0" dirty="0">
+                <a:solidFill>
+                  <a:srgbClr val="B9AFD6"/>
+                </a:solidFill>
+                <a:latin typeface="Trebuchet MS"/>
+              </a:rPr>
+              <a:t> </a:t>
+            </a:r>
+            <a:r>
+              <a:rPr sz="1150" b="0" i="0" dirty="0" err="1">
+                <a:solidFill>
+                  <a:srgbClr val="B9AFD6"/>
+                </a:solidFill>
+                <a:latin typeface="Trebuchet MS"/>
+              </a:rPr>
+              <a:t>Berechtigungen</a:t>
+            </a:r>
+            <a:r>
+              <a:rPr sz="1150" b="0" i="0" dirty="0">
+                <a:solidFill>
+                  <a:srgbClr val="B9AFD6"/>
+                </a:solidFill>
+                <a:latin typeface="Trebuchet MS"/>
+              </a:rPr>
+              <a:t> </a:t>
+            </a:r>
+            <a:r>
+              <a:rPr sz="1150" b="0" i="0" dirty="0" err="1">
+                <a:solidFill>
+                  <a:srgbClr val="B9AFD6"/>
+                </a:solidFill>
+                <a:latin typeface="Trebuchet MS"/>
+              </a:rPr>
+              <a:t>innerhalb</a:t>
+            </a:r>
+            <a:r>
+              <a:rPr sz="1150" b="0" i="0" dirty="0">
+                <a:solidFill>
+                  <a:srgbClr val="B9AFD6"/>
+                </a:solidFill>
+                <a:latin typeface="Trebuchet MS"/>
+              </a:rPr>
+              <a:t> von Workspaces.</a:t>
+            </a:r>
+            <a:r>
+              <a:rPr lang="de-AT" sz="1150" b="0" i="0" dirty="0">
+                <a:solidFill>
+                  <a:srgbClr val="B9AFD6"/>
+                </a:solidFill>
+                <a:latin typeface="Trebuchet MS"/>
+              </a:rPr>
+              <a:t> Rechteverwaltung</a:t>
+            </a:r>
+            <a:endParaRPr sz="1150" b="0" i="0" dirty="0">
+              <a:solidFill>
+                <a:srgbClr val="B9AFD6"/>
+              </a:solidFill>
+              <a:latin typeface="Trebuchet MS"/>
+            </a:endParaRPr>
+          </a:p>
+        </p:txBody>
+      </p:sp>
+      <p:sp>
+        <p:nvSpPr>
+          <p:cNvPr id="21" name="Rounded Rectangle 20"/>
           <p:cNvSpPr/>
           <p:nvPr/>
         </p:nvSpPr>
         <p:spPr>
           <a:xfrm>
-            <a:off x="868680" y="3063240"/>
-            <a:ext cx="3291840" cy="640080"/>
+            <a:off x="868680" y="4251960"/>
+            <a:ext cx="3383280" cy="1645920"/>
           </a:xfrm>
           <a:prstGeom prst="roundRect">
             <a:avLst>
-              <a:gd name="adj" fmla="val 50000"/>
+              <a:gd name="adj" fmla="val 8000"/>
             </a:avLst>
           </a:prstGeom>
           <a:solidFill>
@@ -12119,36 +13499,134 @@
           </a:fontRef>
         </p:style>
         <p:txBody>
-          <a:bodyPr wrap="none" tIns="18288" bIns="18288" rtlCol="0" anchor="ctr"/>
+          <a:bodyPr rtlCol="0" anchor="ctr"/>
           <a:lstStyle/>
           <a:p>
             <a:pPr algn="ctr"/>
-            <a:r>
-              <a:rPr sz="1400" b="1">
+            <a:endParaRPr/>
+          </a:p>
+        </p:txBody>
+      </p:sp>
+      <p:sp>
+        <p:nvSpPr>
+          <p:cNvPr id="22" name="Oval 21"/>
+          <p:cNvSpPr/>
+          <p:nvPr/>
+        </p:nvSpPr>
+        <p:spPr>
+          <a:xfrm>
+            <a:off x="1143000" y="4526280"/>
+            <a:ext cx="411480" cy="411480"/>
+          </a:xfrm>
+          <a:prstGeom prst="ellipse">
+            <a:avLst/>
+          </a:prstGeom>
+          <a:solidFill>
+            <a:srgbClr val="FBBF24"/>
+          </a:solidFill>
+          <a:ln>
+            <a:noFill/>
+          </a:ln>
+          <a:effectLst/>
+        </p:spPr>
+        <p:style>
+          <a:lnRef idx="1">
+            <a:schemeClr val="accent1"/>
+          </a:lnRef>
+          <a:fillRef idx="3">
+            <a:schemeClr val="accent1"/>
+          </a:fillRef>
+          <a:effectRef idx="2">
+            <a:schemeClr val="accent1"/>
+          </a:effectRef>
+          <a:fontRef idx="minor">
+            <a:schemeClr val="lt1"/>
+          </a:fontRef>
+        </p:style>
+        <p:txBody>
+          <a:bodyPr rtlCol="0" anchor="ctr"/>
+          <a:lstStyle/>
+          <a:p>
+            <a:pPr algn="ctr"/>
+            <a:endParaRPr/>
+          </a:p>
+        </p:txBody>
+      </p:sp>
+      <p:sp>
+        <p:nvSpPr>
+          <p:cNvPr id="23" name="TextBox 22"/>
+          <p:cNvSpPr txBox="1"/>
+          <p:nvPr/>
+        </p:nvSpPr>
+        <p:spPr>
+          <a:xfrm>
+            <a:off x="1143000" y="5074920"/>
+            <a:ext cx="2834640" cy="777240"/>
+          </a:xfrm>
+          <a:prstGeom prst="rect">
+            <a:avLst/>
+          </a:prstGeom>
+          <a:noFill/>
+        </p:spPr>
+        <p:txBody>
+          <a:bodyPr wrap="square" lIns="45720" tIns="18288" rIns="45720" bIns="18288" anchor="t">
+            <a:spAutoFit/>
+          </a:bodyPr>
+          <a:lstStyle/>
+          <a:p>
+            <a:pPr algn="l">
+              <a:spcBef>
+                <a:spcPts val="0"/>
+              </a:spcBef>
+              <a:spcAft>
+                <a:spcPts val="300"/>
+              </a:spcAft>
+            </a:pPr>
+            <a:r>
+              <a:rPr sz="1450" b="1" i="0">
                 <a:solidFill>
                   <a:srgbClr val="F1EDE6"/>
                 </a:solidFill>
                 <a:latin typeface="Trebuchet MS"/>
               </a:rPr>
-              <a:t>Projekthandbuch</a:t>
-            </a:r>
-          </a:p>
-        </p:txBody>
-      </p:sp>
-      <p:sp>
-        <p:nvSpPr>
-          <p:cNvPr id="14" name="Rounded Rectangle 13"/>
+              <a:t>Benachrichtigungen</a:t>
+            </a:r>
+          </a:p>
+          <a:p>
+            <a:pPr algn="l">
+              <a:spcBef>
+                <a:spcPts val="0"/>
+              </a:spcBef>
+              <a:spcAft>
+                <a:spcPts val="0"/>
+              </a:spcAft>
+            </a:pPr>
+            <a:r>
+              <a:rPr sz="1150" b="0" i="0">
+                <a:solidFill>
+                  <a:srgbClr val="B9AFD6"/>
+                </a:solidFill>
+                <a:latin typeface="Trebuchet MS"/>
+              </a:rPr>
+              <a:t>Hinweise zu Änderungen, Erwähnungen &amp; Terminen.</a:t>
+            </a:r>
+          </a:p>
+        </p:txBody>
+      </p:sp>
+      <p:sp>
+        <p:nvSpPr>
+          <p:cNvPr id="24" name="Rounded Rectangle 23"/>
           <p:cNvSpPr/>
           <p:nvPr/>
         </p:nvSpPr>
         <p:spPr>
           <a:xfrm>
-            <a:off x="4462272" y="3063240"/>
-            <a:ext cx="3291840" cy="640080"/>
+            <a:off x="4462272" y="4251960"/>
+            <a:ext cx="3383280" cy="1645920"/>
           </a:xfrm>
           <a:prstGeom prst="roundRect">
             <a:avLst>
-              <a:gd name="adj" fmla="val 50000"/>
+              <a:gd name="adj" fmla="val 8000"/>
             </a:avLst>
           </a:prstGeom>
           <a:solidFill>
@@ -12174,36 +13652,155 @@
           </a:fontRef>
         </p:style>
         <p:txBody>
-          <a:bodyPr wrap="none" tIns="18288" bIns="18288" rtlCol="0" anchor="ctr"/>
+          <a:bodyPr rtlCol="0" anchor="ctr"/>
           <a:lstStyle/>
           <a:p>
             <a:pPr algn="ctr"/>
-            <a:r>
-              <a:rPr sz="1400" b="1">
+            <a:endParaRPr/>
+          </a:p>
+        </p:txBody>
+      </p:sp>
+      <p:sp>
+        <p:nvSpPr>
+          <p:cNvPr id="25" name="Oval 24"/>
+          <p:cNvSpPr/>
+          <p:nvPr/>
+        </p:nvSpPr>
+        <p:spPr>
+          <a:xfrm>
+            <a:off x="4736592" y="4526280"/>
+            <a:ext cx="411480" cy="411480"/>
+          </a:xfrm>
+          <a:prstGeom prst="ellipse">
+            <a:avLst/>
+          </a:prstGeom>
+          <a:solidFill>
+            <a:srgbClr val="76E3F1"/>
+          </a:solidFill>
+          <a:ln>
+            <a:noFill/>
+          </a:ln>
+          <a:effectLst/>
+        </p:spPr>
+        <p:style>
+          <a:lnRef idx="1">
+            <a:schemeClr val="accent1"/>
+          </a:lnRef>
+          <a:fillRef idx="3">
+            <a:schemeClr val="accent1"/>
+          </a:fillRef>
+          <a:effectRef idx="2">
+            <a:schemeClr val="accent1"/>
+          </a:effectRef>
+          <a:fontRef idx="minor">
+            <a:schemeClr val="lt1"/>
+          </a:fontRef>
+        </p:style>
+        <p:txBody>
+          <a:bodyPr rtlCol="0" anchor="ctr"/>
+          <a:lstStyle/>
+          <a:p>
+            <a:pPr algn="ctr"/>
+            <a:endParaRPr/>
+          </a:p>
+        </p:txBody>
+      </p:sp>
+      <p:sp>
+        <p:nvSpPr>
+          <p:cNvPr id="26" name="TextBox 25"/>
+          <p:cNvSpPr txBox="1"/>
+          <p:nvPr/>
+        </p:nvSpPr>
+        <p:spPr>
+          <a:xfrm>
+            <a:off x="4736592" y="5074920"/>
+            <a:ext cx="2834640" cy="652486"/>
+          </a:xfrm>
+          <a:prstGeom prst="rect">
+            <a:avLst/>
+          </a:prstGeom>
+          <a:noFill/>
+        </p:spPr>
+        <p:txBody>
+          <a:bodyPr wrap="square" lIns="45720" tIns="18288" rIns="45720" bIns="18288" anchor="t">
+            <a:spAutoFit/>
+          </a:bodyPr>
+          <a:lstStyle/>
+          <a:p>
+            <a:pPr algn="l">
+              <a:spcBef>
+                <a:spcPts val="0"/>
+              </a:spcBef>
+              <a:spcAft>
+                <a:spcPts val="300"/>
+              </a:spcAft>
+            </a:pPr>
+            <a:r>
+              <a:rPr lang="de-AT" sz="1450" b="1" i="0" dirty="0">
                 <a:solidFill>
                   <a:srgbClr val="F1EDE6"/>
                 </a:solidFill>
                 <a:latin typeface="Trebuchet MS"/>
               </a:rPr>
-              <a:t>Benutzerhandbuch</a:t>
-            </a:r>
-          </a:p>
-        </p:txBody>
-      </p:sp>
-      <p:sp>
-        <p:nvSpPr>
-          <p:cNvPr id="15" name="Rounded Rectangle 14"/>
+              <a:t>Administration</a:t>
+            </a:r>
+            <a:endParaRPr sz="1450" b="1" i="0" dirty="0">
+              <a:solidFill>
+                <a:srgbClr val="F1EDE6"/>
+              </a:solidFill>
+              <a:latin typeface="Trebuchet MS"/>
+            </a:endParaRPr>
+          </a:p>
+          <a:p>
+            <a:pPr algn="l">
+              <a:spcBef>
+                <a:spcPts val="0"/>
+              </a:spcBef>
+              <a:spcAft>
+                <a:spcPts val="0"/>
+              </a:spcAft>
+            </a:pPr>
+            <a:r>
+              <a:rPr lang="de-AT" sz="1150" b="0" i="0" dirty="0">
+                <a:solidFill>
+                  <a:srgbClr val="B9AFD6"/>
+                </a:solidFill>
+                <a:latin typeface="Trebuchet MS"/>
+              </a:rPr>
+              <a:t>Dashboard und Toolseit</a:t>
+            </a:r>
+            <a:r>
+              <a:rPr lang="de-AT" sz="1150" dirty="0">
+                <a:solidFill>
+                  <a:srgbClr val="B9AFD6"/>
+                </a:solidFill>
+                <a:latin typeface="Trebuchet MS"/>
+              </a:rPr>
+              <a:t>e für administrative Tätigkeiten</a:t>
+            </a:r>
+            <a:endParaRPr sz="1150" b="0" i="0" dirty="0">
+              <a:solidFill>
+                <a:srgbClr val="B9AFD6"/>
+              </a:solidFill>
+              <a:latin typeface="Trebuchet MS"/>
+            </a:endParaRPr>
+          </a:p>
+        </p:txBody>
+      </p:sp>
+      <p:sp>
+        <p:nvSpPr>
+          <p:cNvPr id="27" name="Rounded Rectangle 26"/>
           <p:cNvSpPr/>
           <p:nvPr/>
         </p:nvSpPr>
         <p:spPr>
           <a:xfrm>
-            <a:off x="8055864" y="3063240"/>
-            <a:ext cx="3291840" cy="640080"/>
+            <a:off x="8055864" y="4251960"/>
+            <a:ext cx="3383280" cy="1645920"/>
           </a:xfrm>
           <a:prstGeom prst="roundRect">
             <a:avLst>
-              <a:gd name="adj" fmla="val 50000"/>
+              <a:gd name="adj" fmla="val 8000"/>
             </a:avLst>
           </a:prstGeom>
           <a:solidFill>
@@ -12229,101 +13826,6 @@
           </a:fontRef>
         </p:style>
         <p:txBody>
-          <a:bodyPr wrap="none" tIns="18288" bIns="18288" rtlCol="0" anchor="ctr"/>
-          <a:lstStyle/>
-          <a:p>
-            <a:pPr algn="ctr"/>
-            <a:r>
-              <a:rPr sz="1400" b="1">
-                <a:solidFill>
-                  <a:srgbClr val="F1EDE6"/>
-                </a:solidFill>
-                <a:latin typeface="Trebuchet MS"/>
-              </a:rPr>
-              <a:t>Statusberichte</a:t>
-            </a:r>
-          </a:p>
-        </p:txBody>
-      </p:sp>
-      <p:sp>
-        <p:nvSpPr>
-          <p:cNvPr id="16" name="TextBox 15"/>
-          <p:cNvSpPr txBox="1"/>
-          <p:nvPr/>
-        </p:nvSpPr>
-        <p:spPr>
-          <a:xfrm>
-            <a:off x="868680" y="4114800"/>
-            <a:ext cx="10424160" cy="457200"/>
-          </a:xfrm>
-          <a:prstGeom prst="rect">
-            <a:avLst/>
-          </a:prstGeom>
-          <a:noFill/>
-        </p:spPr>
-        <p:txBody>
-          <a:bodyPr wrap="square" lIns="45720" tIns="18288" rIns="45720" bIns="18288" anchor="t">
-            <a:spAutoFit/>
-          </a:bodyPr>
-          <a:lstStyle/>
-          <a:p>
-            <a:pPr algn="l">
-              <a:spcBef>
-                <a:spcPts val="0"/>
-              </a:spcBef>
-              <a:spcAft>
-                <a:spcPts val="0"/>
-              </a:spcAft>
-            </a:pPr>
-            <a:r>
-              <a:rPr sz="1600" b="1" i="0">
-                <a:solidFill>
-                  <a:srgbClr val="76E3F1"/>
-                </a:solidFill>
-                <a:latin typeface="Trebuchet MS"/>
-              </a:rPr>
-              <a:t>Zeitlicher Rahmen</a:t>
-            </a:r>
-          </a:p>
-        </p:txBody>
-      </p:sp>
-      <p:sp>
-        <p:nvSpPr>
-          <p:cNvPr id="17" name="Rectangle 16"/>
-          <p:cNvSpPr/>
-          <p:nvPr/>
-        </p:nvSpPr>
-        <p:spPr>
-          <a:xfrm>
-            <a:off x="1097280" y="5074920"/>
-            <a:ext cx="9966960" cy="38100"/>
-          </a:xfrm>
-          <a:prstGeom prst="rect">
-            <a:avLst/>
-          </a:prstGeom>
-          <a:solidFill>
-            <a:srgbClr val="7157AF"/>
-          </a:solidFill>
-          <a:ln>
-            <a:noFill/>
-          </a:ln>
-          <a:effectLst/>
-        </p:spPr>
-        <p:style>
-          <a:lnRef idx="1">
-            <a:schemeClr val="accent1"/>
-          </a:lnRef>
-          <a:fillRef idx="3">
-            <a:schemeClr val="accent1"/>
-          </a:fillRef>
-          <a:effectRef idx="2">
-            <a:schemeClr val="accent1"/>
-          </a:effectRef>
-          <a:fontRef idx="minor">
-            <a:schemeClr val="lt1"/>
-          </a:fontRef>
-        </p:style>
-        <p:txBody>
           <a:bodyPr rtlCol="0" anchor="ctr"/>
           <a:lstStyle/>
           <a:p>
@@ -12334,423 +13836,14 @@
       </p:sp>
       <p:sp>
         <p:nvSpPr>
-          <p:cNvPr id="18" name="Oval 17"/>
+          <p:cNvPr id="28" name="Oval 27"/>
           <p:cNvSpPr/>
           <p:nvPr/>
         </p:nvSpPr>
         <p:spPr>
           <a:xfrm>
-            <a:off x="978408" y="4937760"/>
-            <a:ext cx="292608" cy="292608"/>
-          </a:xfrm>
-          <a:prstGeom prst="ellipse">
-            <a:avLst/>
-          </a:prstGeom>
-          <a:solidFill>
-            <a:srgbClr val="44B9C9"/>
-          </a:solidFill>
-          <a:ln>
-            <a:noFill/>
-          </a:ln>
-          <a:effectLst/>
-        </p:spPr>
-        <p:style>
-          <a:lnRef idx="1">
-            <a:schemeClr val="accent1"/>
-          </a:lnRef>
-          <a:fillRef idx="3">
-            <a:schemeClr val="accent1"/>
-          </a:fillRef>
-          <a:effectRef idx="2">
-            <a:schemeClr val="accent1"/>
-          </a:effectRef>
-          <a:fontRef idx="minor">
-            <a:schemeClr val="lt1"/>
-          </a:fontRef>
-        </p:style>
-        <p:txBody>
-          <a:bodyPr rtlCol="0" anchor="ctr"/>
-          <a:lstStyle/>
-          <a:p>
-            <a:pPr algn="ctr"/>
-            <a:endParaRPr/>
-          </a:p>
-        </p:txBody>
-      </p:sp>
-      <p:sp>
-        <p:nvSpPr>
-          <p:cNvPr id="19" name="TextBox 18"/>
-          <p:cNvSpPr txBox="1"/>
-          <p:nvPr/>
-        </p:nvSpPr>
-        <p:spPr>
-          <a:xfrm>
-            <a:off x="457200" y="5349240"/>
-            <a:ext cx="1737360" cy="565283"/>
-          </a:xfrm>
-          <a:prstGeom prst="rect">
-            <a:avLst/>
-          </a:prstGeom>
-          <a:noFill/>
-        </p:spPr>
-        <p:txBody>
-          <a:bodyPr wrap="square" lIns="45720" tIns="18288" rIns="45720" bIns="18288" anchor="t">
-            <a:spAutoFit/>
-          </a:bodyPr>
-          <a:lstStyle/>
-          <a:p>
-            <a:pPr algn="ctr">
-              <a:spcBef>
-                <a:spcPts val="0"/>
-              </a:spcBef>
-              <a:spcAft>
-                <a:spcPts val="100"/>
-              </a:spcAft>
-            </a:pPr>
-            <a:r>
-              <a:rPr sz="1250" b="1" i="0" dirty="0">
-                <a:solidFill>
-                  <a:srgbClr val="F1EDE6"/>
-                </a:solidFill>
-                <a:latin typeface="Trebuchet MS"/>
-              </a:rPr>
-              <a:t>06.05.26</a:t>
-            </a:r>
-          </a:p>
-          <a:p>
-            <a:pPr algn="ctr">
-              <a:spcBef>
-                <a:spcPts val="0"/>
-              </a:spcBef>
-              <a:spcAft>
-                <a:spcPts val="0"/>
-              </a:spcAft>
-            </a:pPr>
-            <a:r>
-              <a:rPr sz="1050" b="0" i="0" dirty="0" err="1">
-                <a:solidFill>
-                  <a:srgbClr val="B9AFD6"/>
-                </a:solidFill>
-                <a:latin typeface="Trebuchet MS"/>
-              </a:rPr>
-              <a:t>Projektstart</a:t>
-            </a:r>
-            <a:r>
-              <a:rPr lang="de-AT" sz="1050" b="0" i="0" dirty="0">
-                <a:solidFill>
-                  <a:srgbClr val="B9AFD6"/>
-                </a:solidFill>
-                <a:latin typeface="Trebuchet MS"/>
-              </a:rPr>
-              <a:t> &amp; Initiale Dokumentation</a:t>
-            </a:r>
-            <a:endParaRPr sz="1050" b="0" i="0" dirty="0">
-              <a:solidFill>
-                <a:srgbClr val="B9AFD6"/>
-              </a:solidFill>
-              <a:latin typeface="Trebuchet MS"/>
-            </a:endParaRPr>
-          </a:p>
-        </p:txBody>
-      </p:sp>
-      <p:sp>
-        <p:nvSpPr>
-          <p:cNvPr id="20" name="Oval 19"/>
-          <p:cNvSpPr/>
-          <p:nvPr/>
-        </p:nvSpPr>
-        <p:spPr>
-          <a:xfrm>
-            <a:off x="4224528" y="4937760"/>
-            <a:ext cx="292608" cy="292608"/>
-          </a:xfrm>
-          <a:prstGeom prst="ellipse">
-            <a:avLst/>
-          </a:prstGeom>
-          <a:solidFill>
-            <a:srgbClr val="FFA228"/>
-          </a:solidFill>
-          <a:ln>
-            <a:noFill/>
-          </a:ln>
-          <a:effectLst/>
-        </p:spPr>
-        <p:style>
-          <a:lnRef idx="1">
-            <a:schemeClr val="accent1"/>
-          </a:lnRef>
-          <a:fillRef idx="3">
-            <a:schemeClr val="accent1"/>
-          </a:fillRef>
-          <a:effectRef idx="2">
-            <a:schemeClr val="accent1"/>
-          </a:effectRef>
-          <a:fontRef idx="minor">
-            <a:schemeClr val="lt1"/>
-          </a:fontRef>
-        </p:style>
-        <p:txBody>
-          <a:bodyPr rtlCol="0" anchor="ctr"/>
-          <a:lstStyle/>
-          <a:p>
-            <a:pPr algn="ctr"/>
-            <a:endParaRPr/>
-          </a:p>
-        </p:txBody>
-      </p:sp>
-      <p:sp>
-        <p:nvSpPr>
-          <p:cNvPr id="21" name="TextBox 20"/>
-          <p:cNvSpPr txBox="1"/>
-          <p:nvPr/>
-        </p:nvSpPr>
-        <p:spPr>
-          <a:xfrm>
-            <a:off x="3703320" y="5349240"/>
-            <a:ext cx="1737360" cy="565283"/>
-          </a:xfrm>
-          <a:prstGeom prst="rect">
-            <a:avLst/>
-          </a:prstGeom>
-          <a:noFill/>
-        </p:spPr>
-        <p:txBody>
-          <a:bodyPr wrap="square" lIns="45720" tIns="18288" rIns="45720" bIns="18288" anchor="t">
-            <a:spAutoFit/>
-          </a:bodyPr>
-          <a:lstStyle/>
-          <a:p>
-            <a:pPr algn="ctr">
-              <a:spcBef>
-                <a:spcPts val="0"/>
-              </a:spcBef>
-              <a:spcAft>
-                <a:spcPts val="100"/>
-              </a:spcAft>
-            </a:pPr>
-            <a:r>
-              <a:rPr sz="1250" b="1" i="0" dirty="0">
-                <a:solidFill>
-                  <a:srgbClr val="F1EDE6"/>
-                </a:solidFill>
-                <a:latin typeface="Trebuchet MS"/>
-              </a:rPr>
-              <a:t>Mai–Jun</a:t>
-            </a:r>
-            <a:r>
-              <a:rPr lang="de-AT" sz="1250" b="1" i="0" dirty="0">
-                <a:solidFill>
-                  <a:srgbClr val="F1EDE6"/>
-                </a:solidFill>
-                <a:latin typeface="Trebuchet MS"/>
-              </a:rPr>
-              <a:t>i</a:t>
-            </a:r>
-            <a:endParaRPr sz="1250" b="1" i="0" dirty="0">
-              <a:solidFill>
-                <a:srgbClr val="F1EDE6"/>
-              </a:solidFill>
-              <a:latin typeface="Trebuchet MS"/>
-            </a:endParaRPr>
-          </a:p>
-          <a:p>
-            <a:pPr algn="ctr">
-              <a:spcBef>
-                <a:spcPts val="0"/>
-              </a:spcBef>
-              <a:spcAft>
-                <a:spcPts val="0"/>
-              </a:spcAft>
-            </a:pPr>
-            <a:r>
-              <a:rPr sz="1050" b="0" i="0" dirty="0" err="1">
-                <a:solidFill>
-                  <a:srgbClr val="B9AFD6"/>
-                </a:solidFill>
-                <a:latin typeface="Trebuchet MS"/>
-              </a:rPr>
-              <a:t>Umsetzung</a:t>
-            </a:r>
-            <a:r>
-              <a:rPr lang="de-AT" sz="1050" b="0" i="0" dirty="0">
-                <a:solidFill>
-                  <a:srgbClr val="B9AFD6"/>
-                </a:solidFill>
-                <a:latin typeface="Trebuchet MS"/>
-              </a:rPr>
-              <a:t> (Code)</a:t>
-            </a:r>
-            <a:endParaRPr sz="1050" b="0" i="0" dirty="0">
-              <a:solidFill>
-                <a:srgbClr val="B9AFD6"/>
-              </a:solidFill>
-              <a:latin typeface="Trebuchet MS"/>
-            </a:endParaRPr>
-          </a:p>
-          <a:p>
-            <a:pPr algn="ctr">
-              <a:spcBef>
-                <a:spcPts val="0"/>
-              </a:spcBef>
-              <a:spcAft>
-                <a:spcPts val="0"/>
-              </a:spcAft>
-            </a:pPr>
-            <a:r>
-              <a:rPr sz="1050" b="0" i="0" dirty="0">
-                <a:solidFill>
-                  <a:srgbClr val="B9AFD6"/>
-                </a:solidFill>
-                <a:latin typeface="Trebuchet MS"/>
-              </a:rPr>
-              <a:t>&amp; </a:t>
-            </a:r>
-            <a:r>
-              <a:rPr sz="1050" b="0" i="0" dirty="0" err="1">
-                <a:solidFill>
-                  <a:srgbClr val="B9AFD6"/>
-                </a:solidFill>
-                <a:latin typeface="Trebuchet MS"/>
-              </a:rPr>
-              <a:t>Wochenstatus</a:t>
-            </a:r>
-            <a:endParaRPr sz="1050" b="0" i="0" dirty="0">
-              <a:solidFill>
-                <a:srgbClr val="B9AFD6"/>
-              </a:solidFill>
-              <a:latin typeface="Trebuchet MS"/>
-            </a:endParaRPr>
-          </a:p>
-        </p:txBody>
-      </p:sp>
-      <p:sp>
-        <p:nvSpPr>
-          <p:cNvPr id="22" name="Oval 21"/>
-          <p:cNvSpPr/>
-          <p:nvPr/>
-        </p:nvSpPr>
-        <p:spPr>
-          <a:xfrm>
-            <a:off x="7470648" y="4937760"/>
-            <a:ext cx="292608" cy="292608"/>
-          </a:xfrm>
-          <a:prstGeom prst="ellipse">
-            <a:avLst/>
-          </a:prstGeom>
-          <a:solidFill>
-            <a:srgbClr val="76E3F1"/>
-          </a:solidFill>
-          <a:ln>
-            <a:noFill/>
-          </a:ln>
-          <a:effectLst/>
-        </p:spPr>
-        <p:style>
-          <a:lnRef idx="1">
-            <a:schemeClr val="accent1"/>
-          </a:lnRef>
-          <a:fillRef idx="3">
-            <a:schemeClr val="accent1"/>
-          </a:fillRef>
-          <a:effectRef idx="2">
-            <a:schemeClr val="accent1"/>
-          </a:effectRef>
-          <a:fontRef idx="minor">
-            <a:schemeClr val="lt1"/>
-          </a:fontRef>
-        </p:style>
-        <p:txBody>
-          <a:bodyPr rtlCol="0" anchor="ctr"/>
-          <a:lstStyle/>
-          <a:p>
-            <a:pPr algn="ctr"/>
-            <a:endParaRPr/>
-          </a:p>
-        </p:txBody>
-      </p:sp>
-      <p:sp>
-        <p:nvSpPr>
-          <p:cNvPr id="23" name="TextBox 22"/>
-          <p:cNvSpPr txBox="1"/>
-          <p:nvPr/>
-        </p:nvSpPr>
-        <p:spPr>
-          <a:xfrm>
-            <a:off x="6949440" y="5349240"/>
-            <a:ext cx="1737360" cy="565283"/>
-          </a:xfrm>
-          <a:prstGeom prst="rect">
-            <a:avLst/>
-          </a:prstGeom>
-          <a:noFill/>
-        </p:spPr>
-        <p:txBody>
-          <a:bodyPr wrap="square" lIns="45720" tIns="18288" rIns="45720" bIns="18288" anchor="t">
-            <a:spAutoFit/>
-          </a:bodyPr>
-          <a:lstStyle/>
-          <a:p>
-            <a:pPr algn="ctr">
-              <a:spcBef>
-                <a:spcPts val="0"/>
-              </a:spcBef>
-              <a:spcAft>
-                <a:spcPts val="100"/>
-              </a:spcAft>
-            </a:pPr>
-            <a:r>
-              <a:rPr lang="de-AT" sz="1250" b="1" i="0" dirty="0">
-                <a:solidFill>
-                  <a:srgbClr val="F1EDE6"/>
-                </a:solidFill>
-                <a:latin typeface="Trebuchet MS"/>
-              </a:rPr>
-              <a:t>Juni-Juli</a:t>
-            </a:r>
-            <a:endParaRPr sz="1250" b="1" i="0" dirty="0">
-              <a:solidFill>
-                <a:srgbClr val="F1EDE6"/>
-              </a:solidFill>
-              <a:latin typeface="Trebuchet MS"/>
-            </a:endParaRPr>
-          </a:p>
-          <a:p>
-            <a:pPr algn="ctr">
-              <a:spcBef>
-                <a:spcPts val="0"/>
-              </a:spcBef>
-              <a:spcAft>
-                <a:spcPts val="0"/>
-              </a:spcAft>
-            </a:pPr>
-            <a:r>
-              <a:rPr lang="de-AT" sz="1050" b="0" i="0" dirty="0">
-                <a:solidFill>
-                  <a:srgbClr val="B9AFD6"/>
-                </a:solidFill>
-                <a:latin typeface="Trebuchet MS"/>
-              </a:rPr>
-              <a:t>Tests &amp; Restliche Dokumentation</a:t>
-            </a:r>
-            <a:endParaRPr sz="1050" b="0" i="0" dirty="0">
-              <a:solidFill>
-                <a:srgbClr val="B9AFD6"/>
-              </a:solidFill>
-              <a:latin typeface="Trebuchet MS"/>
-            </a:endParaRPr>
-          </a:p>
-        </p:txBody>
-      </p:sp>
-      <p:sp>
-        <p:nvSpPr>
-          <p:cNvPr id="24" name="Oval 23"/>
-          <p:cNvSpPr/>
-          <p:nvPr/>
-        </p:nvSpPr>
-        <p:spPr>
-          <a:xfrm>
-            <a:off x="10716768" y="4937760"/>
-            <a:ext cx="292608" cy="292608"/>
+            <a:off x="8330184" y="4526280"/>
+            <a:ext cx="411480" cy="411480"/>
           </a:xfrm>
           <a:prstGeom prst="ellipse">
             <a:avLst/>
@@ -12788,14 +13881,14 @@
       </p:sp>
       <p:sp>
         <p:nvSpPr>
-          <p:cNvPr id="25" name="TextBox 24"/>
+          <p:cNvPr id="29" name="TextBox 28"/>
           <p:cNvSpPr txBox="1"/>
           <p:nvPr/>
         </p:nvSpPr>
         <p:spPr>
           <a:xfrm>
-            <a:off x="10195560" y="5349240"/>
-            <a:ext cx="1737360" cy="403700"/>
+            <a:off x="8330184" y="5074920"/>
+            <a:ext cx="2834640" cy="777240"/>
           </a:xfrm>
           <a:prstGeom prst="rect">
             <a:avLst/>
@@ -12808,66 +13901,42 @@
           </a:bodyPr>
           <a:lstStyle/>
           <a:p>
-            <a:pPr algn="ctr">
-              <a:spcBef>
-                <a:spcPts val="0"/>
-              </a:spcBef>
-              <a:spcAft>
-                <a:spcPts val="100"/>
-              </a:spcAft>
-            </a:pPr>
-            <a:r>
-              <a:rPr sz="1250" b="1" i="0" dirty="0">
+            <a:pPr algn="l">
+              <a:spcBef>
+                <a:spcPts val="0"/>
+              </a:spcBef>
+              <a:spcAft>
+                <a:spcPts val="300"/>
+              </a:spcAft>
+            </a:pPr>
+            <a:r>
+              <a:rPr sz="1450" b="1" i="0">
                 <a:solidFill>
                   <a:srgbClr val="F1EDE6"/>
                 </a:solidFill>
                 <a:latin typeface="Trebuchet MS"/>
               </a:rPr>
-              <a:t>0</a:t>
-            </a:r>
-            <a:r>
-              <a:rPr lang="de-AT" sz="1250" b="1" i="0" dirty="0">
-                <a:solidFill>
-                  <a:srgbClr val="F1EDE6"/>
-                </a:solidFill>
-                <a:latin typeface="Trebuchet MS"/>
-              </a:rPr>
-              <a:t>2</a:t>
-            </a:r>
-            <a:r>
-              <a:rPr sz="1250" b="1" i="0" dirty="0">
-                <a:solidFill>
-                  <a:srgbClr val="F1EDE6"/>
-                </a:solidFill>
-                <a:latin typeface="Trebuchet MS"/>
-              </a:rPr>
-              <a:t>.07.26</a:t>
-            </a:r>
-          </a:p>
-          <a:p>
-            <a:pPr algn="ctr">
-              <a:spcBef>
-                <a:spcPts val="0"/>
-              </a:spcBef>
-              <a:spcAft>
-                <a:spcPts val="0"/>
-              </a:spcAft>
-            </a:pPr>
-            <a:r>
-              <a:rPr sz="1050" b="0" i="0" dirty="0" err="1">
+              <a:t>Mehr Themes</a:t>
+            </a:r>
+          </a:p>
+          <a:p>
+            <a:pPr algn="l">
+              <a:spcBef>
+                <a:spcPts val="0"/>
+              </a:spcBef>
+              <a:spcAft>
+                <a:spcPts val="0"/>
+              </a:spcAft>
+            </a:pPr>
+            <a:r>
+              <a:rPr sz="1150" b="0" i="0">
                 <a:solidFill>
                   <a:srgbClr val="B9AFD6"/>
                 </a:solidFill>
                 <a:latin typeface="Trebuchet MS"/>
               </a:rPr>
-              <a:t>Projektende</a:t>
-            </a:r>
-            <a:endParaRPr sz="1050" b="0" i="0" dirty="0">
-              <a:solidFill>
-                <a:srgbClr val="B9AFD6"/>
-              </a:solidFill>
-              <a:latin typeface="Trebuchet MS"/>
-            </a:endParaRPr>
+              <a:t>Das stimmungsbasierte UI weiter ausbauen.</a:t>
+            </a:r>
           </a:p>
         </p:txBody>
       </p:sp>
@@ -13045,1561 +14114,6 @@
       </p:sp>
       <p:sp>
         <p:nvSpPr>
-          <p:cNvPr id="5" name="Rounded Rectangle 4"/>
-          <p:cNvSpPr/>
-          <p:nvPr/>
-        </p:nvSpPr>
-        <p:spPr>
-          <a:xfrm>
-            <a:off x="640080" y="566928"/>
-            <a:ext cx="82296" cy="566928"/>
-          </a:xfrm>
-          <a:prstGeom prst="roundRect">
-            <a:avLst>
-              <a:gd name="adj" fmla="val 50000"/>
-            </a:avLst>
-          </a:prstGeom>
-          <a:solidFill>
-            <a:srgbClr val="44B9C9"/>
-          </a:solidFill>
-          <a:ln>
-            <a:noFill/>
-          </a:ln>
-          <a:effectLst/>
-        </p:spPr>
-        <p:style>
-          <a:lnRef idx="1">
-            <a:schemeClr val="accent1"/>
-          </a:lnRef>
-          <a:fillRef idx="3">
-            <a:schemeClr val="accent1"/>
-          </a:fillRef>
-          <a:effectRef idx="2">
-            <a:schemeClr val="accent1"/>
-          </a:effectRef>
-          <a:fontRef idx="minor">
-            <a:schemeClr val="lt1"/>
-          </a:fontRef>
-        </p:style>
-        <p:txBody>
-          <a:bodyPr rtlCol="0" anchor="ctr"/>
-          <a:lstStyle/>
-          <a:p>
-            <a:pPr algn="ctr"/>
-            <a:endParaRPr/>
-          </a:p>
-        </p:txBody>
-      </p:sp>
-      <p:sp>
-        <p:nvSpPr>
-          <p:cNvPr id="6" name="TextBox 5"/>
-          <p:cNvSpPr txBox="1"/>
-          <p:nvPr/>
-        </p:nvSpPr>
-        <p:spPr>
-          <a:xfrm>
-            <a:off x="868680" y="411480"/>
-            <a:ext cx="10607040" cy="914400"/>
-          </a:xfrm>
-          <a:prstGeom prst="rect">
-            <a:avLst/>
-          </a:prstGeom>
-          <a:noFill/>
-        </p:spPr>
-        <p:txBody>
-          <a:bodyPr wrap="square" lIns="45720" tIns="18288" rIns="45720" bIns="18288" anchor="t">
-            <a:spAutoFit/>
-          </a:bodyPr>
-          <a:lstStyle/>
-          <a:p>
-            <a:pPr algn="l">
-              <a:spcBef>
-                <a:spcPts val="0"/>
-              </a:spcBef>
-              <a:spcAft>
-                <a:spcPts val="200"/>
-              </a:spcAft>
-            </a:pPr>
-            <a:r>
-              <a:rPr sz="1300" b="1" i="0">
-                <a:solidFill>
-                  <a:srgbClr val="76E3F1"/>
-                </a:solidFill>
-                <a:latin typeface="Trebuchet MS"/>
-              </a:rPr>
-              <a:t>WOHIN LUMIFY WACHSEN KANN</a:t>
-            </a:r>
-          </a:p>
-          <a:p>
-            <a:pPr algn="l">
-              <a:spcBef>
-                <a:spcPts val="0"/>
-              </a:spcBef>
-              <a:spcAft>
-                <a:spcPts val="0"/>
-              </a:spcAft>
-            </a:pPr>
-            <a:r>
-              <a:rPr sz="3200" b="1" i="0">
-                <a:solidFill>
-                  <a:srgbClr val="F1EDE6"/>
-                </a:solidFill>
-                <a:latin typeface="Trebuchet MS"/>
-              </a:rPr>
-              <a:t>Ausblick</a:t>
-            </a:r>
-          </a:p>
-        </p:txBody>
-      </p:sp>
-      <p:sp>
-        <p:nvSpPr>
-          <p:cNvPr id="7" name="TextBox 6"/>
-          <p:cNvSpPr txBox="1"/>
-          <p:nvPr/>
-        </p:nvSpPr>
-        <p:spPr>
-          <a:xfrm>
-            <a:off x="640080" y="6419088"/>
-            <a:ext cx="7315200" cy="365760"/>
-          </a:xfrm>
-          <a:prstGeom prst="rect">
-            <a:avLst/>
-          </a:prstGeom>
-          <a:noFill/>
-        </p:spPr>
-        <p:txBody>
-          <a:bodyPr wrap="square" lIns="45720" tIns="18288" rIns="45720" bIns="18288" anchor="t">
-            <a:spAutoFit/>
-          </a:bodyPr>
-          <a:lstStyle/>
-          <a:p>
-            <a:pPr algn="l">
-              <a:spcBef>
-                <a:spcPts val="0"/>
-              </a:spcBef>
-              <a:spcAft>
-                <a:spcPts val="0"/>
-              </a:spcAft>
-            </a:pPr>
-            <a:r>
-              <a:rPr sz="950" b="0" i="0">
-                <a:solidFill>
-                  <a:srgbClr val="B9AFD6"/>
-                </a:solidFill>
-                <a:latin typeface="Trebuchet MS"/>
-              </a:rPr>
-              <a:t>Lumify · Bring clarity into your life</a:t>
-            </a:r>
-          </a:p>
-        </p:txBody>
-      </p:sp>
-      <p:sp>
-        <p:nvSpPr>
-          <p:cNvPr id="8" name="TextBox 7"/>
-          <p:cNvSpPr txBox="1"/>
-          <p:nvPr/>
-        </p:nvSpPr>
-        <p:spPr>
-          <a:xfrm>
-            <a:off x="10607040" y="6419088"/>
-            <a:ext cx="1005840" cy="365760"/>
-          </a:xfrm>
-          <a:prstGeom prst="rect">
-            <a:avLst/>
-          </a:prstGeom>
-          <a:noFill/>
-        </p:spPr>
-        <p:txBody>
-          <a:bodyPr wrap="square" lIns="45720" tIns="18288" rIns="45720" bIns="18288" anchor="t">
-            <a:spAutoFit/>
-          </a:bodyPr>
-          <a:lstStyle/>
-          <a:p>
-            <a:pPr algn="r">
-              <a:spcBef>
-                <a:spcPts val="0"/>
-              </a:spcBef>
-              <a:spcAft>
-                <a:spcPts val="0"/>
-              </a:spcAft>
-            </a:pPr>
-            <a:r>
-              <a:rPr sz="1000" b="0" i="0">
-                <a:solidFill>
-                  <a:srgbClr val="B9AFD6"/>
-                </a:solidFill>
-                <a:latin typeface="Trebuchet MS"/>
-              </a:rPr>
-              <a:t>17</a:t>
-            </a:r>
-          </a:p>
-        </p:txBody>
-      </p:sp>
-      <p:sp>
-        <p:nvSpPr>
-          <p:cNvPr id="9" name="Rounded Rectangle 8"/>
-          <p:cNvSpPr/>
-          <p:nvPr/>
-        </p:nvSpPr>
-        <p:spPr>
-          <a:xfrm>
-            <a:off x="640080" y="566928"/>
-            <a:ext cx="82296" cy="566928"/>
-          </a:xfrm>
-          <a:prstGeom prst="roundRect">
-            <a:avLst>
-              <a:gd name="adj" fmla="val 50000"/>
-            </a:avLst>
-          </a:prstGeom>
-          <a:solidFill>
-            <a:srgbClr val="FFA228"/>
-          </a:solidFill>
-          <a:ln>
-            <a:noFill/>
-          </a:ln>
-          <a:effectLst/>
-        </p:spPr>
-        <p:style>
-          <a:lnRef idx="1">
-            <a:schemeClr val="accent1"/>
-          </a:lnRef>
-          <a:fillRef idx="3">
-            <a:schemeClr val="accent1"/>
-          </a:fillRef>
-          <a:effectRef idx="2">
-            <a:schemeClr val="accent1"/>
-          </a:effectRef>
-          <a:fontRef idx="minor">
-            <a:schemeClr val="lt1"/>
-          </a:fontRef>
-        </p:style>
-        <p:txBody>
-          <a:bodyPr rtlCol="0" anchor="ctr"/>
-          <a:lstStyle/>
-          <a:p>
-            <a:pPr algn="ctr"/>
-            <a:endParaRPr/>
-          </a:p>
-        </p:txBody>
-      </p:sp>
-      <p:sp>
-        <p:nvSpPr>
-          <p:cNvPr id="10" name="TextBox 9"/>
-          <p:cNvSpPr txBox="1"/>
-          <p:nvPr/>
-        </p:nvSpPr>
-        <p:spPr>
-          <a:xfrm>
-            <a:off x="868680" y="411480"/>
-            <a:ext cx="10607040" cy="914400"/>
-          </a:xfrm>
-          <a:prstGeom prst="rect">
-            <a:avLst/>
-          </a:prstGeom>
-          <a:noFill/>
-        </p:spPr>
-        <p:txBody>
-          <a:bodyPr wrap="square" lIns="45720" tIns="18288" rIns="45720" bIns="18288" anchor="t">
-            <a:spAutoFit/>
-          </a:bodyPr>
-          <a:lstStyle/>
-          <a:p>
-            <a:pPr algn="l">
-              <a:spcBef>
-                <a:spcPts val="0"/>
-              </a:spcBef>
-              <a:spcAft>
-                <a:spcPts val="200"/>
-              </a:spcAft>
-            </a:pPr>
-            <a:r>
-              <a:rPr sz="1300" b="1" i="0">
-                <a:solidFill>
-                  <a:srgbClr val="76E3F1"/>
-                </a:solidFill>
-                <a:latin typeface="Trebuchet MS"/>
-              </a:rPr>
-              <a:t>WOHIN LUMIFY WACHSEN KANN</a:t>
-            </a:r>
-          </a:p>
-          <a:p>
-            <a:pPr algn="l">
-              <a:spcBef>
-                <a:spcPts val="0"/>
-              </a:spcBef>
-              <a:spcAft>
-                <a:spcPts val="0"/>
-              </a:spcAft>
-            </a:pPr>
-            <a:r>
-              <a:rPr sz="3200" b="1" i="0">
-                <a:solidFill>
-                  <a:srgbClr val="F1EDE6"/>
-                </a:solidFill>
-                <a:latin typeface="Trebuchet MS"/>
-              </a:rPr>
-              <a:t>Ausblick</a:t>
-            </a:r>
-          </a:p>
-        </p:txBody>
-      </p:sp>
-      <p:sp>
-        <p:nvSpPr>
-          <p:cNvPr id="11" name="TextBox 10"/>
-          <p:cNvSpPr txBox="1"/>
-          <p:nvPr/>
-        </p:nvSpPr>
-        <p:spPr>
-          <a:xfrm>
-            <a:off x="868680" y="1463040"/>
-            <a:ext cx="10424160" cy="822960"/>
-          </a:xfrm>
-          <a:prstGeom prst="rect">
-            <a:avLst/>
-          </a:prstGeom>
-          <a:noFill/>
-        </p:spPr>
-        <p:txBody>
-          <a:bodyPr wrap="square" lIns="45720" tIns="18288" rIns="45720" bIns="18288" anchor="t">
-            <a:spAutoFit/>
-          </a:bodyPr>
-          <a:lstStyle/>
-          <a:p>
-            <a:pPr algn="l">
-              <a:spcBef>
-                <a:spcPts val="0"/>
-              </a:spcBef>
-              <a:spcAft>
-                <a:spcPts val="0"/>
-              </a:spcAft>
-            </a:pPr>
-            <a:r>
-              <a:rPr sz="1600" b="0" i="0">
-                <a:solidFill>
-                  <a:srgbClr val="F1EDE6"/>
-                </a:solidFill>
-                <a:latin typeface="Trebuchet MS"/>
-              </a:rPr>
-              <a:t>Der erweiterbare Aufbau zahlt sich aus: </a:t>
-            </a:r>
-            <a:r>
-              <a:rPr sz="1600" b="1" i="0">
-                <a:solidFill>
-                  <a:srgbClr val="76E3F1"/>
-                </a:solidFill>
-                <a:latin typeface="Trebuchet MS"/>
-              </a:rPr>
-              <a:t>neue Features sind neue Module</a:t>
-            </a:r>
-            <a:r>
-              <a:rPr sz="1600" b="0" i="0">
-                <a:solidFill>
-                  <a:srgbClr val="F1EDE6"/>
-                </a:solidFill>
-                <a:latin typeface="Trebuchet MS"/>
-              </a:rPr>
-              <a:t> - das Fundament bleibt unverändert.</a:t>
-            </a:r>
-          </a:p>
-        </p:txBody>
-      </p:sp>
-      <p:sp>
-        <p:nvSpPr>
-          <p:cNvPr id="12" name="Rounded Rectangle 11"/>
-          <p:cNvSpPr/>
-          <p:nvPr/>
-        </p:nvSpPr>
-        <p:spPr>
-          <a:xfrm>
-            <a:off x="868680" y="2423160"/>
-            <a:ext cx="3383280" cy="1645920"/>
-          </a:xfrm>
-          <a:prstGeom prst="roundRect">
-            <a:avLst>
-              <a:gd name="adj" fmla="val 8000"/>
-            </a:avLst>
-          </a:prstGeom>
-          <a:solidFill>
-            <a:srgbClr val="3A2F66"/>
-          </a:solidFill>
-          <a:ln>
-            <a:noFill/>
-          </a:ln>
-          <a:effectLst/>
-        </p:spPr>
-        <p:style>
-          <a:lnRef idx="1">
-            <a:schemeClr val="accent1"/>
-          </a:lnRef>
-          <a:fillRef idx="3">
-            <a:schemeClr val="accent1"/>
-          </a:fillRef>
-          <a:effectRef idx="2">
-            <a:schemeClr val="accent1"/>
-          </a:effectRef>
-          <a:fontRef idx="minor">
-            <a:schemeClr val="lt1"/>
-          </a:fontRef>
-        </p:style>
-        <p:txBody>
-          <a:bodyPr rtlCol="0" anchor="ctr"/>
-          <a:lstStyle/>
-          <a:p>
-            <a:pPr algn="ctr"/>
-            <a:endParaRPr/>
-          </a:p>
-        </p:txBody>
-      </p:sp>
-      <p:sp>
-        <p:nvSpPr>
-          <p:cNvPr id="13" name="Oval 12"/>
-          <p:cNvSpPr/>
-          <p:nvPr/>
-        </p:nvSpPr>
-        <p:spPr>
-          <a:xfrm>
-            <a:off x="1143000" y="2697480"/>
-            <a:ext cx="411480" cy="411480"/>
-          </a:xfrm>
-          <a:prstGeom prst="ellipse">
-            <a:avLst/>
-          </a:prstGeom>
-          <a:solidFill>
-            <a:srgbClr val="FFA228"/>
-          </a:solidFill>
-          <a:ln>
-            <a:noFill/>
-          </a:ln>
-          <a:effectLst/>
-        </p:spPr>
-        <p:style>
-          <a:lnRef idx="1">
-            <a:schemeClr val="accent1"/>
-          </a:lnRef>
-          <a:fillRef idx="3">
-            <a:schemeClr val="accent1"/>
-          </a:fillRef>
-          <a:effectRef idx="2">
-            <a:schemeClr val="accent1"/>
-          </a:effectRef>
-          <a:fontRef idx="minor">
-            <a:schemeClr val="lt1"/>
-          </a:fontRef>
-        </p:style>
-        <p:txBody>
-          <a:bodyPr rtlCol="0" anchor="ctr"/>
-          <a:lstStyle/>
-          <a:p>
-            <a:pPr algn="ctr"/>
-            <a:endParaRPr/>
-          </a:p>
-        </p:txBody>
-      </p:sp>
-      <p:sp>
-        <p:nvSpPr>
-          <p:cNvPr id="14" name="TextBox 13"/>
-          <p:cNvSpPr txBox="1"/>
-          <p:nvPr/>
-        </p:nvSpPr>
-        <p:spPr>
-          <a:xfrm>
-            <a:off x="1143000" y="3246120"/>
-            <a:ext cx="2834640" cy="652486"/>
-          </a:xfrm>
-          <a:prstGeom prst="rect">
-            <a:avLst/>
-          </a:prstGeom>
-          <a:noFill/>
-        </p:spPr>
-        <p:txBody>
-          <a:bodyPr wrap="square" lIns="45720" tIns="18288" rIns="45720" bIns="18288" anchor="t">
-            <a:spAutoFit/>
-          </a:bodyPr>
-          <a:lstStyle/>
-          <a:p>
-            <a:pPr algn="l">
-              <a:spcBef>
-                <a:spcPts val="0"/>
-              </a:spcBef>
-              <a:spcAft>
-                <a:spcPts val="300"/>
-              </a:spcAft>
-            </a:pPr>
-            <a:r>
-              <a:rPr sz="1450" b="1" i="0" dirty="0">
-                <a:solidFill>
-                  <a:srgbClr val="F1EDE6"/>
-                </a:solidFill>
-                <a:latin typeface="Trebuchet MS"/>
-              </a:rPr>
-              <a:t>Neue Feature-Module</a:t>
-            </a:r>
-          </a:p>
-          <a:p>
-            <a:pPr algn="l">
-              <a:spcBef>
-                <a:spcPts val="0"/>
-              </a:spcBef>
-              <a:spcAft>
-                <a:spcPts val="0"/>
-              </a:spcAft>
-            </a:pPr>
-            <a:r>
-              <a:rPr sz="1150" b="0" i="0" dirty="0">
-                <a:solidFill>
-                  <a:srgbClr val="B9AFD6"/>
-                </a:solidFill>
-                <a:latin typeface="Trebuchet MS"/>
-              </a:rPr>
-              <a:t>z. B. Whiteboard, </a:t>
-            </a:r>
-            <a:r>
-              <a:rPr lang="de-AT" sz="1150" b="0" i="0" dirty="0" err="1">
-                <a:solidFill>
-                  <a:srgbClr val="B9AFD6"/>
-                </a:solidFill>
-                <a:latin typeface="Trebuchet MS"/>
-              </a:rPr>
-              <a:t>Canban</a:t>
-            </a:r>
-            <a:r>
-              <a:rPr lang="de-AT" sz="1150" b="0" i="0" dirty="0">
-                <a:solidFill>
-                  <a:srgbClr val="B9AFD6"/>
-                </a:solidFill>
-                <a:latin typeface="Trebuchet MS"/>
-              </a:rPr>
-              <a:t>, Dateieinbindung bei Notes </a:t>
-            </a:r>
-            <a:endParaRPr sz="1150" b="0" i="0" dirty="0">
-              <a:solidFill>
-                <a:srgbClr val="B9AFD6"/>
-              </a:solidFill>
-              <a:latin typeface="Trebuchet MS"/>
-            </a:endParaRPr>
-          </a:p>
-        </p:txBody>
-      </p:sp>
-      <p:sp>
-        <p:nvSpPr>
-          <p:cNvPr id="15" name="Rounded Rectangle 14"/>
-          <p:cNvSpPr/>
-          <p:nvPr/>
-        </p:nvSpPr>
-        <p:spPr>
-          <a:xfrm>
-            <a:off x="4462272" y="2423160"/>
-            <a:ext cx="3383280" cy="1645920"/>
-          </a:xfrm>
-          <a:prstGeom prst="roundRect">
-            <a:avLst>
-              <a:gd name="adj" fmla="val 8000"/>
-            </a:avLst>
-          </a:prstGeom>
-          <a:solidFill>
-            <a:srgbClr val="3A2F66"/>
-          </a:solidFill>
-          <a:ln>
-            <a:noFill/>
-          </a:ln>
-          <a:effectLst/>
-        </p:spPr>
-        <p:style>
-          <a:lnRef idx="1">
-            <a:schemeClr val="accent1"/>
-          </a:lnRef>
-          <a:fillRef idx="3">
-            <a:schemeClr val="accent1"/>
-          </a:fillRef>
-          <a:effectRef idx="2">
-            <a:schemeClr val="accent1"/>
-          </a:effectRef>
-          <a:fontRef idx="minor">
-            <a:schemeClr val="lt1"/>
-          </a:fontRef>
-        </p:style>
-        <p:txBody>
-          <a:bodyPr rtlCol="0" anchor="ctr"/>
-          <a:lstStyle/>
-          <a:p>
-            <a:pPr algn="ctr"/>
-            <a:endParaRPr/>
-          </a:p>
-        </p:txBody>
-      </p:sp>
-      <p:sp>
-        <p:nvSpPr>
-          <p:cNvPr id="16" name="Oval 15"/>
-          <p:cNvSpPr/>
-          <p:nvPr/>
-        </p:nvSpPr>
-        <p:spPr>
-          <a:xfrm>
-            <a:off x="4736592" y="2697480"/>
-            <a:ext cx="411480" cy="411480"/>
-          </a:xfrm>
-          <a:prstGeom prst="ellipse">
-            <a:avLst/>
-          </a:prstGeom>
-          <a:solidFill>
-            <a:srgbClr val="44B9C9"/>
-          </a:solidFill>
-          <a:ln>
-            <a:noFill/>
-          </a:ln>
-          <a:effectLst/>
-        </p:spPr>
-        <p:style>
-          <a:lnRef idx="1">
-            <a:schemeClr val="accent1"/>
-          </a:lnRef>
-          <a:fillRef idx="3">
-            <a:schemeClr val="accent1"/>
-          </a:fillRef>
-          <a:effectRef idx="2">
-            <a:schemeClr val="accent1"/>
-          </a:effectRef>
-          <a:fontRef idx="minor">
-            <a:schemeClr val="lt1"/>
-          </a:fontRef>
-        </p:style>
-        <p:txBody>
-          <a:bodyPr rtlCol="0" anchor="ctr"/>
-          <a:lstStyle/>
-          <a:p>
-            <a:pPr algn="ctr"/>
-            <a:endParaRPr/>
-          </a:p>
-        </p:txBody>
-      </p:sp>
-      <p:sp>
-        <p:nvSpPr>
-          <p:cNvPr id="17" name="TextBox 16"/>
-          <p:cNvSpPr txBox="1"/>
-          <p:nvPr/>
-        </p:nvSpPr>
-        <p:spPr>
-          <a:xfrm>
-            <a:off x="4736592" y="3246120"/>
-            <a:ext cx="2834640" cy="777240"/>
-          </a:xfrm>
-          <a:prstGeom prst="rect">
-            <a:avLst/>
-          </a:prstGeom>
-          <a:noFill/>
-        </p:spPr>
-        <p:txBody>
-          <a:bodyPr wrap="square" lIns="45720" tIns="18288" rIns="45720" bIns="18288" anchor="t">
-            <a:spAutoFit/>
-          </a:bodyPr>
-          <a:lstStyle/>
-          <a:p>
-            <a:pPr algn="l">
-              <a:spcBef>
-                <a:spcPts val="0"/>
-              </a:spcBef>
-              <a:spcAft>
-                <a:spcPts val="300"/>
-              </a:spcAft>
-            </a:pPr>
-            <a:r>
-              <a:rPr sz="1450" b="1" i="0">
-                <a:solidFill>
-                  <a:srgbClr val="F1EDE6"/>
-                </a:solidFill>
-                <a:latin typeface="Trebuchet MS"/>
-              </a:rPr>
-              <a:t>Mobile / Responsive</a:t>
-            </a:r>
-          </a:p>
-          <a:p>
-            <a:pPr algn="l">
-              <a:spcBef>
-                <a:spcPts val="0"/>
-              </a:spcBef>
-              <a:spcAft>
-                <a:spcPts val="0"/>
-              </a:spcAft>
-            </a:pPr>
-            <a:r>
-              <a:rPr sz="1150" b="0" i="0">
-                <a:solidFill>
-                  <a:srgbClr val="B9AFD6"/>
-                </a:solidFill>
-                <a:latin typeface="Trebuchet MS"/>
-              </a:rPr>
-              <a:t>Nutzung auf weiteren Bildschirmgrößen ausbauen.</a:t>
-            </a:r>
-          </a:p>
-        </p:txBody>
-      </p:sp>
-      <p:sp>
-        <p:nvSpPr>
-          <p:cNvPr id="18" name="Rounded Rectangle 17"/>
-          <p:cNvSpPr/>
-          <p:nvPr/>
-        </p:nvSpPr>
-        <p:spPr>
-          <a:xfrm>
-            <a:off x="8055864" y="2423160"/>
-            <a:ext cx="3383280" cy="1645920"/>
-          </a:xfrm>
-          <a:prstGeom prst="roundRect">
-            <a:avLst>
-              <a:gd name="adj" fmla="val 8000"/>
-            </a:avLst>
-          </a:prstGeom>
-          <a:solidFill>
-            <a:srgbClr val="3A2F66"/>
-          </a:solidFill>
-          <a:ln>
-            <a:noFill/>
-          </a:ln>
-          <a:effectLst/>
-        </p:spPr>
-        <p:style>
-          <a:lnRef idx="1">
-            <a:schemeClr val="accent1"/>
-          </a:lnRef>
-          <a:fillRef idx="3">
-            <a:schemeClr val="accent1"/>
-          </a:fillRef>
-          <a:effectRef idx="2">
-            <a:schemeClr val="accent1"/>
-          </a:effectRef>
-          <a:fontRef idx="minor">
-            <a:schemeClr val="lt1"/>
-          </a:fontRef>
-        </p:style>
-        <p:txBody>
-          <a:bodyPr rtlCol="0" anchor="ctr"/>
-          <a:lstStyle/>
-          <a:p>
-            <a:pPr algn="ctr"/>
-            <a:endParaRPr/>
-          </a:p>
-        </p:txBody>
-      </p:sp>
-      <p:sp>
-        <p:nvSpPr>
-          <p:cNvPr id="19" name="Oval 18"/>
-          <p:cNvSpPr/>
-          <p:nvPr/>
-        </p:nvSpPr>
-        <p:spPr>
-          <a:xfrm>
-            <a:off x="8330184" y="2697480"/>
-            <a:ext cx="411480" cy="411480"/>
-          </a:xfrm>
-          <a:prstGeom prst="ellipse">
-            <a:avLst/>
-          </a:prstGeom>
-          <a:solidFill>
-            <a:srgbClr val="8560DD"/>
-          </a:solidFill>
-          <a:ln>
-            <a:noFill/>
-          </a:ln>
-          <a:effectLst/>
-        </p:spPr>
-        <p:style>
-          <a:lnRef idx="1">
-            <a:schemeClr val="accent1"/>
-          </a:lnRef>
-          <a:fillRef idx="3">
-            <a:schemeClr val="accent1"/>
-          </a:fillRef>
-          <a:effectRef idx="2">
-            <a:schemeClr val="accent1"/>
-          </a:effectRef>
-          <a:fontRef idx="minor">
-            <a:schemeClr val="lt1"/>
-          </a:fontRef>
-        </p:style>
-        <p:txBody>
-          <a:bodyPr rtlCol="0" anchor="ctr"/>
-          <a:lstStyle/>
-          <a:p>
-            <a:pPr algn="ctr"/>
-            <a:endParaRPr/>
-          </a:p>
-        </p:txBody>
-      </p:sp>
-      <p:sp>
-        <p:nvSpPr>
-          <p:cNvPr id="20" name="TextBox 19"/>
-          <p:cNvSpPr txBox="1"/>
-          <p:nvPr/>
-        </p:nvSpPr>
-        <p:spPr>
-          <a:xfrm>
-            <a:off x="8330184" y="3246120"/>
-            <a:ext cx="2834640" cy="652486"/>
-          </a:xfrm>
-          <a:prstGeom prst="rect">
-            <a:avLst/>
-          </a:prstGeom>
-          <a:noFill/>
-        </p:spPr>
-        <p:txBody>
-          <a:bodyPr wrap="square" lIns="45720" tIns="18288" rIns="45720" bIns="18288" anchor="t">
-            <a:spAutoFit/>
-          </a:bodyPr>
-          <a:lstStyle/>
-          <a:p>
-            <a:pPr algn="l">
-              <a:spcBef>
-                <a:spcPts val="0"/>
-              </a:spcBef>
-              <a:spcAft>
-                <a:spcPts val="300"/>
-              </a:spcAft>
-            </a:pPr>
-            <a:r>
-              <a:rPr sz="1450" b="1" i="0" dirty="0">
-                <a:solidFill>
-                  <a:srgbClr val="F1EDE6"/>
-                </a:solidFill>
-                <a:latin typeface="Trebuchet MS"/>
-              </a:rPr>
-              <a:t>Rollen &amp; Rechte</a:t>
-            </a:r>
-          </a:p>
-          <a:p>
-            <a:pPr algn="l">
-              <a:spcBef>
-                <a:spcPts val="0"/>
-              </a:spcBef>
-              <a:spcAft>
-                <a:spcPts val="0"/>
-              </a:spcAft>
-            </a:pPr>
-            <a:r>
-              <a:rPr sz="1150" b="0" i="0" dirty="0" err="1">
-                <a:solidFill>
-                  <a:srgbClr val="B9AFD6"/>
-                </a:solidFill>
-                <a:latin typeface="Trebuchet MS"/>
-              </a:rPr>
-              <a:t>Feinere</a:t>
-            </a:r>
-            <a:r>
-              <a:rPr sz="1150" b="0" i="0" dirty="0">
-                <a:solidFill>
-                  <a:srgbClr val="B9AFD6"/>
-                </a:solidFill>
-                <a:latin typeface="Trebuchet MS"/>
-              </a:rPr>
-              <a:t> </a:t>
-            </a:r>
-            <a:r>
-              <a:rPr sz="1150" b="0" i="0" dirty="0" err="1">
-                <a:solidFill>
-                  <a:srgbClr val="B9AFD6"/>
-                </a:solidFill>
-                <a:latin typeface="Trebuchet MS"/>
-              </a:rPr>
-              <a:t>Berechtigungen</a:t>
-            </a:r>
-            <a:r>
-              <a:rPr sz="1150" b="0" i="0" dirty="0">
-                <a:solidFill>
-                  <a:srgbClr val="B9AFD6"/>
-                </a:solidFill>
-                <a:latin typeface="Trebuchet MS"/>
-              </a:rPr>
-              <a:t> </a:t>
-            </a:r>
-            <a:r>
-              <a:rPr sz="1150" b="0" i="0" dirty="0" err="1">
-                <a:solidFill>
-                  <a:srgbClr val="B9AFD6"/>
-                </a:solidFill>
-                <a:latin typeface="Trebuchet MS"/>
-              </a:rPr>
-              <a:t>innerhalb</a:t>
-            </a:r>
-            <a:r>
-              <a:rPr sz="1150" b="0" i="0" dirty="0">
-                <a:solidFill>
-                  <a:srgbClr val="B9AFD6"/>
-                </a:solidFill>
-                <a:latin typeface="Trebuchet MS"/>
-              </a:rPr>
-              <a:t> von Workspaces.</a:t>
-            </a:r>
-            <a:r>
-              <a:rPr lang="de-AT" sz="1150" b="0" i="0" dirty="0">
-                <a:solidFill>
-                  <a:srgbClr val="B9AFD6"/>
-                </a:solidFill>
-                <a:latin typeface="Trebuchet MS"/>
-              </a:rPr>
-              <a:t> Rechteverwaltung</a:t>
-            </a:r>
-            <a:endParaRPr sz="1150" b="0" i="0" dirty="0">
-              <a:solidFill>
-                <a:srgbClr val="B9AFD6"/>
-              </a:solidFill>
-              <a:latin typeface="Trebuchet MS"/>
-            </a:endParaRPr>
-          </a:p>
-        </p:txBody>
-      </p:sp>
-      <p:sp>
-        <p:nvSpPr>
-          <p:cNvPr id="21" name="Rounded Rectangle 20"/>
-          <p:cNvSpPr/>
-          <p:nvPr/>
-        </p:nvSpPr>
-        <p:spPr>
-          <a:xfrm>
-            <a:off x="868680" y="4251960"/>
-            <a:ext cx="3383280" cy="1645920"/>
-          </a:xfrm>
-          <a:prstGeom prst="roundRect">
-            <a:avLst>
-              <a:gd name="adj" fmla="val 8000"/>
-            </a:avLst>
-          </a:prstGeom>
-          <a:solidFill>
-            <a:srgbClr val="3A2F66"/>
-          </a:solidFill>
-          <a:ln>
-            <a:noFill/>
-          </a:ln>
-          <a:effectLst/>
-        </p:spPr>
-        <p:style>
-          <a:lnRef idx="1">
-            <a:schemeClr val="accent1"/>
-          </a:lnRef>
-          <a:fillRef idx="3">
-            <a:schemeClr val="accent1"/>
-          </a:fillRef>
-          <a:effectRef idx="2">
-            <a:schemeClr val="accent1"/>
-          </a:effectRef>
-          <a:fontRef idx="minor">
-            <a:schemeClr val="lt1"/>
-          </a:fontRef>
-        </p:style>
-        <p:txBody>
-          <a:bodyPr rtlCol="0" anchor="ctr"/>
-          <a:lstStyle/>
-          <a:p>
-            <a:pPr algn="ctr"/>
-            <a:endParaRPr/>
-          </a:p>
-        </p:txBody>
-      </p:sp>
-      <p:sp>
-        <p:nvSpPr>
-          <p:cNvPr id="22" name="Oval 21"/>
-          <p:cNvSpPr/>
-          <p:nvPr/>
-        </p:nvSpPr>
-        <p:spPr>
-          <a:xfrm>
-            <a:off x="1143000" y="4526280"/>
-            <a:ext cx="411480" cy="411480"/>
-          </a:xfrm>
-          <a:prstGeom prst="ellipse">
-            <a:avLst/>
-          </a:prstGeom>
-          <a:solidFill>
-            <a:srgbClr val="FBBF24"/>
-          </a:solidFill>
-          <a:ln>
-            <a:noFill/>
-          </a:ln>
-          <a:effectLst/>
-        </p:spPr>
-        <p:style>
-          <a:lnRef idx="1">
-            <a:schemeClr val="accent1"/>
-          </a:lnRef>
-          <a:fillRef idx="3">
-            <a:schemeClr val="accent1"/>
-          </a:fillRef>
-          <a:effectRef idx="2">
-            <a:schemeClr val="accent1"/>
-          </a:effectRef>
-          <a:fontRef idx="minor">
-            <a:schemeClr val="lt1"/>
-          </a:fontRef>
-        </p:style>
-        <p:txBody>
-          <a:bodyPr rtlCol="0" anchor="ctr"/>
-          <a:lstStyle/>
-          <a:p>
-            <a:pPr algn="ctr"/>
-            <a:endParaRPr/>
-          </a:p>
-        </p:txBody>
-      </p:sp>
-      <p:sp>
-        <p:nvSpPr>
-          <p:cNvPr id="23" name="TextBox 22"/>
-          <p:cNvSpPr txBox="1"/>
-          <p:nvPr/>
-        </p:nvSpPr>
-        <p:spPr>
-          <a:xfrm>
-            <a:off x="1143000" y="5074920"/>
-            <a:ext cx="2834640" cy="777240"/>
-          </a:xfrm>
-          <a:prstGeom prst="rect">
-            <a:avLst/>
-          </a:prstGeom>
-          <a:noFill/>
-        </p:spPr>
-        <p:txBody>
-          <a:bodyPr wrap="square" lIns="45720" tIns="18288" rIns="45720" bIns="18288" anchor="t">
-            <a:spAutoFit/>
-          </a:bodyPr>
-          <a:lstStyle/>
-          <a:p>
-            <a:pPr algn="l">
-              <a:spcBef>
-                <a:spcPts val="0"/>
-              </a:spcBef>
-              <a:spcAft>
-                <a:spcPts val="300"/>
-              </a:spcAft>
-            </a:pPr>
-            <a:r>
-              <a:rPr sz="1450" b="1" i="0">
-                <a:solidFill>
-                  <a:srgbClr val="F1EDE6"/>
-                </a:solidFill>
-                <a:latin typeface="Trebuchet MS"/>
-              </a:rPr>
-              <a:t>Benachrichtigungen</a:t>
-            </a:r>
-          </a:p>
-          <a:p>
-            <a:pPr algn="l">
-              <a:spcBef>
-                <a:spcPts val="0"/>
-              </a:spcBef>
-              <a:spcAft>
-                <a:spcPts val="0"/>
-              </a:spcAft>
-            </a:pPr>
-            <a:r>
-              <a:rPr sz="1150" b="0" i="0">
-                <a:solidFill>
-                  <a:srgbClr val="B9AFD6"/>
-                </a:solidFill>
-                <a:latin typeface="Trebuchet MS"/>
-              </a:rPr>
-              <a:t>Hinweise zu Änderungen, Erwähnungen &amp; Terminen.</a:t>
-            </a:r>
-          </a:p>
-        </p:txBody>
-      </p:sp>
-      <p:sp>
-        <p:nvSpPr>
-          <p:cNvPr id="24" name="Rounded Rectangle 23"/>
-          <p:cNvSpPr/>
-          <p:nvPr/>
-        </p:nvSpPr>
-        <p:spPr>
-          <a:xfrm>
-            <a:off x="4462272" y="4251960"/>
-            <a:ext cx="3383280" cy="1645920"/>
-          </a:xfrm>
-          <a:prstGeom prst="roundRect">
-            <a:avLst>
-              <a:gd name="adj" fmla="val 8000"/>
-            </a:avLst>
-          </a:prstGeom>
-          <a:solidFill>
-            <a:srgbClr val="3A2F66"/>
-          </a:solidFill>
-          <a:ln>
-            <a:noFill/>
-          </a:ln>
-          <a:effectLst/>
-        </p:spPr>
-        <p:style>
-          <a:lnRef idx="1">
-            <a:schemeClr val="accent1"/>
-          </a:lnRef>
-          <a:fillRef idx="3">
-            <a:schemeClr val="accent1"/>
-          </a:fillRef>
-          <a:effectRef idx="2">
-            <a:schemeClr val="accent1"/>
-          </a:effectRef>
-          <a:fontRef idx="minor">
-            <a:schemeClr val="lt1"/>
-          </a:fontRef>
-        </p:style>
-        <p:txBody>
-          <a:bodyPr rtlCol="0" anchor="ctr"/>
-          <a:lstStyle/>
-          <a:p>
-            <a:pPr algn="ctr"/>
-            <a:endParaRPr/>
-          </a:p>
-        </p:txBody>
-      </p:sp>
-      <p:sp>
-        <p:nvSpPr>
-          <p:cNvPr id="25" name="Oval 24"/>
-          <p:cNvSpPr/>
-          <p:nvPr/>
-        </p:nvSpPr>
-        <p:spPr>
-          <a:xfrm>
-            <a:off x="4736592" y="4526280"/>
-            <a:ext cx="411480" cy="411480"/>
-          </a:xfrm>
-          <a:prstGeom prst="ellipse">
-            <a:avLst/>
-          </a:prstGeom>
-          <a:solidFill>
-            <a:srgbClr val="76E3F1"/>
-          </a:solidFill>
-          <a:ln>
-            <a:noFill/>
-          </a:ln>
-          <a:effectLst/>
-        </p:spPr>
-        <p:style>
-          <a:lnRef idx="1">
-            <a:schemeClr val="accent1"/>
-          </a:lnRef>
-          <a:fillRef idx="3">
-            <a:schemeClr val="accent1"/>
-          </a:fillRef>
-          <a:effectRef idx="2">
-            <a:schemeClr val="accent1"/>
-          </a:effectRef>
-          <a:fontRef idx="minor">
-            <a:schemeClr val="lt1"/>
-          </a:fontRef>
-        </p:style>
-        <p:txBody>
-          <a:bodyPr rtlCol="0" anchor="ctr"/>
-          <a:lstStyle/>
-          <a:p>
-            <a:pPr algn="ctr"/>
-            <a:endParaRPr/>
-          </a:p>
-        </p:txBody>
-      </p:sp>
-      <p:sp>
-        <p:nvSpPr>
-          <p:cNvPr id="26" name="TextBox 25"/>
-          <p:cNvSpPr txBox="1"/>
-          <p:nvPr/>
-        </p:nvSpPr>
-        <p:spPr>
-          <a:xfrm>
-            <a:off x="4736592" y="5074920"/>
-            <a:ext cx="2834640" cy="652486"/>
-          </a:xfrm>
-          <a:prstGeom prst="rect">
-            <a:avLst/>
-          </a:prstGeom>
-          <a:noFill/>
-        </p:spPr>
-        <p:txBody>
-          <a:bodyPr wrap="square" lIns="45720" tIns="18288" rIns="45720" bIns="18288" anchor="t">
-            <a:spAutoFit/>
-          </a:bodyPr>
-          <a:lstStyle/>
-          <a:p>
-            <a:pPr algn="l">
-              <a:spcBef>
-                <a:spcPts val="0"/>
-              </a:spcBef>
-              <a:spcAft>
-                <a:spcPts val="300"/>
-              </a:spcAft>
-            </a:pPr>
-            <a:r>
-              <a:rPr lang="de-AT" sz="1450" b="1" i="0" dirty="0">
-                <a:solidFill>
-                  <a:srgbClr val="F1EDE6"/>
-                </a:solidFill>
-                <a:latin typeface="Trebuchet MS"/>
-              </a:rPr>
-              <a:t>Administration</a:t>
-            </a:r>
-            <a:endParaRPr sz="1450" b="1" i="0" dirty="0">
-              <a:solidFill>
-                <a:srgbClr val="F1EDE6"/>
-              </a:solidFill>
-              <a:latin typeface="Trebuchet MS"/>
-            </a:endParaRPr>
-          </a:p>
-          <a:p>
-            <a:pPr algn="l">
-              <a:spcBef>
-                <a:spcPts val="0"/>
-              </a:spcBef>
-              <a:spcAft>
-                <a:spcPts val="0"/>
-              </a:spcAft>
-            </a:pPr>
-            <a:r>
-              <a:rPr lang="de-AT" sz="1150" b="0" i="0" dirty="0">
-                <a:solidFill>
-                  <a:srgbClr val="B9AFD6"/>
-                </a:solidFill>
-                <a:latin typeface="Trebuchet MS"/>
-              </a:rPr>
-              <a:t>Dashboard und Toolseit</a:t>
-            </a:r>
-            <a:r>
-              <a:rPr lang="de-AT" sz="1150" dirty="0">
-                <a:solidFill>
-                  <a:srgbClr val="B9AFD6"/>
-                </a:solidFill>
-                <a:latin typeface="Trebuchet MS"/>
-              </a:rPr>
-              <a:t>e für administrative Tätigkeiten</a:t>
-            </a:r>
-            <a:endParaRPr sz="1150" b="0" i="0" dirty="0">
-              <a:solidFill>
-                <a:srgbClr val="B9AFD6"/>
-              </a:solidFill>
-              <a:latin typeface="Trebuchet MS"/>
-            </a:endParaRPr>
-          </a:p>
-        </p:txBody>
-      </p:sp>
-      <p:sp>
-        <p:nvSpPr>
-          <p:cNvPr id="27" name="Rounded Rectangle 26"/>
-          <p:cNvSpPr/>
-          <p:nvPr/>
-        </p:nvSpPr>
-        <p:spPr>
-          <a:xfrm>
-            <a:off x="8055864" y="4251960"/>
-            <a:ext cx="3383280" cy="1645920"/>
-          </a:xfrm>
-          <a:prstGeom prst="roundRect">
-            <a:avLst>
-              <a:gd name="adj" fmla="val 8000"/>
-            </a:avLst>
-          </a:prstGeom>
-          <a:solidFill>
-            <a:srgbClr val="3A2F66"/>
-          </a:solidFill>
-          <a:ln>
-            <a:noFill/>
-          </a:ln>
-          <a:effectLst/>
-        </p:spPr>
-        <p:style>
-          <a:lnRef idx="1">
-            <a:schemeClr val="accent1"/>
-          </a:lnRef>
-          <a:fillRef idx="3">
-            <a:schemeClr val="accent1"/>
-          </a:fillRef>
-          <a:effectRef idx="2">
-            <a:schemeClr val="accent1"/>
-          </a:effectRef>
-          <a:fontRef idx="minor">
-            <a:schemeClr val="lt1"/>
-          </a:fontRef>
-        </p:style>
-        <p:txBody>
-          <a:bodyPr rtlCol="0" anchor="ctr"/>
-          <a:lstStyle/>
-          <a:p>
-            <a:pPr algn="ctr"/>
-            <a:endParaRPr/>
-          </a:p>
-        </p:txBody>
-      </p:sp>
-      <p:sp>
-        <p:nvSpPr>
-          <p:cNvPr id="28" name="Oval 27"/>
-          <p:cNvSpPr/>
-          <p:nvPr/>
-        </p:nvSpPr>
-        <p:spPr>
-          <a:xfrm>
-            <a:off x="8330184" y="4526280"/>
-            <a:ext cx="411480" cy="411480"/>
-          </a:xfrm>
-          <a:prstGeom prst="ellipse">
-            <a:avLst/>
-          </a:prstGeom>
-          <a:solidFill>
-            <a:srgbClr val="008040"/>
-          </a:solidFill>
-          <a:ln>
-            <a:noFill/>
-          </a:ln>
-          <a:effectLst/>
-        </p:spPr>
-        <p:style>
-          <a:lnRef idx="1">
-            <a:schemeClr val="accent1"/>
-          </a:lnRef>
-          <a:fillRef idx="3">
-            <a:schemeClr val="accent1"/>
-          </a:fillRef>
-          <a:effectRef idx="2">
-            <a:schemeClr val="accent1"/>
-          </a:effectRef>
-          <a:fontRef idx="minor">
-            <a:schemeClr val="lt1"/>
-          </a:fontRef>
-        </p:style>
-        <p:txBody>
-          <a:bodyPr rtlCol="0" anchor="ctr"/>
-          <a:lstStyle/>
-          <a:p>
-            <a:pPr algn="ctr"/>
-            <a:endParaRPr/>
-          </a:p>
-        </p:txBody>
-      </p:sp>
-      <p:sp>
-        <p:nvSpPr>
-          <p:cNvPr id="29" name="TextBox 28"/>
-          <p:cNvSpPr txBox="1"/>
-          <p:nvPr/>
-        </p:nvSpPr>
-        <p:spPr>
-          <a:xfrm>
-            <a:off x="8330184" y="5074920"/>
-            <a:ext cx="2834640" cy="777240"/>
-          </a:xfrm>
-          <a:prstGeom prst="rect">
-            <a:avLst/>
-          </a:prstGeom>
-          <a:noFill/>
-        </p:spPr>
-        <p:txBody>
-          <a:bodyPr wrap="square" lIns="45720" tIns="18288" rIns="45720" bIns="18288" anchor="t">
-            <a:spAutoFit/>
-          </a:bodyPr>
-          <a:lstStyle/>
-          <a:p>
-            <a:pPr algn="l">
-              <a:spcBef>
-                <a:spcPts val="0"/>
-              </a:spcBef>
-              <a:spcAft>
-                <a:spcPts val="300"/>
-              </a:spcAft>
-            </a:pPr>
-            <a:r>
-              <a:rPr sz="1450" b="1" i="0">
-                <a:solidFill>
-                  <a:srgbClr val="F1EDE6"/>
-                </a:solidFill>
-                <a:latin typeface="Trebuchet MS"/>
-              </a:rPr>
-              <a:t>Mehr Themes</a:t>
-            </a:r>
-          </a:p>
-          <a:p>
-            <a:pPr algn="l">
-              <a:spcBef>
-                <a:spcPts val="0"/>
-              </a:spcBef>
-              <a:spcAft>
-                <a:spcPts val="0"/>
-              </a:spcAft>
-            </a:pPr>
-            <a:r>
-              <a:rPr sz="1150" b="0" i="0">
-                <a:solidFill>
-                  <a:srgbClr val="B9AFD6"/>
-                </a:solidFill>
-                <a:latin typeface="Trebuchet MS"/>
-              </a:rPr>
-              <a:t>Das stimmungsbasierte UI weiter ausbauen.</a:t>
-            </a:r>
-          </a:p>
-        </p:txBody>
-      </p:sp>
-    </p:spTree>
-  </p:cSld>
-  <p:clrMapOvr>
-    <a:masterClrMapping/>
-  </p:clrMapOvr>
-</p:sld>
-</file>
-
-<file path=ppt/slides/slide18.xml><?xml version="1.0" encoding="utf-8"?>
-<p:sld xmlns:a="http://schemas.openxmlformats.org/drawingml/2006/main" xmlns:r="http://schemas.openxmlformats.org/officeDocument/2006/relationships" xmlns:p="http://schemas.openxmlformats.org/presentationml/2006/main">
-  <p:cSld>
-    <p:spTree>
-      <p:nvGrpSpPr>
-        <p:cNvPr id="1" name=""/>
-        <p:cNvGrpSpPr/>
-        <p:nvPr/>
-      </p:nvGrpSpPr>
-      <p:grpSpPr>
-        <a:xfrm>
-          <a:off x="0" y="0"/>
-          <a:ext cx="0" cy="0"/>
-          <a:chOff x="0" y="0"/>
-          <a:chExt cx="0" cy="0"/>
-        </a:xfrm>
-      </p:grpSpPr>
-      <p:sp>
-        <p:nvSpPr>
-          <p:cNvPr id="2" name="Rectangle 1"/>
-          <p:cNvSpPr/>
-          <p:nvPr/>
-        </p:nvSpPr>
-        <p:spPr>
-          <a:xfrm>
-            <a:off x="0" y="0"/>
-            <a:ext cx="12191695" cy="6858000"/>
-          </a:xfrm>
-          <a:prstGeom prst="rect">
-            <a:avLst/>
-          </a:prstGeom>
-          <a:gradFill>
-            <a:gsLst>
-              <a:gs pos="0">
-                <a:srgbClr val="3A2E66"/>
-              </a:gs>
-              <a:gs pos="100000">
-                <a:srgbClr val="241C44"/>
-              </a:gs>
-            </a:gsLst>
-            <a:lin ang="5400000" scaled="1"/>
-          </a:gradFill>
-          <a:ln>
-            <a:noFill/>
-          </a:ln>
-          <a:effectLst/>
-        </p:spPr>
-        <p:style>
-          <a:lnRef idx="1">
-            <a:schemeClr val="accent1"/>
-          </a:lnRef>
-          <a:fillRef idx="3">
-            <a:schemeClr val="accent1"/>
-          </a:fillRef>
-          <a:effectRef idx="2">
-            <a:schemeClr val="accent1"/>
-          </a:effectRef>
-          <a:fontRef idx="minor">
-            <a:schemeClr val="lt1"/>
-          </a:fontRef>
-        </p:style>
-        <p:txBody>
-          <a:bodyPr rtlCol="0" anchor="ctr"/>
-          <a:lstStyle/>
-          <a:p>
-            <a:pPr algn="ctr"/>
-            <a:endParaRPr/>
-          </a:p>
-        </p:txBody>
-      </p:sp>
-      <p:sp>
-        <p:nvSpPr>
-          <p:cNvPr id="3" name="Oval 2"/>
-          <p:cNvSpPr/>
-          <p:nvPr/>
-        </p:nvSpPr>
-        <p:spPr>
-          <a:xfrm>
-            <a:off x="3291840" y="-2377440"/>
-            <a:ext cx="5486400" cy="4572000"/>
-          </a:xfrm>
-          <a:prstGeom prst="ellipse">
-            <a:avLst/>
-          </a:prstGeom>
-          <a:solidFill>
-            <a:srgbClr val="FFA228">
-              <a:alpha val="10000"/>
-            </a:srgbClr>
-          </a:solidFill>
-          <a:ln>
-            <a:noFill/>
-          </a:ln>
-          <a:effectLst/>
-        </p:spPr>
-        <p:style>
-          <a:lnRef idx="1">
-            <a:schemeClr val="accent1"/>
-          </a:lnRef>
-          <a:fillRef idx="3">
-            <a:schemeClr val="accent1"/>
-          </a:fillRef>
-          <a:effectRef idx="2">
-            <a:schemeClr val="accent1"/>
-          </a:effectRef>
-          <a:fontRef idx="minor">
-            <a:schemeClr val="lt1"/>
-          </a:fontRef>
-        </p:style>
-        <p:txBody>
-          <a:bodyPr rtlCol="0" anchor="ctr"/>
-          <a:lstStyle/>
-          <a:p>
-            <a:pPr algn="ctr"/>
-            <a:endParaRPr/>
-          </a:p>
-        </p:txBody>
-      </p:sp>
-      <p:sp>
-        <p:nvSpPr>
-          <p:cNvPr id="4" name="Oval 3"/>
-          <p:cNvSpPr/>
-          <p:nvPr/>
-        </p:nvSpPr>
-        <p:spPr>
-          <a:xfrm>
-            <a:off x="-2011680" y="4023360"/>
-            <a:ext cx="4572000" cy="4572000"/>
-          </a:xfrm>
-          <a:prstGeom prst="ellipse">
-            <a:avLst/>
-          </a:prstGeom>
-          <a:solidFill>
-            <a:srgbClr val="44B9C9">
-              <a:alpha val="8000"/>
-            </a:srgbClr>
-          </a:solidFill>
-          <a:ln>
-            <a:noFill/>
-          </a:ln>
-          <a:effectLst/>
-        </p:spPr>
-        <p:style>
-          <a:lnRef idx="1">
-            <a:schemeClr val="accent1"/>
-          </a:lnRef>
-          <a:fillRef idx="3">
-            <a:schemeClr val="accent1"/>
-          </a:fillRef>
-          <a:effectRef idx="2">
-            <a:schemeClr val="accent1"/>
-          </a:effectRef>
-          <a:fontRef idx="minor">
-            <a:schemeClr val="lt1"/>
-          </a:fontRef>
-        </p:style>
-        <p:txBody>
-          <a:bodyPr rtlCol="0" anchor="ctr"/>
-          <a:lstStyle/>
-          <a:p>
-            <a:pPr algn="ctr"/>
-            <a:endParaRPr/>
-          </a:p>
-        </p:txBody>
-      </p:sp>
-      <p:sp>
-        <p:nvSpPr>
           <p:cNvPr id="5" name="Oval 4"/>
           <p:cNvSpPr/>
           <p:nvPr/>
@@ -16701,8 +16215,8 @@
         </p:nvSpPr>
         <p:spPr>
           <a:xfrm>
-            <a:off x="1463040" y="1783080"/>
-            <a:ext cx="9509760" cy="1463040"/>
+            <a:off x="1463040" y="2157579"/>
+            <a:ext cx="9509760" cy="714042"/>
           </a:xfrm>
           <a:prstGeom prst="rect">
             <a:avLst/>
@@ -16724,16 +16238,52 @@
               </a:spcAft>
             </a:pPr>
             <a:r>
-              <a:rPr sz="2200" b="0" i="0">
+              <a:rPr sz="2200" b="0" i="0" dirty="0">
                 <a:solidFill>
                   <a:srgbClr val="F1EDE6"/>
                 </a:solidFill>
                 <a:latin typeface="Trebuchet MS"/>
               </a:rPr>
-              <a:t>Eine Web-App, die Planungs- und Strukturierungs-Werkzeuge </a:t>
-            </a:r>
-            <a:r>
-              <a:rPr sz="2200" b="1" i="0">
+              <a:t>Eine Web-App, die </a:t>
+            </a:r>
+            <a:r>
+              <a:rPr sz="2200" b="0" i="0" dirty="0" err="1">
+                <a:solidFill>
+                  <a:srgbClr val="F1EDE6"/>
+                </a:solidFill>
+                <a:latin typeface="Trebuchet MS"/>
+              </a:rPr>
+              <a:t>Planungs</a:t>
+            </a:r>
+            <a:r>
+              <a:rPr sz="2200" b="0" i="0" dirty="0">
+                <a:solidFill>
+                  <a:srgbClr val="F1EDE6"/>
+                </a:solidFill>
+                <a:latin typeface="Trebuchet MS"/>
+              </a:rPr>
+              <a:t>- und </a:t>
+            </a:r>
+            <a:r>
+              <a:rPr sz="2200" b="0" i="0" dirty="0" err="1">
+                <a:solidFill>
+                  <a:srgbClr val="F1EDE6"/>
+                </a:solidFill>
+                <a:latin typeface="Trebuchet MS"/>
+              </a:rPr>
+              <a:t>Strukturierungs-Werkzeuge</a:t>
+            </a:r>
+            <a:r>
+              <a:rPr sz="2200" b="0" i="0" dirty="0">
+                <a:solidFill>
+                  <a:srgbClr val="F1EDE6"/>
+                </a:solidFill>
+                <a:latin typeface="Trebuchet MS"/>
+              </a:rPr>
+              <a:t> </a:t>
+            </a:r>
+            <a:r>
+              <a:rPr sz="2200" b="1" i="0" dirty="0" err="1">
                 <a:solidFill>
                   <a:srgbClr val="76E3F1"/>
                 </a:solidFill>
@@ -16742,7 +16292,7 @@
               <a:t>bündelt</a:t>
             </a:r>
             <a:r>
-              <a:rPr sz="2200" b="0" i="0">
+              <a:rPr sz="2200" b="0" i="0" dirty="0">
                 <a:solidFill>
                   <a:srgbClr val="F1EDE6"/>
                 </a:solidFill>
@@ -16751,22 +16301,76 @@
               <a:t> und Teams </a:t>
             </a:r>
             <a:r>
-              <a:rPr sz="2200" b="1" i="0">
+              <a:rPr sz="2200" b="1" i="0" dirty="0">
                 <a:solidFill>
                   <a:srgbClr val="FFA228"/>
                 </a:solidFill>
                 <a:latin typeface="Trebuchet MS"/>
               </a:rPr>
-              <a:t>in Echtzeit</a:t>
-            </a:r>
-            <a:r>
-              <a:rPr sz="2200" b="0" i="0">
+              <a:t>in </a:t>
+            </a:r>
+            <a:r>
+              <a:rPr sz="2200" b="1" i="0" dirty="0" err="1">
+                <a:solidFill>
+                  <a:srgbClr val="FFA228"/>
+                </a:solidFill>
+                <a:latin typeface="Trebuchet MS"/>
+              </a:rPr>
+              <a:t>Echtzeit</a:t>
+            </a:r>
+            <a:r>
+              <a:rPr sz="2200" b="0" i="0" dirty="0">
                 <a:solidFill>
                   <a:srgbClr val="F1EDE6"/>
                 </a:solidFill>
                 <a:latin typeface="Trebuchet MS"/>
               </a:rPr>
-              <a:t> zusammenarbeiten laesst.</a:t>
+              <a:t> </a:t>
+            </a:r>
+            <a:r>
+              <a:rPr sz="2200" b="0" i="0" dirty="0" err="1">
+                <a:solidFill>
+                  <a:srgbClr val="F1EDE6"/>
+                </a:solidFill>
+                <a:latin typeface="Trebuchet MS"/>
+              </a:rPr>
+              <a:t>zusammenarbeiten</a:t>
+            </a:r>
+            <a:r>
+              <a:rPr sz="2200" b="0" i="0" dirty="0">
+                <a:solidFill>
+                  <a:srgbClr val="F1EDE6"/>
+                </a:solidFill>
+                <a:latin typeface="Trebuchet MS"/>
+              </a:rPr>
+              <a:t> l</a:t>
+            </a:r>
+            <a:r>
+              <a:rPr lang="de-AT" sz="2200" b="0" i="0" dirty="0">
+                <a:solidFill>
+                  <a:srgbClr val="F1EDE6"/>
+                </a:solidFill>
+                <a:latin typeface="Trebuchet MS"/>
+              </a:rPr>
+              <a:t>ä</a:t>
+            </a:r>
+            <a:r>
+              <a:rPr sz="2200" b="0" i="0" dirty="0" err="1">
+                <a:solidFill>
+                  <a:srgbClr val="F1EDE6"/>
+                </a:solidFill>
+                <a:latin typeface="Trebuchet MS"/>
+              </a:rPr>
+              <a:t>sst</a:t>
+            </a:r>
+            <a:r>
+              <a:rPr sz="2200" b="0" i="0" dirty="0">
+                <a:solidFill>
+                  <a:srgbClr val="F1EDE6"/>
+                </a:solidFill>
+                <a:latin typeface="Trebuchet MS"/>
+              </a:rPr>
+              <a:t>.</a:t>
             </a:r>
           </a:p>
         </p:txBody>
@@ -16872,7 +16476,7 @@
         <p:spPr>
           <a:xfrm>
             <a:off x="1188720" y="4617720"/>
-            <a:ext cx="2743200" cy="1188720"/>
+            <a:ext cx="2743200" cy="796115"/>
           </a:xfrm>
           <a:prstGeom prst="rect">
             <a:avLst/>
@@ -16894,14 +16498,38 @@
               </a:spcAft>
             </a:pPr>
             <a:r>
-              <a:rPr sz="1900" b="1" i="0">
+              <a:rPr sz="1900" b="1" i="0" dirty="0">
                 <a:solidFill>
                   <a:srgbClr val="F1EDE6"/>
                 </a:solidFill>
                 <a:latin typeface="Trebuchet MS"/>
               </a:rPr>
-              <a:t>Persoenlich</a:t>
-            </a:r>
+              <a:t>Pers</a:t>
+            </a:r>
+            <a:r>
+              <a:rPr lang="de-AT" sz="1900" b="1" i="0" dirty="0">
+                <a:solidFill>
+                  <a:srgbClr val="F1EDE6"/>
+                </a:solidFill>
+                <a:latin typeface="Trebuchet MS"/>
+              </a:rPr>
+              <a:t>ö</a:t>
+            </a:r>
+            <a:r>
+              <a:rPr sz="1900" b="1" i="0" dirty="0" err="1">
+                <a:solidFill>
+                  <a:srgbClr val="F1EDE6"/>
+                </a:solidFill>
+                <a:latin typeface="Trebuchet MS"/>
+              </a:rPr>
+              <a:t>nlich</a:t>
+            </a:r>
+            <a:endParaRPr sz="1900" b="1" i="0" dirty="0">
+              <a:solidFill>
+                <a:srgbClr val="F1EDE6"/>
+              </a:solidFill>
+              <a:latin typeface="Trebuchet MS"/>
+            </a:endParaRPr>
           </a:p>
           <a:p>
             <a:pPr algn="l">
@@ -16913,14 +16541,56 @@
               </a:spcAft>
             </a:pPr>
             <a:r>
-              <a:rPr sz="1350" b="0" i="0">
+              <a:rPr sz="1350" b="0" i="0" dirty="0" err="1">
                 <a:solidFill>
                   <a:srgbClr val="B9AFD6"/>
                 </a:solidFill>
                 <a:latin typeface="Trebuchet MS"/>
               </a:rPr>
-              <a:t>Eigener privater Space für den Alltag</a:t>
-            </a:r>
+              <a:t>Eigener</a:t>
+            </a:r>
+            <a:r>
+              <a:rPr sz="1350" b="0" i="0" dirty="0">
+                <a:solidFill>
+                  <a:srgbClr val="B9AFD6"/>
+                </a:solidFill>
+                <a:latin typeface="Trebuchet MS"/>
+              </a:rPr>
+              <a:t> </a:t>
+            </a:r>
+            <a:r>
+              <a:rPr sz="1350" b="0" i="0" dirty="0" err="1">
+                <a:solidFill>
+                  <a:srgbClr val="B9AFD6"/>
+                </a:solidFill>
+                <a:latin typeface="Trebuchet MS"/>
+              </a:rPr>
+              <a:t>privater</a:t>
+            </a:r>
+            <a:r>
+              <a:rPr sz="1350" b="0" i="0" dirty="0">
+                <a:solidFill>
+                  <a:srgbClr val="B9AFD6"/>
+                </a:solidFill>
+                <a:latin typeface="Trebuchet MS"/>
+              </a:rPr>
+              <a:t> Space für den </a:t>
+            </a:r>
+            <a:r>
+              <a:rPr sz="1350" b="0" i="0" dirty="0" err="1">
+                <a:solidFill>
+                  <a:srgbClr val="B9AFD6"/>
+                </a:solidFill>
+                <a:latin typeface="Trebuchet MS"/>
+              </a:rPr>
+              <a:t>Alltag</a:t>
+            </a:r>
+            <a:endParaRPr sz="1350" b="0" i="0" dirty="0">
+              <a:solidFill>
+                <a:srgbClr val="B9AFD6"/>
+              </a:solidFill>
+              <a:latin typeface="Trebuchet MS"/>
+            </a:endParaRPr>
           </a:p>
         </p:txBody>
       </p:sp>
